--- a/content/05-teaching-resources/slides/digital-support/02-domains-email-and-remote-access.pptx
+++ b/content/05-teaching-resources/slides/digital-support/02-domains-email-and-remote-access.pptx
@@ -10,11 +10,17 @@
     <p:sldId id="258" r:id="rId9"/>
     <p:sldId id="259" r:id="rId10"/>
     <p:sldId id="260" r:id="rId11"/>
-    <p:sldId id="261" r:id="rId12"/>
-    <p:sldId id="262" r:id="rId13"/>
+    <p:sldId id="261" r:id="rId13"/>
+    <p:sldId id="262" r:id="rId14"/>
     <p:sldId id="263" r:id="rId15"/>
     <p:sldId id="264" r:id="rId16"/>
     <p:sldId id="265" r:id="rId17"/>
+    <p:sldId id="266" r:id="rId18"/>
+    <p:sldId id="267" r:id="rId19"/>
+    <p:sldId id="268" r:id="rId20"/>
+    <p:sldId id="269" r:id="rId21"/>
+    <p:sldId id="270" r:id="rId22"/>
+    <p:sldId id="271" r:id="rId23"/>
   </p:sldIdLst>
   <p:sldSz cx="12191695" cy="6858000" type="screen4x3"/>
   <p:notesSz cx="6858000" cy="9144000"/>
@@ -511,7 +517,22 @@
           <a:lstStyle/>
           <a:p>
             <a:r>
-              <a:t>Give students a few minutes to answer on mini whiteboards or paper, then reveal the answers on the next slide.</a:t>
+              <a:t>Answers:</a:t>
+            </a:r>
+          </a:p>
+          <a:p>
+            <a:r>
+              <a:t>1. Pushes settings to users and computers in OUs.</a:t>
+            </a:r>
+          </a:p>
+          <a:p>
+            <a:r>
+              <a:t>2. Digital certificates.</a:t>
+            </a:r>
+          </a:p>
+          <a:p>
+            <a:r>
+              <a:t>3. To manage users and computers centrally.</a:t>
             </a:r>
           </a:p>
         </p:txBody>
@@ -581,7 +602,22 @@
           <a:lstStyle/>
           <a:p>
             <a:r>
-              <a:t>Talk through any answers the class found difficult.</a:t>
+              <a:t>Answers:</a:t>
+            </a:r>
+          </a:p>
+          <a:p>
+            <a:r>
+              <a:t>1. SMTP.</a:t>
+            </a:r>
+          </a:p>
+          <a:p>
+            <a:r>
+              <a:t>2. It keeps mail on the server and syncs it.</a:t>
+            </a:r>
+          </a:p>
+          <a:p>
+            <a:r>
+              <a:t>3. A DNS record saying which server receives a domain's email.</a:t>
             </a:r>
           </a:p>
         </p:txBody>
@@ -607,6 +643,231 @@
 </file>
 
 <file path=ppt/notesSlides/notesSlide3.xml><?xml version="1.0" encoding="utf-8"?>
+<p:notes xmlns:a="http://schemas.openxmlformats.org/drawingml/2006/main" xmlns:p="http://schemas.openxmlformats.org/presentationml/2006/main" xmlns:r="http://schemas.openxmlformats.org/officeDocument/2006/relationships">
+  <p:cSld>
+    <p:spTree>
+      <p:nvGrpSpPr>
+        <p:cNvPr id="1" name=""/>
+        <p:cNvGrpSpPr/>
+        <p:nvPr/>
+      </p:nvGrpSpPr>
+      <p:grpSpPr>
+        <a:xfrm>
+          <a:off x="0" y="0"/>
+          <a:ext cx="0" cy="0"/>
+          <a:chOff x="0" y="0"/>
+          <a:chExt cx="0" cy="0"/>
+        </a:xfrm>
+      </p:grpSpPr>
+      <p:sp>
+        <p:nvSpPr>
+          <p:cNvPr id="2" name="Slide Image Placeholder 1"/>
+          <p:cNvSpPr>
+            <a:spLocks noGrp="1"/>
+          </p:cNvSpPr>
+          <p:nvPr>
+            <p:ph type="sldImg" idx="2"/>
+          </p:nvPr>
+        </p:nvSpPr>
+        <p:spPr/>
+      </p:sp>
+      <p:sp>
+        <p:nvSpPr>
+          <p:cNvPr id="3" name="Notes Placeholder 2"/>
+          <p:cNvSpPr>
+            <a:spLocks noGrp="1"/>
+          </p:cNvSpPr>
+          <p:nvPr>
+            <p:ph type="body" idx="3" sz="quarter"/>
+          </p:nvPr>
+        </p:nvSpPr>
+        <p:spPr/>
+        <p:txBody>
+          <a:bodyPr/>
+          <a:lstStyle/>
+          <a:p>
+            <a:r>
+              <a:t>Answers:</a:t>
+            </a:r>
+          </a:p>
+          <a:p>
+            <a:r>
+              <a:t>1. All traffic between the device and the organisation's network.</a:t>
+            </a:r>
+          </a:p>
+          <a:p>
+            <a:r>
+              <a:t>2. Staff can keep working when they can't reach the office.</a:t>
+            </a:r>
+          </a:p>
+          <a:p>
+            <a:r>
+              <a:t>3. E.g. protocol, port, encryption, certificates, authentication.</a:t>
+            </a:r>
+          </a:p>
+        </p:txBody>
+      </p:sp>
+      <p:sp>
+        <p:nvSpPr>
+          <p:cNvPr id="4" name="Slide Number Placeholder 3"/>
+          <p:cNvSpPr>
+            <a:spLocks noGrp="1"/>
+          </p:cNvSpPr>
+          <p:nvPr>
+            <p:ph type="sldNum" idx="5" sz="quarter"/>
+          </p:nvPr>
+        </p:nvSpPr>
+        <p:spPr/>
+      </p:sp>
+    </p:spTree>
+  </p:cSld>
+  <p:clrMapOvr>
+    <a:masterClrMapping/>
+  </p:clrMapOvr>
+</p:notes>
+</file>
+
+<file path=ppt/notesSlides/notesSlide4.xml><?xml version="1.0" encoding="utf-8"?>
+<p:notes xmlns:a="http://schemas.openxmlformats.org/drawingml/2006/main" xmlns:p="http://schemas.openxmlformats.org/presentationml/2006/main" xmlns:r="http://schemas.openxmlformats.org/officeDocument/2006/relationships">
+  <p:cSld>
+    <p:spTree>
+      <p:nvGrpSpPr>
+        <p:cNvPr id="1" name=""/>
+        <p:cNvGrpSpPr/>
+        <p:nvPr/>
+      </p:nvGrpSpPr>
+      <p:grpSpPr>
+        <a:xfrm>
+          <a:off x="0" y="0"/>
+          <a:ext cx="0" cy="0"/>
+          <a:chOff x="0" y="0"/>
+          <a:chExt cx="0" cy="0"/>
+        </a:xfrm>
+      </p:grpSpPr>
+      <p:sp>
+        <p:nvSpPr>
+          <p:cNvPr id="2" name="Slide Image Placeholder 1"/>
+          <p:cNvSpPr>
+            <a:spLocks noGrp="1"/>
+          </p:cNvSpPr>
+          <p:nvPr>
+            <p:ph type="sldImg" idx="2"/>
+          </p:nvPr>
+        </p:nvSpPr>
+        <p:spPr/>
+      </p:sp>
+      <p:sp>
+        <p:nvSpPr>
+          <p:cNvPr id="3" name="Notes Placeholder 2"/>
+          <p:cNvSpPr>
+            <a:spLocks noGrp="1"/>
+          </p:cNvSpPr>
+          <p:nvPr>
+            <p:ph type="body" idx="3" sz="quarter"/>
+          </p:nvPr>
+        </p:nvSpPr>
+        <p:spPr/>
+        <p:txBody>
+          <a:bodyPr/>
+          <a:lstStyle/>
+          <a:p>
+            <a:r>
+              <a:t>Give students a few minutes to answer on mini whiteboards or paper, then reveal the answers on the next slide.</a:t>
+            </a:r>
+          </a:p>
+        </p:txBody>
+      </p:sp>
+      <p:sp>
+        <p:nvSpPr>
+          <p:cNvPr id="4" name="Slide Number Placeholder 3"/>
+          <p:cNvSpPr>
+            <a:spLocks noGrp="1"/>
+          </p:cNvSpPr>
+          <p:nvPr>
+            <p:ph type="sldNum" idx="5" sz="quarter"/>
+          </p:nvPr>
+        </p:nvSpPr>
+        <p:spPr/>
+      </p:sp>
+    </p:spTree>
+  </p:cSld>
+  <p:clrMapOvr>
+    <a:masterClrMapping/>
+  </p:clrMapOvr>
+</p:notes>
+</file>
+
+<file path=ppt/notesSlides/notesSlide5.xml><?xml version="1.0" encoding="utf-8"?>
+<p:notes xmlns:a="http://schemas.openxmlformats.org/drawingml/2006/main" xmlns:p="http://schemas.openxmlformats.org/presentationml/2006/main" xmlns:r="http://schemas.openxmlformats.org/officeDocument/2006/relationships">
+  <p:cSld>
+    <p:spTree>
+      <p:nvGrpSpPr>
+        <p:cNvPr id="1" name=""/>
+        <p:cNvGrpSpPr/>
+        <p:nvPr/>
+      </p:nvGrpSpPr>
+      <p:grpSpPr>
+        <a:xfrm>
+          <a:off x="0" y="0"/>
+          <a:ext cx="0" cy="0"/>
+          <a:chOff x="0" y="0"/>
+          <a:chExt cx="0" cy="0"/>
+        </a:xfrm>
+      </p:grpSpPr>
+      <p:sp>
+        <p:nvSpPr>
+          <p:cNvPr id="2" name="Slide Image Placeholder 1"/>
+          <p:cNvSpPr>
+            <a:spLocks noGrp="1"/>
+          </p:cNvSpPr>
+          <p:nvPr>
+            <p:ph type="sldImg" idx="2"/>
+          </p:nvPr>
+        </p:nvSpPr>
+        <p:spPr/>
+      </p:sp>
+      <p:sp>
+        <p:nvSpPr>
+          <p:cNvPr id="3" name="Notes Placeholder 2"/>
+          <p:cNvSpPr>
+            <a:spLocks noGrp="1"/>
+          </p:cNvSpPr>
+          <p:nvPr>
+            <p:ph type="body" idx="3" sz="quarter"/>
+          </p:nvPr>
+        </p:nvSpPr>
+        <p:spPr/>
+        <p:txBody>
+          <a:bodyPr/>
+          <a:lstStyle/>
+          <a:p>
+            <a:r>
+              <a:t>Talk through any answers the class found difficult.</a:t>
+            </a:r>
+          </a:p>
+        </p:txBody>
+      </p:sp>
+      <p:sp>
+        <p:nvSpPr>
+          <p:cNvPr id="4" name="Slide Number Placeholder 3"/>
+          <p:cNvSpPr>
+            <a:spLocks noGrp="1"/>
+          </p:cNvSpPr>
+          <p:nvPr>
+            <p:ph type="sldNum" idx="5" sz="quarter"/>
+          </p:nvPr>
+        </p:nvSpPr>
+        <p:spPr/>
+      </p:sp>
+    </p:spTree>
+  </p:cSld>
+  <p:clrMapOvr>
+    <a:masterClrMapping/>
+  </p:clrMapOvr>
+</p:notes>
+</file>
+
+<file path=ppt/notesSlides/notesSlide6.xml><?xml version="1.0" encoding="utf-8"?>
 <p:notes xmlns:a="http://schemas.openxmlformats.org/drawingml/2006/main" xmlns:p="http://schemas.openxmlformats.org/presentationml/2006/main" xmlns:r="http://schemas.openxmlformats.org/officeDocument/2006/relationships">
   <p:cSld>
     <p:spTree>
@@ -3982,6 +4243,4111 @@
     <p:bg>
       <p:bgPr>
         <a:solidFill>
+          <a:srgbClr val="FFFFFF"/>
+        </a:solidFill>
+        <a:effectLst/>
+      </p:bgPr>
+    </p:bg>
+    <p:spTree>
+      <p:nvGrpSpPr>
+        <p:cNvPr id="1" name=""/>
+        <p:cNvGrpSpPr/>
+        <p:nvPr/>
+      </p:nvGrpSpPr>
+      <p:grpSpPr/>
+      <p:sp>
+        <p:nvSpPr>
+          <p:cNvPr id="2" name="TextBox 1"/>
+          <p:cNvSpPr txBox="1"/>
+          <p:nvPr/>
+        </p:nvSpPr>
+        <p:spPr>
+          <a:xfrm>
+            <a:off x="548640" y="320040"/>
+            <a:ext cx="11094415" cy="274320"/>
+          </a:xfrm>
+          <a:prstGeom prst="rect">
+            <a:avLst/>
+          </a:prstGeom>
+          <a:noFill/>
+        </p:spPr>
+        <p:txBody>
+          <a:bodyPr wrap="square" anchor="t" lIns="0" rIns="0" tIns="0" bIns="0"/>
+          <a:lstStyle/>
+          <a:p>
+            <a:pPr algn="l"/>
+            <a:r>
+              <a:rPr sz="1100" b="1" i="0">
+                <a:solidFill>
+                  <a:srgbClr val="54595D"/>
+                </a:solidFill>
+                <a:latin typeface="Calibri"/>
+              </a:rPr>
+              <a:t>DIGITAL SUPPORT  ·  Digital Support Content Area 2</a:t>
+            </a:r>
+          </a:p>
+        </p:txBody>
+      </p:sp>
+      <p:sp>
+        <p:nvSpPr>
+          <p:cNvPr id="3" name="TextBox 2"/>
+          <p:cNvSpPr txBox="1"/>
+          <p:nvPr/>
+        </p:nvSpPr>
+        <p:spPr>
+          <a:xfrm>
+            <a:off x="548640" y="566928"/>
+            <a:ext cx="11094415" cy="822960"/>
+          </a:xfrm>
+          <a:prstGeom prst="rect">
+            <a:avLst/>
+          </a:prstGeom>
+          <a:noFill/>
+        </p:spPr>
+        <p:txBody>
+          <a:bodyPr wrap="square" anchor="ctr" lIns="0" rIns="0" tIns="0" bIns="0"/>
+          <a:lstStyle/>
+          <a:p>
+            <a:pPr algn="l"/>
+            <a:r>
+              <a:rPr sz="3200" b="1" i="0">
+                <a:solidFill>
+                  <a:srgbClr val="03306E"/>
+                </a:solidFill>
+                <a:latin typeface="Cambria"/>
+              </a:rPr>
+              <a:t>Remote access and VPNs</a:t>
+            </a:r>
+          </a:p>
+        </p:txBody>
+      </p:sp>
+      <p:sp>
+        <p:nvSpPr>
+          <p:cNvPr id="4" name="TextBox 3"/>
+          <p:cNvSpPr txBox="1"/>
+          <p:nvPr/>
+        </p:nvSpPr>
+        <p:spPr>
+          <a:xfrm>
+            <a:off x="548640" y="6446520"/>
+            <a:ext cx="8229600" cy="274320"/>
+          </a:xfrm>
+          <a:prstGeom prst="rect">
+            <a:avLst/>
+          </a:prstGeom>
+          <a:noFill/>
+        </p:spPr>
+        <p:txBody>
+          <a:bodyPr wrap="square" anchor="t" lIns="0" rIns="0" tIns="0" bIns="0"/>
+          <a:lstStyle/>
+          <a:p>
+            <a:pPr algn="l"/>
+            <a:r>
+              <a:rPr sz="1000" b="0" i="0">
+                <a:solidFill>
+                  <a:srgbClr val="54595D"/>
+                </a:solidFill>
+                <a:latin typeface="Calibri"/>
+              </a:rPr>
+              <a:t>Digital Support and Security T Level  ·  Domains, Email and Remote Access</a:t>
+            </a:r>
+          </a:p>
+        </p:txBody>
+      </p:sp>
+      <p:sp>
+        <p:nvSpPr>
+          <p:cNvPr id="5" name="TextBox 4"/>
+          <p:cNvSpPr txBox="1"/>
+          <p:nvPr/>
+        </p:nvSpPr>
+        <p:spPr>
+          <a:xfrm>
+            <a:off x="10728655" y="6446520"/>
+            <a:ext cx="914400" cy="274320"/>
+          </a:xfrm>
+          <a:prstGeom prst="rect">
+            <a:avLst/>
+          </a:prstGeom>
+          <a:noFill/>
+        </p:spPr>
+        <p:txBody>
+          <a:bodyPr wrap="square" anchor="t" lIns="0" rIns="0" tIns="0" bIns="0"/>
+          <a:lstStyle/>
+          <a:p>
+            <a:pPr algn="r"/>
+            <a:r>
+              <a:rPr sz="1000" b="0" i="0">
+                <a:solidFill>
+                  <a:srgbClr val="54595D"/>
+                </a:solidFill>
+                <a:latin typeface="Calibri"/>
+              </a:rPr>
+              <a:t>10</a:t>
+            </a:r>
+          </a:p>
+        </p:txBody>
+      </p:sp>
+      <p:sp>
+        <p:nvSpPr>
+          <p:cNvPr id="6" name="Rounded Rectangle 5"/>
+          <p:cNvSpPr/>
+          <p:nvPr/>
+        </p:nvSpPr>
+        <p:spPr>
+          <a:xfrm>
+            <a:off x="548640" y="1600200"/>
+            <a:ext cx="5364327" cy="640080"/>
+          </a:xfrm>
+          <a:prstGeom prst="roundRect">
+            <a:avLst>
+              <a:gd name="adj" fmla="val 15000"/>
+            </a:avLst>
+          </a:prstGeom>
+          <a:solidFill>
+            <a:srgbClr val="03306E"/>
+          </a:solidFill>
+          <a:ln>
+            <a:noFill/>
+          </a:ln>
+          <a:effectLst/>
+        </p:spPr>
+        <p:style>
+          <a:lnRef idx="1">
+            <a:schemeClr val="accent1"/>
+          </a:lnRef>
+          <a:fillRef idx="3">
+            <a:schemeClr val="accent1"/>
+          </a:fillRef>
+          <a:effectRef idx="2">
+            <a:schemeClr val="accent1"/>
+          </a:effectRef>
+          <a:fontRef idx="minor">
+            <a:schemeClr val="lt1"/>
+          </a:fontRef>
+        </p:style>
+        <p:txBody>
+          <a:bodyPr rtlCol="0" anchor="ctr"/>
+          <a:lstStyle/>
+          <a:p/>
+        </p:txBody>
+      </p:sp>
+      <p:sp>
+        <p:nvSpPr>
+          <p:cNvPr id="7" name="TextBox 6"/>
+          <p:cNvSpPr txBox="1"/>
+          <p:nvPr/>
+        </p:nvSpPr>
+        <p:spPr>
+          <a:xfrm>
+            <a:off x="777240" y="1600200"/>
+            <a:ext cx="4907127" cy="640080"/>
+          </a:xfrm>
+          <a:prstGeom prst="rect">
+            <a:avLst/>
+          </a:prstGeom>
+          <a:noFill/>
+        </p:spPr>
+        <p:txBody>
+          <a:bodyPr wrap="square" anchor="ctr" lIns="0" rIns="0" tIns="0" bIns="0"/>
+          <a:lstStyle/>
+          <a:p>
+            <a:pPr algn="l"/>
+            <a:r>
+              <a:rPr sz="2000" b="1" i="0">
+                <a:solidFill>
+                  <a:srgbClr val="FFFFFF"/>
+                </a:solidFill>
+                <a:latin typeface="Calibri"/>
+              </a:rPr>
+              <a:t>Remote access</a:t>
+            </a:r>
+          </a:p>
+        </p:txBody>
+      </p:sp>
+      <p:sp>
+        <p:nvSpPr>
+          <p:cNvPr id="8" name="Rounded Rectangle 7"/>
+          <p:cNvSpPr/>
+          <p:nvPr/>
+        </p:nvSpPr>
+        <p:spPr>
+          <a:xfrm>
+            <a:off x="548640" y="2377440"/>
+            <a:ext cx="5364327" cy="3794760"/>
+          </a:xfrm>
+          <a:prstGeom prst="roundRect">
+            <a:avLst>
+              <a:gd name="adj" fmla="val 4000"/>
+            </a:avLst>
+          </a:prstGeom>
+          <a:solidFill>
+            <a:srgbClr val="EAF3FF"/>
+          </a:solidFill>
+          <a:ln>
+            <a:noFill/>
+          </a:ln>
+          <a:effectLst/>
+        </p:spPr>
+        <p:style>
+          <a:lnRef idx="1">
+            <a:schemeClr val="accent1"/>
+          </a:lnRef>
+          <a:fillRef idx="3">
+            <a:schemeClr val="accent1"/>
+          </a:fillRef>
+          <a:effectRef idx="2">
+            <a:schemeClr val="accent1"/>
+          </a:effectRef>
+          <a:fontRef idx="minor">
+            <a:schemeClr val="lt1"/>
+          </a:fontRef>
+        </p:style>
+        <p:txBody>
+          <a:bodyPr rtlCol="0" anchor="ctr"/>
+          <a:lstStyle/>
+          <a:p/>
+        </p:txBody>
+      </p:sp>
+      <p:sp>
+        <p:nvSpPr>
+          <p:cNvPr id="9" name="TextBox 8"/>
+          <p:cNvSpPr txBox="1"/>
+          <p:nvPr/>
+        </p:nvSpPr>
+        <p:spPr>
+          <a:xfrm>
+            <a:off x="822959" y="2606040"/>
+            <a:ext cx="4815687" cy="3337560"/>
+          </a:xfrm>
+          <a:prstGeom prst="rect">
+            <a:avLst/>
+          </a:prstGeom>
+          <a:noFill/>
+        </p:spPr>
+        <p:txBody>
+          <a:bodyPr wrap="square" lIns="0" rIns="0" tIns="0" bIns="0">
+            <a:spAutoFit/>
+          </a:bodyPr>
+          <a:lstStyle/>
+          <a:p>
+            <a:pPr marL="274320" indent="-274320">
+              <a:spcAft>
+                <a:spcPts val="990"/>
+              </a:spcAft>
+              <a:buClr>
+                <a:srgbClr val="0645AD"/>
+              </a:buClr>
+              <a:buFont typeface="Arial"/>
+              <a:buChar char="•"/>
+            </a:pPr>
+            <a:r>
+              <a:rPr sz="2200" b="0">
+                <a:solidFill>
+                  <a:srgbClr val="202122"/>
+                </a:solidFill>
+                <a:latin typeface="Calibri"/>
+              </a:rPr>
+              <a:t>Work remotely as if on the network</a:t>
+            </a:r>
+          </a:p>
+          <a:p>
+            <a:pPr marL="274320" indent="-274320">
+              <a:spcAft>
+                <a:spcPts val="990"/>
+              </a:spcAft>
+              <a:buClr>
+                <a:srgbClr val="0645AD"/>
+              </a:buClr>
+              <a:buFont typeface="Arial"/>
+              <a:buChar char="•"/>
+            </a:pPr>
+            <a:r>
+              <a:rPr sz="2200" b="0">
+                <a:solidFill>
+                  <a:srgbClr val="202122"/>
+                </a:solidFill>
+                <a:latin typeface="Calibri"/>
+              </a:rPr>
+              <a:t>Supports home working in a BCP</a:t>
+            </a:r>
+          </a:p>
+          <a:p>
+            <a:pPr marL="274320" indent="-274320">
+              <a:spcAft>
+                <a:spcPts val="990"/>
+              </a:spcAft>
+              <a:buClr>
+                <a:srgbClr val="0645AD"/>
+              </a:buClr>
+              <a:buFont typeface="Arial"/>
+              <a:buChar char="•"/>
+            </a:pPr>
+            <a:r>
+              <a:rPr sz="2200" b="0">
+                <a:solidFill>
+                  <a:srgbClr val="202122"/>
+                </a:solidFill>
+                <a:latin typeface="Calibri"/>
+              </a:rPr>
+              <a:t>Desktop sharing</a:t>
+            </a:r>
+          </a:p>
+          <a:p>
+            <a:pPr marL="274320" indent="-274320">
+              <a:spcAft>
+                <a:spcPts val="990"/>
+              </a:spcAft>
+              <a:buClr>
+                <a:srgbClr val="0645AD"/>
+              </a:buClr>
+              <a:buFont typeface="Arial"/>
+              <a:buChar char="•"/>
+            </a:pPr>
+            <a:r>
+              <a:rPr sz="2200" b="0">
+                <a:solidFill>
+                  <a:srgbClr val="202122"/>
+                </a:solidFill>
+                <a:latin typeface="Calibri"/>
+              </a:rPr>
+              <a:t>Remote support and fault diagnosis</a:t>
+            </a:r>
+          </a:p>
+          <a:p>
+            <a:pPr marL="274320" indent="-274320">
+              <a:spcAft>
+                <a:spcPts val="990"/>
+              </a:spcAft>
+              <a:buClr>
+                <a:srgbClr val="0645AD"/>
+              </a:buClr>
+              <a:buFont typeface="Arial"/>
+              <a:buChar char="•"/>
+            </a:pPr>
+            <a:r>
+              <a:rPr sz="2200" b="0">
+                <a:solidFill>
+                  <a:srgbClr val="202122"/>
+                </a:solidFill>
+                <a:latin typeface="Calibri"/>
+              </a:rPr>
+              <a:t>Off-site working</a:t>
+            </a:r>
+          </a:p>
+        </p:txBody>
+      </p:sp>
+      <p:sp>
+        <p:nvSpPr>
+          <p:cNvPr id="10" name="Rounded Rectangle 9"/>
+          <p:cNvSpPr/>
+          <p:nvPr/>
+        </p:nvSpPr>
+        <p:spPr>
+          <a:xfrm>
+            <a:off x="6278727" y="1600200"/>
+            <a:ext cx="5364327" cy="640080"/>
+          </a:xfrm>
+          <a:prstGeom prst="roundRect">
+            <a:avLst>
+              <a:gd name="adj" fmla="val 15000"/>
+            </a:avLst>
+          </a:prstGeom>
+          <a:solidFill>
+            <a:srgbClr val="0645AD"/>
+          </a:solidFill>
+          <a:ln>
+            <a:noFill/>
+          </a:ln>
+          <a:effectLst/>
+        </p:spPr>
+        <p:style>
+          <a:lnRef idx="1">
+            <a:schemeClr val="accent1"/>
+          </a:lnRef>
+          <a:fillRef idx="3">
+            <a:schemeClr val="accent1"/>
+          </a:fillRef>
+          <a:effectRef idx="2">
+            <a:schemeClr val="accent1"/>
+          </a:effectRef>
+          <a:fontRef idx="minor">
+            <a:schemeClr val="lt1"/>
+          </a:fontRef>
+        </p:style>
+        <p:txBody>
+          <a:bodyPr rtlCol="0" anchor="ctr"/>
+          <a:lstStyle/>
+          <a:p/>
+        </p:txBody>
+      </p:sp>
+      <p:sp>
+        <p:nvSpPr>
+          <p:cNvPr id="11" name="TextBox 10"/>
+          <p:cNvSpPr txBox="1"/>
+          <p:nvPr/>
+        </p:nvSpPr>
+        <p:spPr>
+          <a:xfrm>
+            <a:off x="6507327" y="1600200"/>
+            <a:ext cx="4907127" cy="640080"/>
+          </a:xfrm>
+          <a:prstGeom prst="rect">
+            <a:avLst/>
+          </a:prstGeom>
+          <a:noFill/>
+        </p:spPr>
+        <p:txBody>
+          <a:bodyPr wrap="square" anchor="ctr" lIns="0" rIns="0" tIns="0" bIns="0"/>
+          <a:lstStyle/>
+          <a:p>
+            <a:pPr algn="l"/>
+            <a:r>
+              <a:rPr sz="2000" b="1" i="0">
+                <a:solidFill>
+                  <a:srgbClr val="FFFFFF"/>
+                </a:solidFill>
+                <a:latin typeface="Calibri"/>
+              </a:rPr>
+              <a:t>VPNs</a:t>
+            </a:r>
+          </a:p>
+        </p:txBody>
+      </p:sp>
+      <p:sp>
+        <p:nvSpPr>
+          <p:cNvPr id="12" name="Rounded Rectangle 11"/>
+          <p:cNvSpPr/>
+          <p:nvPr/>
+        </p:nvSpPr>
+        <p:spPr>
+          <a:xfrm>
+            <a:off x="6278727" y="2377440"/>
+            <a:ext cx="5364327" cy="3794760"/>
+          </a:xfrm>
+          <a:prstGeom prst="roundRect">
+            <a:avLst>
+              <a:gd name="adj" fmla="val 4000"/>
+            </a:avLst>
+          </a:prstGeom>
+          <a:solidFill>
+            <a:srgbClr val="EAF3FF"/>
+          </a:solidFill>
+          <a:ln>
+            <a:noFill/>
+          </a:ln>
+          <a:effectLst/>
+        </p:spPr>
+        <p:style>
+          <a:lnRef idx="1">
+            <a:schemeClr val="accent1"/>
+          </a:lnRef>
+          <a:fillRef idx="3">
+            <a:schemeClr val="accent1"/>
+          </a:fillRef>
+          <a:effectRef idx="2">
+            <a:schemeClr val="accent1"/>
+          </a:effectRef>
+          <a:fontRef idx="minor">
+            <a:schemeClr val="lt1"/>
+          </a:fontRef>
+        </p:style>
+        <p:txBody>
+          <a:bodyPr rtlCol="0" anchor="ctr"/>
+          <a:lstStyle/>
+          <a:p/>
+        </p:txBody>
+      </p:sp>
+      <p:sp>
+        <p:nvSpPr>
+          <p:cNvPr id="13" name="TextBox 12"/>
+          <p:cNvSpPr txBox="1"/>
+          <p:nvPr/>
+        </p:nvSpPr>
+        <p:spPr>
+          <a:xfrm>
+            <a:off x="6553047" y="2606040"/>
+            <a:ext cx="4815687" cy="3337560"/>
+          </a:xfrm>
+          <a:prstGeom prst="rect">
+            <a:avLst/>
+          </a:prstGeom>
+          <a:noFill/>
+        </p:spPr>
+        <p:txBody>
+          <a:bodyPr wrap="square" lIns="0" rIns="0" tIns="0" bIns="0">
+            <a:spAutoFit/>
+          </a:bodyPr>
+          <a:lstStyle/>
+          <a:p>
+            <a:pPr marL="274320" indent="-274320">
+              <a:spcAft>
+                <a:spcPts val="990"/>
+              </a:spcAft>
+              <a:buClr>
+                <a:srgbClr val="0645AD"/>
+              </a:buClr>
+              <a:buFont typeface="Arial"/>
+              <a:buChar char="•"/>
+            </a:pPr>
+            <a:r>
+              <a:rPr sz="2200" b="0">
+                <a:solidFill>
+                  <a:srgbClr val="202122"/>
+                </a:solidFill>
+                <a:latin typeface="Calibri"/>
+              </a:rPr>
+              <a:t>Encrypt traffic and mask the client's IP</a:t>
+            </a:r>
+          </a:p>
+          <a:p>
+            <a:pPr marL="274320" indent="-274320">
+              <a:spcAft>
+                <a:spcPts val="990"/>
+              </a:spcAft>
+              <a:buClr>
+                <a:srgbClr val="0645AD"/>
+              </a:buClr>
+              <a:buFont typeface="Arial"/>
+              <a:buChar char="•"/>
+            </a:pPr>
+            <a:r>
+              <a:rPr sz="2200" b="0">
+                <a:solidFill>
+                  <a:srgbClr val="202122"/>
+                </a:solidFill>
+                <a:latin typeface="Calibri"/>
+              </a:rPr>
+              <a:t>Choose port and security protocol</a:t>
+            </a:r>
+          </a:p>
+          <a:p>
+            <a:pPr marL="274320" indent="-274320">
+              <a:spcAft>
+                <a:spcPts val="990"/>
+              </a:spcAft>
+              <a:buClr>
+                <a:srgbClr val="0645AD"/>
+              </a:buClr>
+              <a:buFont typeface="Arial"/>
+              <a:buChar char="•"/>
+            </a:pPr>
+            <a:r>
+              <a:rPr sz="2200" b="0">
+                <a:solidFill>
+                  <a:srgbClr val="202122"/>
+                </a:solidFill>
+                <a:latin typeface="Calibri"/>
+              </a:rPr>
+              <a:t>Set encryption and certificates</a:t>
+            </a:r>
+          </a:p>
+          <a:p>
+            <a:pPr marL="274320" indent="-274320">
+              <a:spcAft>
+                <a:spcPts val="990"/>
+              </a:spcAft>
+              <a:buClr>
+                <a:srgbClr val="0645AD"/>
+              </a:buClr>
+              <a:buFont typeface="Arial"/>
+              <a:buChar char="•"/>
+            </a:pPr>
+            <a:r>
+              <a:rPr sz="2200" b="0">
+                <a:solidFill>
+                  <a:srgbClr val="202122"/>
+                </a:solidFill>
+                <a:latin typeface="Calibri"/>
+              </a:rPr>
+              <a:t>Configure authentication</a:t>
+            </a:r>
+          </a:p>
+        </p:txBody>
+      </p:sp>
+    </p:spTree>
+  </p:cSld>
+  <p:clrMapOvr>
+    <a:masterClrMapping/>
+  </p:clrMapOvr>
+</p:sld>
+</file>
+
+<file path=ppt/slides/slide11.xml><?xml version="1.0" encoding="utf-8"?>
+<p:sld xmlns:a="http://schemas.openxmlformats.org/drawingml/2006/main" xmlns:p="http://schemas.openxmlformats.org/presentationml/2006/main" xmlns:r="http://schemas.openxmlformats.org/officeDocument/2006/relationships">
+  <p:cSld>
+    <p:bg>
+      <p:bgPr>
+        <a:solidFill>
+          <a:srgbClr val="FFFFFF"/>
+        </a:solidFill>
+        <a:effectLst/>
+      </p:bgPr>
+    </p:bg>
+    <p:spTree>
+      <p:nvGrpSpPr>
+        <p:cNvPr id="1" name=""/>
+        <p:cNvGrpSpPr/>
+        <p:nvPr/>
+      </p:nvGrpSpPr>
+      <p:grpSpPr/>
+      <p:sp>
+        <p:nvSpPr>
+          <p:cNvPr id="2" name="TextBox 1"/>
+          <p:cNvSpPr txBox="1"/>
+          <p:nvPr/>
+        </p:nvSpPr>
+        <p:spPr>
+          <a:xfrm>
+            <a:off x="548640" y="320040"/>
+            <a:ext cx="11094415" cy="274320"/>
+          </a:xfrm>
+          <a:prstGeom prst="rect">
+            <a:avLst/>
+          </a:prstGeom>
+          <a:noFill/>
+        </p:spPr>
+        <p:txBody>
+          <a:bodyPr wrap="square" anchor="t" lIns="0" rIns="0" tIns="0" bIns="0"/>
+          <a:lstStyle/>
+          <a:p>
+            <a:pPr algn="l"/>
+            <a:r>
+              <a:rPr sz="1100" b="1" i="0">
+                <a:solidFill>
+                  <a:srgbClr val="54595D"/>
+                </a:solidFill>
+                <a:latin typeface="Calibri"/>
+              </a:rPr>
+              <a:t>DIGITAL SUPPORT  ·  Digital Support Content Area 2</a:t>
+            </a:r>
+          </a:p>
+        </p:txBody>
+      </p:sp>
+      <p:sp>
+        <p:nvSpPr>
+          <p:cNvPr id="3" name="TextBox 2"/>
+          <p:cNvSpPr txBox="1"/>
+          <p:nvPr/>
+        </p:nvSpPr>
+        <p:spPr>
+          <a:xfrm>
+            <a:off x="548640" y="566928"/>
+            <a:ext cx="11094415" cy="822960"/>
+          </a:xfrm>
+          <a:prstGeom prst="rect">
+            <a:avLst/>
+          </a:prstGeom>
+          <a:noFill/>
+        </p:spPr>
+        <p:txBody>
+          <a:bodyPr wrap="square" anchor="ctr" lIns="0" rIns="0" tIns="0" bIns="0"/>
+          <a:lstStyle/>
+          <a:p>
+            <a:pPr algn="l"/>
+            <a:r>
+              <a:rPr sz="3200" b="1" i="0">
+                <a:solidFill>
+                  <a:srgbClr val="03306E"/>
+                </a:solidFill>
+                <a:latin typeface="Cambria"/>
+              </a:rPr>
+              <a:t>Quick check: Remote access and VPNs</a:t>
+            </a:r>
+          </a:p>
+        </p:txBody>
+      </p:sp>
+      <p:sp>
+        <p:nvSpPr>
+          <p:cNvPr id="4" name="TextBox 3"/>
+          <p:cNvSpPr txBox="1"/>
+          <p:nvPr/>
+        </p:nvSpPr>
+        <p:spPr>
+          <a:xfrm>
+            <a:off x="548640" y="6446520"/>
+            <a:ext cx="8229600" cy="274320"/>
+          </a:xfrm>
+          <a:prstGeom prst="rect">
+            <a:avLst/>
+          </a:prstGeom>
+          <a:noFill/>
+        </p:spPr>
+        <p:txBody>
+          <a:bodyPr wrap="square" anchor="t" lIns="0" rIns="0" tIns="0" bIns="0"/>
+          <a:lstStyle/>
+          <a:p>
+            <a:pPr algn="l"/>
+            <a:r>
+              <a:rPr sz="1000" b="0" i="0">
+                <a:solidFill>
+                  <a:srgbClr val="54595D"/>
+                </a:solidFill>
+                <a:latin typeface="Calibri"/>
+              </a:rPr>
+              <a:t>Digital Support and Security T Level  ·  Domains, Email and Remote Access</a:t>
+            </a:r>
+          </a:p>
+        </p:txBody>
+      </p:sp>
+      <p:sp>
+        <p:nvSpPr>
+          <p:cNvPr id="5" name="TextBox 4"/>
+          <p:cNvSpPr txBox="1"/>
+          <p:nvPr/>
+        </p:nvSpPr>
+        <p:spPr>
+          <a:xfrm>
+            <a:off x="10728655" y="6446520"/>
+            <a:ext cx="914400" cy="274320"/>
+          </a:xfrm>
+          <a:prstGeom prst="rect">
+            <a:avLst/>
+          </a:prstGeom>
+          <a:noFill/>
+        </p:spPr>
+        <p:txBody>
+          <a:bodyPr wrap="square" anchor="t" lIns="0" rIns="0" tIns="0" bIns="0"/>
+          <a:lstStyle/>
+          <a:p>
+            <a:pPr algn="r"/>
+            <a:r>
+              <a:rPr sz="1000" b="0" i="0">
+                <a:solidFill>
+                  <a:srgbClr val="54595D"/>
+                </a:solidFill>
+                <a:latin typeface="Calibri"/>
+              </a:rPr>
+              <a:t>11</a:t>
+            </a:r>
+          </a:p>
+        </p:txBody>
+      </p:sp>
+      <p:sp>
+        <p:nvSpPr>
+          <p:cNvPr id="6" name="Oval 5"/>
+          <p:cNvSpPr/>
+          <p:nvPr/>
+        </p:nvSpPr>
+        <p:spPr>
+          <a:xfrm>
+            <a:off x="548640" y="1691640"/>
+            <a:ext cx="502920" cy="502920"/>
+          </a:xfrm>
+          <a:prstGeom prst="ellipse">
+            <a:avLst/>
+          </a:prstGeom>
+          <a:solidFill>
+            <a:srgbClr val="4EA1FF"/>
+          </a:solidFill>
+          <a:ln>
+            <a:noFill/>
+          </a:ln>
+          <a:effectLst/>
+        </p:spPr>
+        <p:style>
+          <a:lnRef idx="1">
+            <a:schemeClr val="accent1"/>
+          </a:lnRef>
+          <a:fillRef idx="3">
+            <a:schemeClr val="accent1"/>
+          </a:fillRef>
+          <a:effectRef idx="2">
+            <a:schemeClr val="accent1"/>
+          </a:effectRef>
+          <a:fontRef idx="minor">
+            <a:schemeClr val="lt1"/>
+          </a:fontRef>
+        </p:style>
+        <p:txBody>
+          <a:bodyPr rtlCol="0" anchor="ctr" lIns="0" rIns="0" tIns="0" bIns="0"/>
+          <a:lstStyle/>
+          <a:p>
+            <a:pPr algn="ctr"/>
+            <a:r>
+              <a:rPr sz="1600" b="1">
+                <a:solidFill>
+                  <a:srgbClr val="202122"/>
+                </a:solidFill>
+                <a:latin typeface="Calibri"/>
+              </a:rPr>
+              <a:t>1</a:t>
+            </a:r>
+          </a:p>
+        </p:txBody>
+      </p:sp>
+      <p:sp>
+        <p:nvSpPr>
+          <p:cNvPr id="7" name="TextBox 6"/>
+          <p:cNvSpPr txBox="1"/>
+          <p:nvPr/>
+        </p:nvSpPr>
+        <p:spPr>
+          <a:xfrm>
+            <a:off x="1371600" y="1645920"/>
+            <a:ext cx="10271455" cy="1188720"/>
+          </a:xfrm>
+          <a:prstGeom prst="rect">
+            <a:avLst/>
+          </a:prstGeom>
+          <a:noFill/>
+        </p:spPr>
+        <p:txBody>
+          <a:bodyPr wrap="square" anchor="t" lIns="0" rIns="0" tIns="0" bIns="0"/>
+          <a:lstStyle/>
+          <a:p>
+            <a:pPr algn="l"/>
+            <a:r>
+              <a:rPr sz="2400" b="0" i="0">
+                <a:solidFill>
+                  <a:srgbClr val="202122"/>
+                </a:solidFill>
+                <a:latin typeface="Calibri"/>
+              </a:rPr>
+              <a:t>What does a VPN encrypt?</a:t>
+            </a:r>
+          </a:p>
+        </p:txBody>
+      </p:sp>
+      <p:sp>
+        <p:nvSpPr>
+          <p:cNvPr id="8" name="Oval 7"/>
+          <p:cNvSpPr/>
+          <p:nvPr/>
+        </p:nvSpPr>
+        <p:spPr>
+          <a:xfrm>
+            <a:off x="548640" y="3108960"/>
+            <a:ext cx="502920" cy="502920"/>
+          </a:xfrm>
+          <a:prstGeom prst="ellipse">
+            <a:avLst/>
+          </a:prstGeom>
+          <a:solidFill>
+            <a:srgbClr val="4EA1FF"/>
+          </a:solidFill>
+          <a:ln>
+            <a:noFill/>
+          </a:ln>
+          <a:effectLst/>
+        </p:spPr>
+        <p:style>
+          <a:lnRef idx="1">
+            <a:schemeClr val="accent1"/>
+          </a:lnRef>
+          <a:fillRef idx="3">
+            <a:schemeClr val="accent1"/>
+          </a:fillRef>
+          <a:effectRef idx="2">
+            <a:schemeClr val="accent1"/>
+          </a:effectRef>
+          <a:fontRef idx="minor">
+            <a:schemeClr val="lt1"/>
+          </a:fontRef>
+        </p:style>
+        <p:txBody>
+          <a:bodyPr rtlCol="0" anchor="ctr" lIns="0" rIns="0" tIns="0" bIns="0"/>
+          <a:lstStyle/>
+          <a:p>
+            <a:pPr algn="ctr"/>
+            <a:r>
+              <a:rPr sz="1600" b="1">
+                <a:solidFill>
+                  <a:srgbClr val="202122"/>
+                </a:solidFill>
+                <a:latin typeface="Calibri"/>
+              </a:rPr>
+              <a:t>2</a:t>
+            </a:r>
+          </a:p>
+        </p:txBody>
+      </p:sp>
+      <p:sp>
+        <p:nvSpPr>
+          <p:cNvPr id="9" name="TextBox 8"/>
+          <p:cNvSpPr txBox="1"/>
+          <p:nvPr/>
+        </p:nvSpPr>
+        <p:spPr>
+          <a:xfrm>
+            <a:off x="1371600" y="3063240"/>
+            <a:ext cx="10271455" cy="1188720"/>
+          </a:xfrm>
+          <a:prstGeom prst="rect">
+            <a:avLst/>
+          </a:prstGeom>
+          <a:noFill/>
+        </p:spPr>
+        <p:txBody>
+          <a:bodyPr wrap="square" anchor="t" lIns="0" rIns="0" tIns="0" bIns="0"/>
+          <a:lstStyle/>
+          <a:p>
+            <a:pPr algn="l"/>
+            <a:r>
+              <a:rPr sz="2400" b="0" i="0">
+                <a:solidFill>
+                  <a:srgbClr val="202122"/>
+                </a:solidFill>
+                <a:latin typeface="Calibri"/>
+              </a:rPr>
+              <a:t>How does remote access support business continuity?</a:t>
+            </a:r>
+          </a:p>
+        </p:txBody>
+      </p:sp>
+      <p:sp>
+        <p:nvSpPr>
+          <p:cNvPr id="10" name="Oval 9"/>
+          <p:cNvSpPr/>
+          <p:nvPr/>
+        </p:nvSpPr>
+        <p:spPr>
+          <a:xfrm>
+            <a:off x="548640" y="4526280"/>
+            <a:ext cx="502920" cy="502920"/>
+          </a:xfrm>
+          <a:prstGeom prst="ellipse">
+            <a:avLst/>
+          </a:prstGeom>
+          <a:solidFill>
+            <a:srgbClr val="4EA1FF"/>
+          </a:solidFill>
+          <a:ln>
+            <a:noFill/>
+          </a:ln>
+          <a:effectLst/>
+        </p:spPr>
+        <p:style>
+          <a:lnRef idx="1">
+            <a:schemeClr val="accent1"/>
+          </a:lnRef>
+          <a:fillRef idx="3">
+            <a:schemeClr val="accent1"/>
+          </a:fillRef>
+          <a:effectRef idx="2">
+            <a:schemeClr val="accent1"/>
+          </a:effectRef>
+          <a:fontRef idx="minor">
+            <a:schemeClr val="lt1"/>
+          </a:fontRef>
+        </p:style>
+        <p:txBody>
+          <a:bodyPr rtlCol="0" anchor="ctr" lIns="0" rIns="0" tIns="0" bIns="0"/>
+          <a:lstStyle/>
+          <a:p>
+            <a:pPr algn="ctr"/>
+            <a:r>
+              <a:rPr sz="1600" b="1">
+                <a:solidFill>
+                  <a:srgbClr val="202122"/>
+                </a:solidFill>
+                <a:latin typeface="Calibri"/>
+              </a:rPr>
+              <a:t>3</a:t>
+            </a:r>
+          </a:p>
+        </p:txBody>
+      </p:sp>
+      <p:sp>
+        <p:nvSpPr>
+          <p:cNvPr id="11" name="TextBox 10"/>
+          <p:cNvSpPr txBox="1"/>
+          <p:nvPr/>
+        </p:nvSpPr>
+        <p:spPr>
+          <a:xfrm>
+            <a:off x="1371600" y="4480560"/>
+            <a:ext cx="10271455" cy="1188720"/>
+          </a:xfrm>
+          <a:prstGeom prst="rect">
+            <a:avLst/>
+          </a:prstGeom>
+          <a:noFill/>
+        </p:spPr>
+        <p:txBody>
+          <a:bodyPr wrap="square" anchor="t" lIns="0" rIns="0" tIns="0" bIns="0"/>
+          <a:lstStyle/>
+          <a:p>
+            <a:pPr algn="l"/>
+            <a:r>
+              <a:rPr sz="2400" b="0" i="0">
+                <a:solidFill>
+                  <a:srgbClr val="202122"/>
+                </a:solidFill>
+                <a:latin typeface="Calibri"/>
+              </a:rPr>
+              <a:t>Name one thing to configure for a VPN.</a:t>
+            </a:r>
+          </a:p>
+        </p:txBody>
+      </p:sp>
+      <p:sp>
+        <p:nvSpPr>
+          <p:cNvPr id="12" name="TextBox 11"/>
+          <p:cNvSpPr txBox="1"/>
+          <p:nvPr/>
+        </p:nvSpPr>
+        <p:spPr>
+          <a:xfrm>
+            <a:off x="548640" y="5852160"/>
+            <a:ext cx="11094415" cy="365760"/>
+          </a:xfrm>
+          <a:prstGeom prst="rect">
+            <a:avLst/>
+          </a:prstGeom>
+          <a:noFill/>
+        </p:spPr>
+        <p:txBody>
+          <a:bodyPr wrap="square" anchor="t" lIns="0" rIns="0" tIns="0" bIns="0"/>
+          <a:lstStyle/>
+          <a:p>
+            <a:pPr algn="l"/>
+            <a:r>
+              <a:rPr sz="1300" b="0" i="1">
+                <a:solidFill>
+                  <a:srgbClr val="54595D"/>
+                </a:solidFill>
+                <a:latin typeface="Calibri"/>
+              </a:rPr>
+              <a:t>Answer on mini whiteboards or in your book. Answers are in the speaker notes.</a:t>
+            </a:r>
+          </a:p>
+        </p:txBody>
+      </p:sp>
+    </p:spTree>
+  </p:cSld>
+  <p:clrMapOvr>
+    <a:masterClrMapping/>
+  </p:clrMapOvr>
+</p:sld>
+</file>
+
+<file path=ppt/slides/slide12.xml><?xml version="1.0" encoding="utf-8"?>
+<p:sld xmlns:a="http://schemas.openxmlformats.org/drawingml/2006/main" xmlns:p="http://schemas.openxmlformats.org/presentationml/2006/main" xmlns:r="http://schemas.openxmlformats.org/officeDocument/2006/relationships">
+  <p:cSld>
+    <p:bg>
+      <p:bgPr>
+        <a:solidFill>
+          <a:srgbClr val="FFFFFF"/>
+        </a:solidFill>
+        <a:effectLst/>
+      </p:bgPr>
+    </p:bg>
+    <p:spTree>
+      <p:nvGrpSpPr>
+        <p:cNvPr id="1" name=""/>
+        <p:cNvGrpSpPr/>
+        <p:nvPr/>
+      </p:nvGrpSpPr>
+      <p:grpSpPr/>
+      <p:sp>
+        <p:nvSpPr>
+          <p:cNvPr id="2" name="TextBox 1"/>
+          <p:cNvSpPr txBox="1"/>
+          <p:nvPr/>
+        </p:nvSpPr>
+        <p:spPr>
+          <a:xfrm>
+            <a:off x="548640" y="320040"/>
+            <a:ext cx="11094415" cy="274320"/>
+          </a:xfrm>
+          <a:prstGeom prst="rect">
+            <a:avLst/>
+          </a:prstGeom>
+          <a:noFill/>
+        </p:spPr>
+        <p:txBody>
+          <a:bodyPr wrap="square" anchor="t" lIns="0" rIns="0" tIns="0" bIns="0"/>
+          <a:lstStyle/>
+          <a:p>
+            <a:pPr algn="l"/>
+            <a:r>
+              <a:rPr sz="1100" b="1" i="0">
+                <a:solidFill>
+                  <a:srgbClr val="54595D"/>
+                </a:solidFill>
+                <a:latin typeface="Calibri"/>
+              </a:rPr>
+              <a:t>DIGITAL SUPPORT  ·  Digital Support Content Area 2</a:t>
+            </a:r>
+          </a:p>
+        </p:txBody>
+      </p:sp>
+      <p:sp>
+        <p:nvSpPr>
+          <p:cNvPr id="3" name="TextBox 2"/>
+          <p:cNvSpPr txBox="1"/>
+          <p:nvPr/>
+        </p:nvSpPr>
+        <p:spPr>
+          <a:xfrm>
+            <a:off x="548640" y="566928"/>
+            <a:ext cx="11094415" cy="822960"/>
+          </a:xfrm>
+          <a:prstGeom prst="rect">
+            <a:avLst/>
+          </a:prstGeom>
+          <a:noFill/>
+        </p:spPr>
+        <p:txBody>
+          <a:bodyPr wrap="square" anchor="ctr" lIns="0" rIns="0" tIns="0" bIns="0"/>
+          <a:lstStyle/>
+          <a:p>
+            <a:pPr algn="l"/>
+            <a:r>
+              <a:rPr sz="3200" b="1" i="0">
+                <a:solidFill>
+                  <a:srgbClr val="03306E"/>
+                </a:solidFill>
+                <a:latin typeface="Cambria"/>
+              </a:rPr>
+              <a:t>Configuring a simple VPN</a:t>
+            </a:r>
+          </a:p>
+        </p:txBody>
+      </p:sp>
+      <p:sp>
+        <p:nvSpPr>
+          <p:cNvPr id="4" name="TextBox 3"/>
+          <p:cNvSpPr txBox="1"/>
+          <p:nvPr/>
+        </p:nvSpPr>
+        <p:spPr>
+          <a:xfrm>
+            <a:off x="548640" y="6446520"/>
+            <a:ext cx="8229600" cy="274320"/>
+          </a:xfrm>
+          <a:prstGeom prst="rect">
+            <a:avLst/>
+          </a:prstGeom>
+          <a:noFill/>
+        </p:spPr>
+        <p:txBody>
+          <a:bodyPr wrap="square" anchor="t" lIns="0" rIns="0" tIns="0" bIns="0"/>
+          <a:lstStyle/>
+          <a:p>
+            <a:pPr algn="l"/>
+            <a:r>
+              <a:rPr sz="1000" b="0" i="0">
+                <a:solidFill>
+                  <a:srgbClr val="54595D"/>
+                </a:solidFill>
+                <a:latin typeface="Calibri"/>
+              </a:rPr>
+              <a:t>Digital Support and Security T Level  ·  Domains, Email and Remote Access</a:t>
+            </a:r>
+          </a:p>
+        </p:txBody>
+      </p:sp>
+      <p:sp>
+        <p:nvSpPr>
+          <p:cNvPr id="5" name="TextBox 4"/>
+          <p:cNvSpPr txBox="1"/>
+          <p:nvPr/>
+        </p:nvSpPr>
+        <p:spPr>
+          <a:xfrm>
+            <a:off x="10728655" y="6446520"/>
+            <a:ext cx="914400" cy="274320"/>
+          </a:xfrm>
+          <a:prstGeom prst="rect">
+            <a:avLst/>
+          </a:prstGeom>
+          <a:noFill/>
+        </p:spPr>
+        <p:txBody>
+          <a:bodyPr wrap="square" anchor="t" lIns="0" rIns="0" tIns="0" bIns="0"/>
+          <a:lstStyle/>
+          <a:p>
+            <a:pPr algn="r"/>
+            <a:r>
+              <a:rPr sz="1000" b="0" i="0">
+                <a:solidFill>
+                  <a:srgbClr val="54595D"/>
+                </a:solidFill>
+                <a:latin typeface="Calibri"/>
+              </a:rPr>
+              <a:t>12</a:t>
+            </a:r>
+          </a:p>
+        </p:txBody>
+      </p:sp>
+      <p:sp>
+        <p:nvSpPr>
+          <p:cNvPr id="6" name="Rectangle 5"/>
+          <p:cNvSpPr/>
+          <p:nvPr/>
+        </p:nvSpPr>
+        <p:spPr>
+          <a:xfrm>
+            <a:off x="1603217" y="2656332"/>
+            <a:ext cx="8985260" cy="36576"/>
+          </a:xfrm>
+          <a:prstGeom prst="rect">
+            <a:avLst/>
+          </a:prstGeom>
+          <a:solidFill>
+            <a:srgbClr val="A9C8F0"/>
+          </a:solidFill>
+          <a:ln>
+            <a:noFill/>
+          </a:ln>
+          <a:effectLst/>
+        </p:spPr>
+        <p:style>
+          <a:lnRef idx="1">
+            <a:schemeClr val="accent1"/>
+          </a:lnRef>
+          <a:fillRef idx="3">
+            <a:schemeClr val="accent1"/>
+          </a:fillRef>
+          <a:effectRef idx="2">
+            <a:schemeClr val="accent1"/>
+          </a:effectRef>
+          <a:fontRef idx="minor">
+            <a:schemeClr val="lt1"/>
+          </a:fontRef>
+        </p:style>
+        <p:txBody>
+          <a:bodyPr rtlCol="0" anchor="ctr"/>
+          <a:lstStyle/>
+          <a:p/>
+        </p:txBody>
+      </p:sp>
+      <p:sp>
+        <p:nvSpPr>
+          <p:cNvPr id="7" name="Oval 6"/>
+          <p:cNvSpPr/>
+          <p:nvPr/>
+        </p:nvSpPr>
+        <p:spPr>
+          <a:xfrm>
+            <a:off x="1283177" y="2354580"/>
+            <a:ext cx="640080" cy="640080"/>
+          </a:xfrm>
+          <a:prstGeom prst="ellipse">
+            <a:avLst/>
+          </a:prstGeom>
+          <a:solidFill>
+            <a:srgbClr val="4EA1FF"/>
+          </a:solidFill>
+          <a:ln>
+            <a:noFill/>
+          </a:ln>
+          <a:effectLst/>
+        </p:spPr>
+        <p:style>
+          <a:lnRef idx="1">
+            <a:schemeClr val="accent1"/>
+          </a:lnRef>
+          <a:fillRef idx="3">
+            <a:schemeClr val="accent1"/>
+          </a:fillRef>
+          <a:effectRef idx="2">
+            <a:schemeClr val="accent1"/>
+          </a:effectRef>
+          <a:fontRef idx="minor">
+            <a:schemeClr val="lt1"/>
+          </a:fontRef>
+        </p:style>
+        <p:txBody>
+          <a:bodyPr rtlCol="0" anchor="ctr" lIns="0" rIns="0" tIns="0" bIns="0"/>
+          <a:lstStyle/>
+          <a:p>
+            <a:pPr algn="ctr"/>
+            <a:r>
+              <a:rPr sz="2000" b="1">
+                <a:solidFill>
+                  <a:srgbClr val="202122"/>
+                </a:solidFill>
+                <a:latin typeface="Calibri"/>
+              </a:rPr>
+              <a:t>1</a:t>
+            </a:r>
+          </a:p>
+        </p:txBody>
+      </p:sp>
+      <p:sp>
+        <p:nvSpPr>
+          <p:cNvPr id="8" name="TextBox 7"/>
+          <p:cNvSpPr txBox="1"/>
+          <p:nvPr/>
+        </p:nvSpPr>
+        <p:spPr>
+          <a:xfrm>
+            <a:off x="548640" y="3131820"/>
+            <a:ext cx="2109155" cy="731520"/>
+          </a:xfrm>
+          <a:prstGeom prst="rect">
+            <a:avLst/>
+          </a:prstGeom>
+          <a:noFill/>
+        </p:spPr>
+        <p:txBody>
+          <a:bodyPr wrap="square" anchor="t" lIns="0" rIns="0" tIns="0" bIns="0"/>
+          <a:lstStyle/>
+          <a:p>
+            <a:pPr algn="ctr"/>
+            <a:r>
+              <a:rPr sz="1700" b="1" i="0">
+                <a:solidFill>
+                  <a:srgbClr val="03306E"/>
+                </a:solidFill>
+                <a:latin typeface="Calibri"/>
+              </a:rPr>
+              <a:t>Enable</a:t>
+            </a:r>
+          </a:p>
+        </p:txBody>
+      </p:sp>
+      <p:sp>
+        <p:nvSpPr>
+          <p:cNvPr id="9" name="Rounded Rectangle 8"/>
+          <p:cNvSpPr/>
+          <p:nvPr/>
+        </p:nvSpPr>
+        <p:spPr>
+          <a:xfrm>
+            <a:off x="548640" y="3909060"/>
+            <a:ext cx="2109155" cy="1508760"/>
+          </a:xfrm>
+          <a:prstGeom prst="roundRect">
+            <a:avLst>
+              <a:gd name="adj" fmla="val 6000"/>
+            </a:avLst>
+          </a:prstGeom>
+          <a:solidFill>
+            <a:srgbClr val="EAF3FF"/>
+          </a:solidFill>
+          <a:ln>
+            <a:noFill/>
+          </a:ln>
+          <a:effectLst/>
+        </p:spPr>
+        <p:style>
+          <a:lnRef idx="1">
+            <a:schemeClr val="accent1"/>
+          </a:lnRef>
+          <a:fillRef idx="3">
+            <a:schemeClr val="accent1"/>
+          </a:fillRef>
+          <a:effectRef idx="2">
+            <a:schemeClr val="accent1"/>
+          </a:effectRef>
+          <a:fontRef idx="minor">
+            <a:schemeClr val="lt1"/>
+          </a:fontRef>
+        </p:style>
+        <p:txBody>
+          <a:bodyPr rtlCol="0" anchor="ctr"/>
+          <a:lstStyle/>
+          <a:p/>
+        </p:txBody>
+      </p:sp>
+      <p:sp>
+        <p:nvSpPr>
+          <p:cNvPr id="10" name="TextBox 9"/>
+          <p:cNvSpPr txBox="1"/>
+          <p:nvPr/>
+        </p:nvSpPr>
+        <p:spPr>
+          <a:xfrm>
+            <a:off x="685800" y="4046220"/>
+            <a:ext cx="1834835" cy="1234439"/>
+          </a:xfrm>
+          <a:prstGeom prst="rect">
+            <a:avLst/>
+          </a:prstGeom>
+          <a:noFill/>
+        </p:spPr>
+        <p:txBody>
+          <a:bodyPr wrap="square" anchor="t" lIns="0" rIns="0" tIns="0" bIns="0"/>
+          <a:lstStyle/>
+          <a:p>
+            <a:pPr algn="l"/>
+            <a:r>
+              <a:rPr sz="1800" b="0" i="0">
+                <a:solidFill>
+                  <a:srgbClr val="202122"/>
+                </a:solidFill>
+                <a:latin typeface="Calibri"/>
+              </a:rPr>
+              <a:t>Turn on the VPN service on the server.</a:t>
+            </a:r>
+          </a:p>
+        </p:txBody>
+      </p:sp>
+      <p:sp>
+        <p:nvSpPr>
+          <p:cNvPr id="11" name="Oval 10"/>
+          <p:cNvSpPr/>
+          <p:nvPr/>
+        </p:nvSpPr>
+        <p:spPr>
+          <a:xfrm>
+            <a:off x="3529492" y="2354580"/>
+            <a:ext cx="640080" cy="640080"/>
+          </a:xfrm>
+          <a:prstGeom prst="ellipse">
+            <a:avLst/>
+          </a:prstGeom>
+          <a:solidFill>
+            <a:srgbClr val="4EA1FF"/>
+          </a:solidFill>
+          <a:ln>
+            <a:noFill/>
+          </a:ln>
+          <a:effectLst/>
+        </p:spPr>
+        <p:style>
+          <a:lnRef idx="1">
+            <a:schemeClr val="accent1"/>
+          </a:lnRef>
+          <a:fillRef idx="3">
+            <a:schemeClr val="accent1"/>
+          </a:fillRef>
+          <a:effectRef idx="2">
+            <a:schemeClr val="accent1"/>
+          </a:effectRef>
+          <a:fontRef idx="minor">
+            <a:schemeClr val="lt1"/>
+          </a:fontRef>
+        </p:style>
+        <p:txBody>
+          <a:bodyPr rtlCol="0" anchor="ctr" lIns="0" rIns="0" tIns="0" bIns="0"/>
+          <a:lstStyle/>
+          <a:p>
+            <a:pPr algn="ctr"/>
+            <a:r>
+              <a:rPr sz="2000" b="1">
+                <a:solidFill>
+                  <a:srgbClr val="202122"/>
+                </a:solidFill>
+                <a:latin typeface="Calibri"/>
+              </a:rPr>
+              <a:t>2</a:t>
+            </a:r>
+          </a:p>
+        </p:txBody>
+      </p:sp>
+      <p:sp>
+        <p:nvSpPr>
+          <p:cNvPr id="12" name="TextBox 11"/>
+          <p:cNvSpPr txBox="1"/>
+          <p:nvPr/>
+        </p:nvSpPr>
+        <p:spPr>
+          <a:xfrm>
+            <a:off x="2794955" y="3131820"/>
+            <a:ext cx="2109155" cy="731520"/>
+          </a:xfrm>
+          <a:prstGeom prst="rect">
+            <a:avLst/>
+          </a:prstGeom>
+          <a:noFill/>
+        </p:spPr>
+        <p:txBody>
+          <a:bodyPr wrap="square" anchor="t" lIns="0" rIns="0" tIns="0" bIns="0"/>
+          <a:lstStyle/>
+          <a:p>
+            <a:pPr algn="ctr"/>
+            <a:r>
+              <a:rPr sz="1700" b="1" i="0">
+                <a:solidFill>
+                  <a:srgbClr val="03306E"/>
+                </a:solidFill>
+                <a:latin typeface="Calibri"/>
+              </a:rPr>
+              <a:t>Address</a:t>
+            </a:r>
+          </a:p>
+        </p:txBody>
+      </p:sp>
+      <p:sp>
+        <p:nvSpPr>
+          <p:cNvPr id="13" name="Rounded Rectangle 12"/>
+          <p:cNvSpPr/>
+          <p:nvPr/>
+        </p:nvSpPr>
+        <p:spPr>
+          <a:xfrm>
+            <a:off x="2794955" y="3909060"/>
+            <a:ext cx="2109155" cy="1508760"/>
+          </a:xfrm>
+          <a:prstGeom prst="roundRect">
+            <a:avLst>
+              <a:gd name="adj" fmla="val 6000"/>
+            </a:avLst>
+          </a:prstGeom>
+          <a:solidFill>
+            <a:srgbClr val="EAF3FF"/>
+          </a:solidFill>
+          <a:ln>
+            <a:noFill/>
+          </a:ln>
+          <a:effectLst/>
+        </p:spPr>
+        <p:style>
+          <a:lnRef idx="1">
+            <a:schemeClr val="accent1"/>
+          </a:lnRef>
+          <a:fillRef idx="3">
+            <a:schemeClr val="accent1"/>
+          </a:fillRef>
+          <a:effectRef idx="2">
+            <a:schemeClr val="accent1"/>
+          </a:effectRef>
+          <a:fontRef idx="minor">
+            <a:schemeClr val="lt1"/>
+          </a:fontRef>
+        </p:style>
+        <p:txBody>
+          <a:bodyPr rtlCol="0" anchor="ctr"/>
+          <a:lstStyle/>
+          <a:p/>
+        </p:txBody>
+      </p:sp>
+      <p:sp>
+        <p:nvSpPr>
+          <p:cNvPr id="14" name="TextBox 13"/>
+          <p:cNvSpPr txBox="1"/>
+          <p:nvPr/>
+        </p:nvSpPr>
+        <p:spPr>
+          <a:xfrm>
+            <a:off x="2932115" y="4046220"/>
+            <a:ext cx="1834835" cy="1234439"/>
+          </a:xfrm>
+          <a:prstGeom prst="rect">
+            <a:avLst/>
+          </a:prstGeom>
+          <a:noFill/>
+        </p:spPr>
+        <p:txBody>
+          <a:bodyPr wrap="square" anchor="t" lIns="0" rIns="0" tIns="0" bIns="0"/>
+          <a:lstStyle/>
+          <a:p>
+            <a:pPr algn="l"/>
+            <a:r>
+              <a:rPr sz="1800" b="0" i="0">
+                <a:solidFill>
+                  <a:srgbClr val="202122"/>
+                </a:solidFill>
+                <a:latin typeface="Calibri"/>
+              </a:rPr>
+              <a:t>Set IP and DNS for the VPN interface.</a:t>
+            </a:r>
+          </a:p>
+        </p:txBody>
+      </p:sp>
+      <p:sp>
+        <p:nvSpPr>
+          <p:cNvPr id="15" name="Oval 14"/>
+          <p:cNvSpPr/>
+          <p:nvPr/>
+        </p:nvSpPr>
+        <p:spPr>
+          <a:xfrm>
+            <a:off x="5775807" y="2354580"/>
+            <a:ext cx="640080" cy="640080"/>
+          </a:xfrm>
+          <a:prstGeom prst="ellipse">
+            <a:avLst/>
+          </a:prstGeom>
+          <a:solidFill>
+            <a:srgbClr val="4EA1FF"/>
+          </a:solidFill>
+          <a:ln>
+            <a:noFill/>
+          </a:ln>
+          <a:effectLst/>
+        </p:spPr>
+        <p:style>
+          <a:lnRef idx="1">
+            <a:schemeClr val="accent1"/>
+          </a:lnRef>
+          <a:fillRef idx="3">
+            <a:schemeClr val="accent1"/>
+          </a:fillRef>
+          <a:effectRef idx="2">
+            <a:schemeClr val="accent1"/>
+          </a:effectRef>
+          <a:fontRef idx="minor">
+            <a:schemeClr val="lt1"/>
+          </a:fontRef>
+        </p:style>
+        <p:txBody>
+          <a:bodyPr rtlCol="0" anchor="ctr" lIns="0" rIns="0" tIns="0" bIns="0"/>
+          <a:lstStyle/>
+          <a:p>
+            <a:pPr algn="ctr"/>
+            <a:r>
+              <a:rPr sz="2000" b="1">
+                <a:solidFill>
+                  <a:srgbClr val="202122"/>
+                </a:solidFill>
+                <a:latin typeface="Calibri"/>
+              </a:rPr>
+              <a:t>3</a:t>
+            </a:r>
+          </a:p>
+        </p:txBody>
+      </p:sp>
+      <p:sp>
+        <p:nvSpPr>
+          <p:cNvPr id="16" name="TextBox 15"/>
+          <p:cNvSpPr txBox="1"/>
+          <p:nvPr/>
+        </p:nvSpPr>
+        <p:spPr>
+          <a:xfrm>
+            <a:off x="5041270" y="3131820"/>
+            <a:ext cx="2109155" cy="731520"/>
+          </a:xfrm>
+          <a:prstGeom prst="rect">
+            <a:avLst/>
+          </a:prstGeom>
+          <a:noFill/>
+        </p:spPr>
+        <p:txBody>
+          <a:bodyPr wrap="square" anchor="t" lIns="0" rIns="0" tIns="0" bIns="0"/>
+          <a:lstStyle/>
+          <a:p>
+            <a:pPr algn="ctr"/>
+            <a:r>
+              <a:rPr sz="1700" b="1" i="0">
+                <a:solidFill>
+                  <a:srgbClr val="03306E"/>
+                </a:solidFill>
+                <a:latin typeface="Calibri"/>
+              </a:rPr>
+              <a:t>Access</a:t>
+            </a:r>
+          </a:p>
+        </p:txBody>
+      </p:sp>
+      <p:sp>
+        <p:nvSpPr>
+          <p:cNvPr id="17" name="Rounded Rectangle 16"/>
+          <p:cNvSpPr/>
+          <p:nvPr/>
+        </p:nvSpPr>
+        <p:spPr>
+          <a:xfrm>
+            <a:off x="5041270" y="3909060"/>
+            <a:ext cx="2109155" cy="1508760"/>
+          </a:xfrm>
+          <a:prstGeom prst="roundRect">
+            <a:avLst>
+              <a:gd name="adj" fmla="val 6000"/>
+            </a:avLst>
+          </a:prstGeom>
+          <a:solidFill>
+            <a:srgbClr val="EAF3FF"/>
+          </a:solidFill>
+          <a:ln>
+            <a:noFill/>
+          </a:ln>
+          <a:effectLst/>
+        </p:spPr>
+        <p:style>
+          <a:lnRef idx="1">
+            <a:schemeClr val="accent1"/>
+          </a:lnRef>
+          <a:fillRef idx="3">
+            <a:schemeClr val="accent1"/>
+          </a:fillRef>
+          <a:effectRef idx="2">
+            <a:schemeClr val="accent1"/>
+          </a:effectRef>
+          <a:fontRef idx="minor">
+            <a:schemeClr val="lt1"/>
+          </a:fontRef>
+        </p:style>
+        <p:txBody>
+          <a:bodyPr rtlCol="0" anchor="ctr"/>
+          <a:lstStyle/>
+          <a:p/>
+        </p:txBody>
+      </p:sp>
+      <p:sp>
+        <p:nvSpPr>
+          <p:cNvPr id="18" name="TextBox 17"/>
+          <p:cNvSpPr txBox="1"/>
+          <p:nvPr/>
+        </p:nvSpPr>
+        <p:spPr>
+          <a:xfrm>
+            <a:off x="5178430" y="4046220"/>
+            <a:ext cx="1834835" cy="1234439"/>
+          </a:xfrm>
+          <a:prstGeom prst="rect">
+            <a:avLst/>
+          </a:prstGeom>
+          <a:noFill/>
+        </p:spPr>
+        <p:txBody>
+          <a:bodyPr wrap="square" anchor="t" lIns="0" rIns="0" tIns="0" bIns="0"/>
+          <a:lstStyle/>
+          <a:p>
+            <a:pPr algn="l"/>
+            <a:r>
+              <a:rPr sz="1800" b="0" i="0">
+                <a:solidFill>
+                  <a:srgbClr val="202122"/>
+                </a:solidFill>
+                <a:latin typeface="Calibri"/>
+              </a:rPr>
+              <a:t>Manage authentication and permissions.</a:t>
+            </a:r>
+          </a:p>
+        </p:txBody>
+      </p:sp>
+      <p:sp>
+        <p:nvSpPr>
+          <p:cNvPr id="19" name="Oval 18"/>
+          <p:cNvSpPr/>
+          <p:nvPr/>
+        </p:nvSpPr>
+        <p:spPr>
+          <a:xfrm>
+            <a:off x="8022122" y="2354580"/>
+            <a:ext cx="640080" cy="640080"/>
+          </a:xfrm>
+          <a:prstGeom prst="ellipse">
+            <a:avLst/>
+          </a:prstGeom>
+          <a:solidFill>
+            <a:srgbClr val="4EA1FF"/>
+          </a:solidFill>
+          <a:ln>
+            <a:noFill/>
+          </a:ln>
+          <a:effectLst/>
+        </p:spPr>
+        <p:style>
+          <a:lnRef idx="1">
+            <a:schemeClr val="accent1"/>
+          </a:lnRef>
+          <a:fillRef idx="3">
+            <a:schemeClr val="accent1"/>
+          </a:fillRef>
+          <a:effectRef idx="2">
+            <a:schemeClr val="accent1"/>
+          </a:effectRef>
+          <a:fontRef idx="minor">
+            <a:schemeClr val="lt1"/>
+          </a:fontRef>
+        </p:style>
+        <p:txBody>
+          <a:bodyPr rtlCol="0" anchor="ctr" lIns="0" rIns="0" tIns="0" bIns="0"/>
+          <a:lstStyle/>
+          <a:p>
+            <a:pPr algn="ctr"/>
+            <a:r>
+              <a:rPr sz="2000" b="1">
+                <a:solidFill>
+                  <a:srgbClr val="202122"/>
+                </a:solidFill>
+                <a:latin typeface="Calibri"/>
+              </a:rPr>
+              <a:t>4</a:t>
+            </a:r>
+          </a:p>
+        </p:txBody>
+      </p:sp>
+      <p:sp>
+        <p:nvSpPr>
+          <p:cNvPr id="20" name="TextBox 19"/>
+          <p:cNvSpPr txBox="1"/>
+          <p:nvPr/>
+        </p:nvSpPr>
+        <p:spPr>
+          <a:xfrm>
+            <a:off x="7287585" y="3131820"/>
+            <a:ext cx="2109155" cy="731520"/>
+          </a:xfrm>
+          <a:prstGeom prst="rect">
+            <a:avLst/>
+          </a:prstGeom>
+          <a:noFill/>
+        </p:spPr>
+        <p:txBody>
+          <a:bodyPr wrap="square" anchor="t" lIns="0" rIns="0" tIns="0" bIns="0"/>
+          <a:lstStyle/>
+          <a:p>
+            <a:pPr algn="ctr"/>
+            <a:r>
+              <a:rPr sz="1700" b="1" i="0">
+                <a:solidFill>
+                  <a:srgbClr val="03306E"/>
+                </a:solidFill>
+                <a:latin typeface="Calibri"/>
+              </a:rPr>
+              <a:t>Client</a:t>
+            </a:r>
+          </a:p>
+        </p:txBody>
+      </p:sp>
+      <p:sp>
+        <p:nvSpPr>
+          <p:cNvPr id="21" name="Rounded Rectangle 20"/>
+          <p:cNvSpPr/>
+          <p:nvPr/>
+        </p:nvSpPr>
+        <p:spPr>
+          <a:xfrm>
+            <a:off x="7287585" y="3909060"/>
+            <a:ext cx="2109155" cy="1508760"/>
+          </a:xfrm>
+          <a:prstGeom prst="roundRect">
+            <a:avLst>
+              <a:gd name="adj" fmla="val 6000"/>
+            </a:avLst>
+          </a:prstGeom>
+          <a:solidFill>
+            <a:srgbClr val="EAF3FF"/>
+          </a:solidFill>
+          <a:ln>
+            <a:noFill/>
+          </a:ln>
+          <a:effectLst/>
+        </p:spPr>
+        <p:style>
+          <a:lnRef idx="1">
+            <a:schemeClr val="accent1"/>
+          </a:lnRef>
+          <a:fillRef idx="3">
+            <a:schemeClr val="accent1"/>
+          </a:fillRef>
+          <a:effectRef idx="2">
+            <a:schemeClr val="accent1"/>
+          </a:effectRef>
+          <a:fontRef idx="minor">
+            <a:schemeClr val="lt1"/>
+          </a:fontRef>
+        </p:style>
+        <p:txBody>
+          <a:bodyPr rtlCol="0" anchor="ctr"/>
+          <a:lstStyle/>
+          <a:p/>
+        </p:txBody>
+      </p:sp>
+      <p:sp>
+        <p:nvSpPr>
+          <p:cNvPr id="22" name="TextBox 21"/>
+          <p:cNvSpPr txBox="1"/>
+          <p:nvPr/>
+        </p:nvSpPr>
+        <p:spPr>
+          <a:xfrm>
+            <a:off x="7424745" y="4046220"/>
+            <a:ext cx="1834835" cy="1234439"/>
+          </a:xfrm>
+          <a:prstGeom prst="rect">
+            <a:avLst/>
+          </a:prstGeom>
+          <a:noFill/>
+        </p:spPr>
+        <p:txBody>
+          <a:bodyPr wrap="square" anchor="t" lIns="0" rIns="0" tIns="0" bIns="0"/>
+          <a:lstStyle/>
+          <a:p>
+            <a:pPr algn="l"/>
+            <a:r>
+              <a:rPr sz="1800" b="0" i="0">
+                <a:solidFill>
+                  <a:srgbClr val="202122"/>
+                </a:solidFill>
+                <a:latin typeface="Calibri"/>
+              </a:rPr>
+              <a:t>Create the connection to the server's IP or FQDN.</a:t>
+            </a:r>
+          </a:p>
+        </p:txBody>
+      </p:sp>
+      <p:sp>
+        <p:nvSpPr>
+          <p:cNvPr id="23" name="Oval 22"/>
+          <p:cNvSpPr/>
+          <p:nvPr/>
+        </p:nvSpPr>
+        <p:spPr>
+          <a:xfrm>
+            <a:off x="10268437" y="2354580"/>
+            <a:ext cx="640080" cy="640080"/>
+          </a:xfrm>
+          <a:prstGeom prst="ellipse">
+            <a:avLst/>
+          </a:prstGeom>
+          <a:solidFill>
+            <a:srgbClr val="4EA1FF"/>
+          </a:solidFill>
+          <a:ln>
+            <a:noFill/>
+          </a:ln>
+          <a:effectLst/>
+        </p:spPr>
+        <p:style>
+          <a:lnRef idx="1">
+            <a:schemeClr val="accent1"/>
+          </a:lnRef>
+          <a:fillRef idx="3">
+            <a:schemeClr val="accent1"/>
+          </a:fillRef>
+          <a:effectRef idx="2">
+            <a:schemeClr val="accent1"/>
+          </a:effectRef>
+          <a:fontRef idx="minor">
+            <a:schemeClr val="lt1"/>
+          </a:fontRef>
+        </p:style>
+        <p:txBody>
+          <a:bodyPr rtlCol="0" anchor="ctr" lIns="0" rIns="0" tIns="0" bIns="0"/>
+          <a:lstStyle/>
+          <a:p>
+            <a:pPr algn="ctr"/>
+            <a:r>
+              <a:rPr sz="2000" b="1">
+                <a:solidFill>
+                  <a:srgbClr val="202122"/>
+                </a:solidFill>
+                <a:latin typeface="Calibri"/>
+              </a:rPr>
+              <a:t>5</a:t>
+            </a:r>
+          </a:p>
+        </p:txBody>
+      </p:sp>
+      <p:sp>
+        <p:nvSpPr>
+          <p:cNvPr id="24" name="TextBox 23"/>
+          <p:cNvSpPr txBox="1"/>
+          <p:nvPr/>
+        </p:nvSpPr>
+        <p:spPr>
+          <a:xfrm>
+            <a:off x="9533900" y="3131820"/>
+            <a:ext cx="2109155" cy="731520"/>
+          </a:xfrm>
+          <a:prstGeom prst="rect">
+            <a:avLst/>
+          </a:prstGeom>
+          <a:noFill/>
+        </p:spPr>
+        <p:txBody>
+          <a:bodyPr wrap="square" anchor="t" lIns="0" rIns="0" tIns="0" bIns="0"/>
+          <a:lstStyle/>
+          <a:p>
+            <a:pPr algn="ctr"/>
+            <a:r>
+              <a:rPr sz="1700" b="1" i="0">
+                <a:solidFill>
+                  <a:srgbClr val="03306E"/>
+                </a:solidFill>
+                <a:latin typeface="Calibri"/>
+              </a:rPr>
+              <a:t>Test</a:t>
+            </a:r>
+          </a:p>
+        </p:txBody>
+      </p:sp>
+      <p:sp>
+        <p:nvSpPr>
+          <p:cNvPr id="25" name="Rounded Rectangle 24"/>
+          <p:cNvSpPr/>
+          <p:nvPr/>
+        </p:nvSpPr>
+        <p:spPr>
+          <a:xfrm>
+            <a:off x="9533900" y="3909060"/>
+            <a:ext cx="2109155" cy="1508760"/>
+          </a:xfrm>
+          <a:prstGeom prst="roundRect">
+            <a:avLst>
+              <a:gd name="adj" fmla="val 6000"/>
+            </a:avLst>
+          </a:prstGeom>
+          <a:solidFill>
+            <a:srgbClr val="EAF3FF"/>
+          </a:solidFill>
+          <a:ln>
+            <a:noFill/>
+          </a:ln>
+          <a:effectLst/>
+        </p:spPr>
+        <p:style>
+          <a:lnRef idx="1">
+            <a:schemeClr val="accent1"/>
+          </a:lnRef>
+          <a:fillRef idx="3">
+            <a:schemeClr val="accent1"/>
+          </a:fillRef>
+          <a:effectRef idx="2">
+            <a:schemeClr val="accent1"/>
+          </a:effectRef>
+          <a:fontRef idx="minor">
+            <a:schemeClr val="lt1"/>
+          </a:fontRef>
+        </p:style>
+        <p:txBody>
+          <a:bodyPr rtlCol="0" anchor="ctr"/>
+          <a:lstStyle/>
+          <a:p/>
+        </p:txBody>
+      </p:sp>
+      <p:sp>
+        <p:nvSpPr>
+          <p:cNvPr id="26" name="TextBox 25"/>
+          <p:cNvSpPr txBox="1"/>
+          <p:nvPr/>
+        </p:nvSpPr>
+        <p:spPr>
+          <a:xfrm>
+            <a:off x="9671060" y="4046220"/>
+            <a:ext cx="1834835" cy="1234439"/>
+          </a:xfrm>
+          <a:prstGeom prst="rect">
+            <a:avLst/>
+          </a:prstGeom>
+          <a:noFill/>
+        </p:spPr>
+        <p:txBody>
+          <a:bodyPr wrap="square" anchor="t" lIns="0" rIns="0" tIns="0" bIns="0"/>
+          <a:lstStyle/>
+          <a:p>
+            <a:pPr algn="l"/>
+            <a:r>
+              <a:rPr sz="1800" b="0" i="0">
+                <a:solidFill>
+                  <a:srgbClr val="202122"/>
+                </a:solidFill>
+                <a:latin typeface="Calibri"/>
+              </a:rPr>
+              <a:t>Connect and check access to resources.</a:t>
+            </a:r>
+          </a:p>
+        </p:txBody>
+      </p:sp>
+    </p:spTree>
+  </p:cSld>
+  <p:clrMapOvr>
+    <a:masterClrMapping/>
+  </p:clrMapOvr>
+</p:sld>
+</file>
+
+<file path=ppt/slides/slide13.xml><?xml version="1.0" encoding="utf-8"?>
+<p:sld xmlns:a="http://schemas.openxmlformats.org/drawingml/2006/main" xmlns:p="http://schemas.openxmlformats.org/presentationml/2006/main" xmlns:r="http://schemas.openxmlformats.org/officeDocument/2006/relationships">
+  <p:cSld>
+    <p:bg>
+      <p:bgPr>
+        <a:solidFill>
+          <a:srgbClr val="FFFFFF"/>
+        </a:solidFill>
+        <a:effectLst/>
+      </p:bgPr>
+    </p:bg>
+    <p:spTree>
+      <p:nvGrpSpPr>
+        <p:cNvPr id="1" name=""/>
+        <p:cNvGrpSpPr/>
+        <p:nvPr/>
+      </p:nvGrpSpPr>
+      <p:grpSpPr/>
+      <p:sp>
+        <p:nvSpPr>
+          <p:cNvPr id="2" name="TextBox 1"/>
+          <p:cNvSpPr txBox="1"/>
+          <p:nvPr/>
+        </p:nvSpPr>
+        <p:spPr>
+          <a:xfrm>
+            <a:off x="548640" y="320040"/>
+            <a:ext cx="11094415" cy="274320"/>
+          </a:xfrm>
+          <a:prstGeom prst="rect">
+            <a:avLst/>
+          </a:prstGeom>
+          <a:noFill/>
+        </p:spPr>
+        <p:txBody>
+          <a:bodyPr wrap="square" anchor="t" lIns="0" rIns="0" tIns="0" bIns="0"/>
+          <a:lstStyle/>
+          <a:p>
+            <a:pPr algn="l"/>
+            <a:r>
+              <a:rPr sz="1100" b="1" i="0">
+                <a:solidFill>
+                  <a:srgbClr val="54595D"/>
+                </a:solidFill>
+                <a:latin typeface="Calibri"/>
+              </a:rPr>
+              <a:t>DIGITAL SUPPORT  ·  Digital Support Content Area 2</a:t>
+            </a:r>
+          </a:p>
+        </p:txBody>
+      </p:sp>
+      <p:sp>
+        <p:nvSpPr>
+          <p:cNvPr id="3" name="TextBox 2"/>
+          <p:cNvSpPr txBox="1"/>
+          <p:nvPr/>
+        </p:nvSpPr>
+        <p:spPr>
+          <a:xfrm>
+            <a:off x="548640" y="566928"/>
+            <a:ext cx="11094415" cy="822960"/>
+          </a:xfrm>
+          <a:prstGeom prst="rect">
+            <a:avLst/>
+          </a:prstGeom>
+          <a:noFill/>
+        </p:spPr>
+        <p:txBody>
+          <a:bodyPr wrap="square" anchor="ctr" lIns="0" rIns="0" tIns="0" bIns="0"/>
+          <a:lstStyle/>
+          <a:p>
+            <a:pPr algn="l"/>
+            <a:r>
+              <a:rPr sz="3200" b="1" i="0">
+                <a:solidFill>
+                  <a:srgbClr val="03306E"/>
+                </a:solidFill>
+                <a:latin typeface="Cambria"/>
+              </a:rPr>
+              <a:t>Check your understanding</a:t>
+            </a:r>
+          </a:p>
+        </p:txBody>
+      </p:sp>
+      <p:sp>
+        <p:nvSpPr>
+          <p:cNvPr id="4" name="TextBox 3"/>
+          <p:cNvSpPr txBox="1"/>
+          <p:nvPr/>
+        </p:nvSpPr>
+        <p:spPr>
+          <a:xfrm>
+            <a:off x="548640" y="6446520"/>
+            <a:ext cx="8229600" cy="274320"/>
+          </a:xfrm>
+          <a:prstGeom prst="rect">
+            <a:avLst/>
+          </a:prstGeom>
+          <a:noFill/>
+        </p:spPr>
+        <p:txBody>
+          <a:bodyPr wrap="square" anchor="t" lIns="0" rIns="0" tIns="0" bIns="0"/>
+          <a:lstStyle/>
+          <a:p>
+            <a:pPr algn="l"/>
+            <a:r>
+              <a:rPr sz="1000" b="0" i="0">
+                <a:solidFill>
+                  <a:srgbClr val="54595D"/>
+                </a:solidFill>
+                <a:latin typeface="Calibri"/>
+              </a:rPr>
+              <a:t>Digital Support and Security T Level  ·  Domains, Email and Remote Access</a:t>
+            </a:r>
+          </a:p>
+        </p:txBody>
+      </p:sp>
+      <p:sp>
+        <p:nvSpPr>
+          <p:cNvPr id="5" name="TextBox 4"/>
+          <p:cNvSpPr txBox="1"/>
+          <p:nvPr/>
+        </p:nvSpPr>
+        <p:spPr>
+          <a:xfrm>
+            <a:off x="10728655" y="6446520"/>
+            <a:ext cx="914400" cy="274320"/>
+          </a:xfrm>
+          <a:prstGeom prst="rect">
+            <a:avLst/>
+          </a:prstGeom>
+          <a:noFill/>
+        </p:spPr>
+        <p:txBody>
+          <a:bodyPr wrap="square" anchor="t" lIns="0" rIns="0" tIns="0" bIns="0"/>
+          <a:lstStyle/>
+          <a:p>
+            <a:pPr algn="r"/>
+            <a:r>
+              <a:rPr sz="1000" b="0" i="0">
+                <a:solidFill>
+                  <a:srgbClr val="54595D"/>
+                </a:solidFill>
+                <a:latin typeface="Calibri"/>
+              </a:rPr>
+              <a:t>13</a:t>
+            </a:r>
+          </a:p>
+        </p:txBody>
+      </p:sp>
+      <p:sp>
+        <p:nvSpPr>
+          <p:cNvPr id="6" name="Oval 5"/>
+          <p:cNvSpPr/>
+          <p:nvPr/>
+        </p:nvSpPr>
+        <p:spPr>
+          <a:xfrm>
+            <a:off x="548640" y="1618488"/>
+            <a:ext cx="411480" cy="411480"/>
+          </a:xfrm>
+          <a:prstGeom prst="ellipse">
+            <a:avLst/>
+          </a:prstGeom>
+          <a:solidFill>
+            <a:srgbClr val="4EA1FF"/>
+          </a:solidFill>
+          <a:ln>
+            <a:noFill/>
+          </a:ln>
+          <a:effectLst/>
+        </p:spPr>
+        <p:style>
+          <a:lnRef idx="1">
+            <a:schemeClr val="accent1"/>
+          </a:lnRef>
+          <a:fillRef idx="3">
+            <a:schemeClr val="accent1"/>
+          </a:fillRef>
+          <a:effectRef idx="2">
+            <a:schemeClr val="accent1"/>
+          </a:effectRef>
+          <a:fontRef idx="minor">
+            <a:schemeClr val="lt1"/>
+          </a:fontRef>
+        </p:style>
+        <p:txBody>
+          <a:bodyPr rtlCol="0" anchor="ctr" lIns="0" rIns="0" tIns="0" bIns="0"/>
+          <a:lstStyle/>
+          <a:p>
+            <a:pPr algn="ctr"/>
+            <a:r>
+              <a:rPr sz="1400" b="1">
+                <a:solidFill>
+                  <a:srgbClr val="202122"/>
+                </a:solidFill>
+                <a:latin typeface="Calibri"/>
+              </a:rPr>
+              <a:t>1</a:t>
+            </a:r>
+          </a:p>
+        </p:txBody>
+      </p:sp>
+      <p:sp>
+        <p:nvSpPr>
+          <p:cNvPr id="7" name="TextBox 6"/>
+          <p:cNvSpPr txBox="1"/>
+          <p:nvPr/>
+        </p:nvSpPr>
+        <p:spPr>
+          <a:xfrm>
+            <a:off x="1234440" y="1600200"/>
+            <a:ext cx="10408615" cy="791870"/>
+          </a:xfrm>
+          <a:prstGeom prst="rect">
+            <a:avLst/>
+          </a:prstGeom>
+          <a:noFill/>
+        </p:spPr>
+        <p:txBody>
+          <a:bodyPr wrap="square" anchor="t" lIns="0" rIns="0" tIns="0" bIns="0"/>
+          <a:lstStyle/>
+          <a:p>
+            <a:pPr algn="l"/>
+            <a:r>
+              <a:rPr sz="2200" b="0" i="0">
+                <a:solidFill>
+                  <a:srgbClr val="202122"/>
+                </a:solidFill>
+                <a:latin typeface="Calibri"/>
+              </a:rPr>
+              <a:t>Which protocol keeps mail on the server?</a:t>
+            </a:r>
+          </a:p>
+        </p:txBody>
+      </p:sp>
+      <p:sp>
+        <p:nvSpPr>
+          <p:cNvPr id="8" name="Oval 7"/>
+          <p:cNvSpPr/>
+          <p:nvPr/>
+        </p:nvSpPr>
+        <p:spPr>
+          <a:xfrm>
+            <a:off x="548640" y="2574950"/>
+            <a:ext cx="411480" cy="411480"/>
+          </a:xfrm>
+          <a:prstGeom prst="ellipse">
+            <a:avLst/>
+          </a:prstGeom>
+          <a:solidFill>
+            <a:srgbClr val="4EA1FF"/>
+          </a:solidFill>
+          <a:ln>
+            <a:noFill/>
+          </a:ln>
+          <a:effectLst/>
+        </p:spPr>
+        <p:style>
+          <a:lnRef idx="1">
+            <a:schemeClr val="accent1"/>
+          </a:lnRef>
+          <a:fillRef idx="3">
+            <a:schemeClr val="accent1"/>
+          </a:fillRef>
+          <a:effectRef idx="2">
+            <a:schemeClr val="accent1"/>
+          </a:effectRef>
+          <a:fontRef idx="minor">
+            <a:schemeClr val="lt1"/>
+          </a:fontRef>
+        </p:style>
+        <p:txBody>
+          <a:bodyPr rtlCol="0" anchor="ctr" lIns="0" rIns="0" tIns="0" bIns="0"/>
+          <a:lstStyle/>
+          <a:p>
+            <a:pPr algn="ctr"/>
+            <a:r>
+              <a:rPr sz="1400" b="1">
+                <a:solidFill>
+                  <a:srgbClr val="202122"/>
+                </a:solidFill>
+                <a:latin typeface="Calibri"/>
+              </a:rPr>
+              <a:t>2</a:t>
+            </a:r>
+          </a:p>
+        </p:txBody>
+      </p:sp>
+      <p:sp>
+        <p:nvSpPr>
+          <p:cNvPr id="9" name="TextBox 8"/>
+          <p:cNvSpPr txBox="1"/>
+          <p:nvPr/>
+        </p:nvSpPr>
+        <p:spPr>
+          <a:xfrm>
+            <a:off x="1234440" y="2556662"/>
+            <a:ext cx="10408615" cy="791870"/>
+          </a:xfrm>
+          <a:prstGeom prst="rect">
+            <a:avLst/>
+          </a:prstGeom>
+          <a:noFill/>
+        </p:spPr>
+        <p:txBody>
+          <a:bodyPr wrap="square" anchor="t" lIns="0" rIns="0" tIns="0" bIns="0"/>
+          <a:lstStyle/>
+          <a:p>
+            <a:pPr algn="l"/>
+            <a:r>
+              <a:rPr sz="2200" b="0" i="0">
+                <a:solidFill>
+                  <a:srgbClr val="202122"/>
+                </a:solidFill>
+                <a:latin typeface="Calibri"/>
+              </a:rPr>
+              <a:t>Which protocol sends email?</a:t>
+            </a:r>
+          </a:p>
+        </p:txBody>
+      </p:sp>
+      <p:sp>
+        <p:nvSpPr>
+          <p:cNvPr id="10" name="Oval 9"/>
+          <p:cNvSpPr/>
+          <p:nvPr/>
+        </p:nvSpPr>
+        <p:spPr>
+          <a:xfrm>
+            <a:off x="548640" y="3531412"/>
+            <a:ext cx="411480" cy="411480"/>
+          </a:xfrm>
+          <a:prstGeom prst="ellipse">
+            <a:avLst/>
+          </a:prstGeom>
+          <a:solidFill>
+            <a:srgbClr val="4EA1FF"/>
+          </a:solidFill>
+          <a:ln>
+            <a:noFill/>
+          </a:ln>
+          <a:effectLst/>
+        </p:spPr>
+        <p:style>
+          <a:lnRef idx="1">
+            <a:schemeClr val="accent1"/>
+          </a:lnRef>
+          <a:fillRef idx="3">
+            <a:schemeClr val="accent1"/>
+          </a:fillRef>
+          <a:effectRef idx="2">
+            <a:schemeClr val="accent1"/>
+          </a:effectRef>
+          <a:fontRef idx="minor">
+            <a:schemeClr val="lt1"/>
+          </a:fontRef>
+        </p:style>
+        <p:txBody>
+          <a:bodyPr rtlCol="0" anchor="ctr" lIns="0" rIns="0" tIns="0" bIns="0"/>
+          <a:lstStyle/>
+          <a:p>
+            <a:pPr algn="ctr"/>
+            <a:r>
+              <a:rPr sz="1400" b="1">
+                <a:solidFill>
+                  <a:srgbClr val="202122"/>
+                </a:solidFill>
+                <a:latin typeface="Calibri"/>
+              </a:rPr>
+              <a:t>3</a:t>
+            </a:r>
+          </a:p>
+        </p:txBody>
+      </p:sp>
+      <p:sp>
+        <p:nvSpPr>
+          <p:cNvPr id="11" name="TextBox 10"/>
+          <p:cNvSpPr txBox="1"/>
+          <p:nvPr/>
+        </p:nvSpPr>
+        <p:spPr>
+          <a:xfrm>
+            <a:off x="1234440" y="3513124"/>
+            <a:ext cx="10408615" cy="791870"/>
+          </a:xfrm>
+          <a:prstGeom prst="rect">
+            <a:avLst/>
+          </a:prstGeom>
+          <a:noFill/>
+        </p:spPr>
+        <p:txBody>
+          <a:bodyPr wrap="square" anchor="t" lIns="0" rIns="0" tIns="0" bIns="0"/>
+          <a:lstStyle/>
+          <a:p>
+            <a:pPr algn="l"/>
+            <a:r>
+              <a:rPr sz="2200" b="0" i="0">
+                <a:solidFill>
+                  <a:srgbClr val="202122"/>
+                </a:solidFill>
+                <a:latin typeface="Calibri"/>
+              </a:rPr>
+              <a:t>What is an MX record?</a:t>
+            </a:r>
+          </a:p>
+        </p:txBody>
+      </p:sp>
+      <p:sp>
+        <p:nvSpPr>
+          <p:cNvPr id="12" name="Oval 11"/>
+          <p:cNvSpPr/>
+          <p:nvPr/>
+        </p:nvSpPr>
+        <p:spPr>
+          <a:xfrm>
+            <a:off x="548640" y="4487875"/>
+            <a:ext cx="411480" cy="411480"/>
+          </a:xfrm>
+          <a:prstGeom prst="ellipse">
+            <a:avLst/>
+          </a:prstGeom>
+          <a:solidFill>
+            <a:srgbClr val="4EA1FF"/>
+          </a:solidFill>
+          <a:ln>
+            <a:noFill/>
+          </a:ln>
+          <a:effectLst/>
+        </p:spPr>
+        <p:style>
+          <a:lnRef idx="1">
+            <a:schemeClr val="accent1"/>
+          </a:lnRef>
+          <a:fillRef idx="3">
+            <a:schemeClr val="accent1"/>
+          </a:fillRef>
+          <a:effectRef idx="2">
+            <a:schemeClr val="accent1"/>
+          </a:effectRef>
+          <a:fontRef idx="minor">
+            <a:schemeClr val="lt1"/>
+          </a:fontRef>
+        </p:style>
+        <p:txBody>
+          <a:bodyPr rtlCol="0" anchor="ctr" lIns="0" rIns="0" tIns="0" bIns="0"/>
+          <a:lstStyle/>
+          <a:p>
+            <a:pPr algn="ctr"/>
+            <a:r>
+              <a:rPr sz="1400" b="1">
+                <a:solidFill>
+                  <a:srgbClr val="202122"/>
+                </a:solidFill>
+                <a:latin typeface="Calibri"/>
+              </a:rPr>
+              <a:t>4</a:t>
+            </a:r>
+          </a:p>
+        </p:txBody>
+      </p:sp>
+      <p:sp>
+        <p:nvSpPr>
+          <p:cNvPr id="13" name="TextBox 12"/>
+          <p:cNvSpPr txBox="1"/>
+          <p:nvPr/>
+        </p:nvSpPr>
+        <p:spPr>
+          <a:xfrm>
+            <a:off x="1234440" y="4469587"/>
+            <a:ext cx="10408615" cy="791870"/>
+          </a:xfrm>
+          <a:prstGeom prst="rect">
+            <a:avLst/>
+          </a:prstGeom>
+          <a:noFill/>
+        </p:spPr>
+        <p:txBody>
+          <a:bodyPr wrap="square" anchor="t" lIns="0" rIns="0" tIns="0" bIns="0"/>
+          <a:lstStyle/>
+          <a:p>
+            <a:pPr algn="l"/>
+            <a:r>
+              <a:rPr sz="2200" b="0" i="0">
+                <a:solidFill>
+                  <a:srgbClr val="202122"/>
+                </a:solidFill>
+                <a:latin typeface="Calibri"/>
+              </a:rPr>
+              <a:t>What two things does a VPN do for privacy?</a:t>
+            </a:r>
+          </a:p>
+        </p:txBody>
+      </p:sp>
+      <p:sp>
+        <p:nvSpPr>
+          <p:cNvPr id="14" name="Oval 13"/>
+          <p:cNvSpPr/>
+          <p:nvPr/>
+        </p:nvSpPr>
+        <p:spPr>
+          <a:xfrm>
+            <a:off x="548640" y="5444337"/>
+            <a:ext cx="411480" cy="411480"/>
+          </a:xfrm>
+          <a:prstGeom prst="ellipse">
+            <a:avLst/>
+          </a:prstGeom>
+          <a:solidFill>
+            <a:srgbClr val="4EA1FF"/>
+          </a:solidFill>
+          <a:ln>
+            <a:noFill/>
+          </a:ln>
+          <a:effectLst/>
+        </p:spPr>
+        <p:style>
+          <a:lnRef idx="1">
+            <a:schemeClr val="accent1"/>
+          </a:lnRef>
+          <a:fillRef idx="3">
+            <a:schemeClr val="accent1"/>
+          </a:fillRef>
+          <a:effectRef idx="2">
+            <a:schemeClr val="accent1"/>
+          </a:effectRef>
+          <a:fontRef idx="minor">
+            <a:schemeClr val="lt1"/>
+          </a:fontRef>
+        </p:style>
+        <p:txBody>
+          <a:bodyPr rtlCol="0" anchor="ctr" lIns="0" rIns="0" tIns="0" bIns="0"/>
+          <a:lstStyle/>
+          <a:p>
+            <a:pPr algn="ctr"/>
+            <a:r>
+              <a:rPr sz="1400" b="1">
+                <a:solidFill>
+                  <a:srgbClr val="202122"/>
+                </a:solidFill>
+                <a:latin typeface="Calibri"/>
+              </a:rPr>
+              <a:t>5</a:t>
+            </a:r>
+          </a:p>
+        </p:txBody>
+      </p:sp>
+      <p:sp>
+        <p:nvSpPr>
+          <p:cNvPr id="15" name="TextBox 14"/>
+          <p:cNvSpPr txBox="1"/>
+          <p:nvPr/>
+        </p:nvSpPr>
+        <p:spPr>
+          <a:xfrm>
+            <a:off x="1234440" y="5426049"/>
+            <a:ext cx="10408615" cy="791870"/>
+          </a:xfrm>
+          <a:prstGeom prst="rect">
+            <a:avLst/>
+          </a:prstGeom>
+          <a:noFill/>
+        </p:spPr>
+        <p:txBody>
+          <a:bodyPr wrap="square" anchor="t" lIns="0" rIns="0" tIns="0" bIns="0"/>
+          <a:lstStyle/>
+          <a:p>
+            <a:pPr algn="l"/>
+            <a:r>
+              <a:rPr sz="2200" b="0" i="0">
+                <a:solidFill>
+                  <a:srgbClr val="202122"/>
+                </a:solidFill>
+                <a:latin typeface="Calibri"/>
+              </a:rPr>
+              <a:t>What does a certificate authority issue?</a:t>
+            </a:r>
+          </a:p>
+        </p:txBody>
+      </p:sp>
+    </p:spTree>
+  </p:cSld>
+  <p:clrMapOvr>
+    <a:masterClrMapping/>
+  </p:clrMapOvr>
+</p:sld>
+</file>
+
+<file path=ppt/slides/slide14.xml><?xml version="1.0" encoding="utf-8"?>
+<p:sld xmlns:a="http://schemas.openxmlformats.org/drawingml/2006/main" xmlns:p="http://schemas.openxmlformats.org/presentationml/2006/main" xmlns:r="http://schemas.openxmlformats.org/officeDocument/2006/relationships">
+  <p:cSld>
+    <p:bg>
+      <p:bgPr>
+        <a:solidFill>
+          <a:srgbClr val="FFFFFF"/>
+        </a:solidFill>
+        <a:effectLst/>
+      </p:bgPr>
+    </p:bg>
+    <p:spTree>
+      <p:nvGrpSpPr>
+        <p:cNvPr id="1" name=""/>
+        <p:cNvGrpSpPr/>
+        <p:nvPr/>
+      </p:nvGrpSpPr>
+      <p:grpSpPr/>
+      <p:sp>
+        <p:nvSpPr>
+          <p:cNvPr id="2" name="TextBox 1"/>
+          <p:cNvSpPr txBox="1"/>
+          <p:nvPr/>
+        </p:nvSpPr>
+        <p:spPr>
+          <a:xfrm>
+            <a:off x="548640" y="320040"/>
+            <a:ext cx="11094415" cy="274320"/>
+          </a:xfrm>
+          <a:prstGeom prst="rect">
+            <a:avLst/>
+          </a:prstGeom>
+          <a:noFill/>
+        </p:spPr>
+        <p:txBody>
+          <a:bodyPr wrap="square" anchor="t" lIns="0" rIns="0" tIns="0" bIns="0"/>
+          <a:lstStyle/>
+          <a:p>
+            <a:pPr algn="l"/>
+            <a:r>
+              <a:rPr sz="1100" b="1" i="0">
+                <a:solidFill>
+                  <a:srgbClr val="54595D"/>
+                </a:solidFill>
+                <a:latin typeface="Calibri"/>
+              </a:rPr>
+              <a:t>DIGITAL SUPPORT  ·  Digital Support Content Area 2</a:t>
+            </a:r>
+          </a:p>
+        </p:txBody>
+      </p:sp>
+      <p:sp>
+        <p:nvSpPr>
+          <p:cNvPr id="3" name="TextBox 2"/>
+          <p:cNvSpPr txBox="1"/>
+          <p:nvPr/>
+        </p:nvSpPr>
+        <p:spPr>
+          <a:xfrm>
+            <a:off x="548640" y="566928"/>
+            <a:ext cx="11094415" cy="822960"/>
+          </a:xfrm>
+          <a:prstGeom prst="rect">
+            <a:avLst/>
+          </a:prstGeom>
+          <a:noFill/>
+        </p:spPr>
+        <p:txBody>
+          <a:bodyPr wrap="square" anchor="ctr" lIns="0" rIns="0" tIns="0" bIns="0"/>
+          <a:lstStyle/>
+          <a:p>
+            <a:pPr algn="l"/>
+            <a:r>
+              <a:rPr sz="3200" b="1" i="0">
+                <a:solidFill>
+                  <a:srgbClr val="03306E"/>
+                </a:solidFill>
+                <a:latin typeface="Cambria"/>
+              </a:rPr>
+              <a:t>Answers</a:t>
+            </a:r>
+          </a:p>
+        </p:txBody>
+      </p:sp>
+      <p:sp>
+        <p:nvSpPr>
+          <p:cNvPr id="4" name="TextBox 3"/>
+          <p:cNvSpPr txBox="1"/>
+          <p:nvPr/>
+        </p:nvSpPr>
+        <p:spPr>
+          <a:xfrm>
+            <a:off x="548640" y="6446520"/>
+            <a:ext cx="8229600" cy="274320"/>
+          </a:xfrm>
+          <a:prstGeom prst="rect">
+            <a:avLst/>
+          </a:prstGeom>
+          <a:noFill/>
+        </p:spPr>
+        <p:txBody>
+          <a:bodyPr wrap="square" anchor="t" lIns="0" rIns="0" tIns="0" bIns="0"/>
+          <a:lstStyle/>
+          <a:p>
+            <a:pPr algn="l"/>
+            <a:r>
+              <a:rPr sz="1000" b="0" i="0">
+                <a:solidFill>
+                  <a:srgbClr val="54595D"/>
+                </a:solidFill>
+                <a:latin typeface="Calibri"/>
+              </a:rPr>
+              <a:t>Digital Support and Security T Level  ·  Domains, Email and Remote Access</a:t>
+            </a:r>
+          </a:p>
+        </p:txBody>
+      </p:sp>
+      <p:sp>
+        <p:nvSpPr>
+          <p:cNvPr id="5" name="TextBox 4"/>
+          <p:cNvSpPr txBox="1"/>
+          <p:nvPr/>
+        </p:nvSpPr>
+        <p:spPr>
+          <a:xfrm>
+            <a:off x="10728655" y="6446520"/>
+            <a:ext cx="914400" cy="274320"/>
+          </a:xfrm>
+          <a:prstGeom prst="rect">
+            <a:avLst/>
+          </a:prstGeom>
+          <a:noFill/>
+        </p:spPr>
+        <p:txBody>
+          <a:bodyPr wrap="square" anchor="t" lIns="0" rIns="0" tIns="0" bIns="0"/>
+          <a:lstStyle/>
+          <a:p>
+            <a:pPr algn="r"/>
+            <a:r>
+              <a:rPr sz="1000" b="0" i="0">
+                <a:solidFill>
+                  <a:srgbClr val="54595D"/>
+                </a:solidFill>
+                <a:latin typeface="Calibri"/>
+              </a:rPr>
+              <a:t>14</a:t>
+            </a:r>
+          </a:p>
+        </p:txBody>
+      </p:sp>
+      <p:sp>
+        <p:nvSpPr>
+          <p:cNvPr id="6" name="Oval 5"/>
+          <p:cNvSpPr/>
+          <p:nvPr/>
+        </p:nvSpPr>
+        <p:spPr>
+          <a:xfrm>
+            <a:off x="548640" y="1618488"/>
+            <a:ext cx="411480" cy="411480"/>
+          </a:xfrm>
+          <a:prstGeom prst="ellipse">
+            <a:avLst/>
+          </a:prstGeom>
+          <a:solidFill>
+            <a:srgbClr val="4EA1FF"/>
+          </a:solidFill>
+          <a:ln>
+            <a:noFill/>
+          </a:ln>
+          <a:effectLst/>
+        </p:spPr>
+        <p:style>
+          <a:lnRef idx="1">
+            <a:schemeClr val="accent1"/>
+          </a:lnRef>
+          <a:fillRef idx="3">
+            <a:schemeClr val="accent1"/>
+          </a:fillRef>
+          <a:effectRef idx="2">
+            <a:schemeClr val="accent1"/>
+          </a:effectRef>
+          <a:fontRef idx="minor">
+            <a:schemeClr val="lt1"/>
+          </a:fontRef>
+        </p:style>
+        <p:txBody>
+          <a:bodyPr rtlCol="0" anchor="ctr" lIns="0" rIns="0" tIns="0" bIns="0"/>
+          <a:lstStyle/>
+          <a:p>
+            <a:pPr algn="ctr"/>
+            <a:r>
+              <a:rPr sz="1400" b="1">
+                <a:solidFill>
+                  <a:srgbClr val="202122"/>
+                </a:solidFill>
+                <a:latin typeface="Calibri"/>
+              </a:rPr>
+              <a:t>1</a:t>
+            </a:r>
+          </a:p>
+        </p:txBody>
+      </p:sp>
+      <p:sp>
+        <p:nvSpPr>
+          <p:cNvPr id="7" name="TextBox 6"/>
+          <p:cNvSpPr txBox="1"/>
+          <p:nvPr/>
+        </p:nvSpPr>
+        <p:spPr>
+          <a:xfrm>
+            <a:off x="1234440" y="1600200"/>
+            <a:ext cx="10408615" cy="791870"/>
+          </a:xfrm>
+          <a:prstGeom prst="rect">
+            <a:avLst/>
+          </a:prstGeom>
+          <a:noFill/>
+        </p:spPr>
+        <p:txBody>
+          <a:bodyPr wrap="square" anchor="t" lIns="0" rIns="0" tIns="0" bIns="0"/>
+          <a:lstStyle/>
+          <a:p>
+            <a:pPr algn="l"/>
+            <a:r>
+              <a:rPr sz="1800" b="0" i="0">
+                <a:solidFill>
+                  <a:srgbClr val="54595D"/>
+                </a:solidFill>
+                <a:latin typeface="Calibri"/>
+              </a:rPr>
+              <a:t>Which protocol keeps mail on the server?</a:t>
+            </a:r>
+          </a:p>
+          <a:p>
+            <a:r>
+              <a:rPr sz="1800" b="1">
+                <a:solidFill>
+                  <a:srgbClr val="03306E"/>
+                </a:solidFill>
+                <a:latin typeface="Calibri"/>
+              </a:rPr>
+              <a:t>IMAP.</a:t>
+            </a:r>
+          </a:p>
+        </p:txBody>
+      </p:sp>
+      <p:sp>
+        <p:nvSpPr>
+          <p:cNvPr id="8" name="Oval 7"/>
+          <p:cNvSpPr/>
+          <p:nvPr/>
+        </p:nvSpPr>
+        <p:spPr>
+          <a:xfrm>
+            <a:off x="548640" y="2574950"/>
+            <a:ext cx="411480" cy="411480"/>
+          </a:xfrm>
+          <a:prstGeom prst="ellipse">
+            <a:avLst/>
+          </a:prstGeom>
+          <a:solidFill>
+            <a:srgbClr val="4EA1FF"/>
+          </a:solidFill>
+          <a:ln>
+            <a:noFill/>
+          </a:ln>
+          <a:effectLst/>
+        </p:spPr>
+        <p:style>
+          <a:lnRef idx="1">
+            <a:schemeClr val="accent1"/>
+          </a:lnRef>
+          <a:fillRef idx="3">
+            <a:schemeClr val="accent1"/>
+          </a:fillRef>
+          <a:effectRef idx="2">
+            <a:schemeClr val="accent1"/>
+          </a:effectRef>
+          <a:fontRef idx="minor">
+            <a:schemeClr val="lt1"/>
+          </a:fontRef>
+        </p:style>
+        <p:txBody>
+          <a:bodyPr rtlCol="0" anchor="ctr" lIns="0" rIns="0" tIns="0" bIns="0"/>
+          <a:lstStyle/>
+          <a:p>
+            <a:pPr algn="ctr"/>
+            <a:r>
+              <a:rPr sz="1400" b="1">
+                <a:solidFill>
+                  <a:srgbClr val="202122"/>
+                </a:solidFill>
+                <a:latin typeface="Calibri"/>
+              </a:rPr>
+              <a:t>2</a:t>
+            </a:r>
+          </a:p>
+        </p:txBody>
+      </p:sp>
+      <p:sp>
+        <p:nvSpPr>
+          <p:cNvPr id="9" name="TextBox 8"/>
+          <p:cNvSpPr txBox="1"/>
+          <p:nvPr/>
+        </p:nvSpPr>
+        <p:spPr>
+          <a:xfrm>
+            <a:off x="1234440" y="2556662"/>
+            <a:ext cx="10408615" cy="791870"/>
+          </a:xfrm>
+          <a:prstGeom prst="rect">
+            <a:avLst/>
+          </a:prstGeom>
+          <a:noFill/>
+        </p:spPr>
+        <p:txBody>
+          <a:bodyPr wrap="square" anchor="t" lIns="0" rIns="0" tIns="0" bIns="0"/>
+          <a:lstStyle/>
+          <a:p>
+            <a:pPr algn="l"/>
+            <a:r>
+              <a:rPr sz="1800" b="0" i="0">
+                <a:solidFill>
+                  <a:srgbClr val="54595D"/>
+                </a:solidFill>
+                <a:latin typeface="Calibri"/>
+              </a:rPr>
+              <a:t>Which protocol sends email?</a:t>
+            </a:r>
+          </a:p>
+          <a:p>
+            <a:r>
+              <a:rPr sz="1800" b="1">
+                <a:solidFill>
+                  <a:srgbClr val="03306E"/>
+                </a:solidFill>
+                <a:latin typeface="Calibri"/>
+              </a:rPr>
+              <a:t>SMTP.</a:t>
+            </a:r>
+          </a:p>
+        </p:txBody>
+      </p:sp>
+      <p:sp>
+        <p:nvSpPr>
+          <p:cNvPr id="10" name="Oval 9"/>
+          <p:cNvSpPr/>
+          <p:nvPr/>
+        </p:nvSpPr>
+        <p:spPr>
+          <a:xfrm>
+            <a:off x="548640" y="3531412"/>
+            <a:ext cx="411480" cy="411480"/>
+          </a:xfrm>
+          <a:prstGeom prst="ellipse">
+            <a:avLst/>
+          </a:prstGeom>
+          <a:solidFill>
+            <a:srgbClr val="4EA1FF"/>
+          </a:solidFill>
+          <a:ln>
+            <a:noFill/>
+          </a:ln>
+          <a:effectLst/>
+        </p:spPr>
+        <p:style>
+          <a:lnRef idx="1">
+            <a:schemeClr val="accent1"/>
+          </a:lnRef>
+          <a:fillRef idx="3">
+            <a:schemeClr val="accent1"/>
+          </a:fillRef>
+          <a:effectRef idx="2">
+            <a:schemeClr val="accent1"/>
+          </a:effectRef>
+          <a:fontRef idx="minor">
+            <a:schemeClr val="lt1"/>
+          </a:fontRef>
+        </p:style>
+        <p:txBody>
+          <a:bodyPr rtlCol="0" anchor="ctr" lIns="0" rIns="0" tIns="0" bIns="0"/>
+          <a:lstStyle/>
+          <a:p>
+            <a:pPr algn="ctr"/>
+            <a:r>
+              <a:rPr sz="1400" b="1">
+                <a:solidFill>
+                  <a:srgbClr val="202122"/>
+                </a:solidFill>
+                <a:latin typeface="Calibri"/>
+              </a:rPr>
+              <a:t>3</a:t>
+            </a:r>
+          </a:p>
+        </p:txBody>
+      </p:sp>
+      <p:sp>
+        <p:nvSpPr>
+          <p:cNvPr id="11" name="TextBox 10"/>
+          <p:cNvSpPr txBox="1"/>
+          <p:nvPr/>
+        </p:nvSpPr>
+        <p:spPr>
+          <a:xfrm>
+            <a:off x="1234440" y="3513124"/>
+            <a:ext cx="10408615" cy="791870"/>
+          </a:xfrm>
+          <a:prstGeom prst="rect">
+            <a:avLst/>
+          </a:prstGeom>
+          <a:noFill/>
+        </p:spPr>
+        <p:txBody>
+          <a:bodyPr wrap="square" anchor="t" lIns="0" rIns="0" tIns="0" bIns="0"/>
+          <a:lstStyle/>
+          <a:p>
+            <a:pPr algn="l"/>
+            <a:r>
+              <a:rPr sz="1800" b="0" i="0">
+                <a:solidFill>
+                  <a:srgbClr val="54595D"/>
+                </a:solidFill>
+                <a:latin typeface="Calibri"/>
+              </a:rPr>
+              <a:t>What is an MX record?</a:t>
+            </a:r>
+          </a:p>
+          <a:p>
+            <a:r>
+              <a:rPr sz="1800" b="1">
+                <a:solidFill>
+                  <a:srgbClr val="03306E"/>
+                </a:solidFill>
+                <a:latin typeface="Calibri"/>
+              </a:rPr>
+              <a:t>A DNS record that says which server receives mail for a domain.</a:t>
+            </a:r>
+          </a:p>
+        </p:txBody>
+      </p:sp>
+      <p:sp>
+        <p:nvSpPr>
+          <p:cNvPr id="12" name="Oval 11"/>
+          <p:cNvSpPr/>
+          <p:nvPr/>
+        </p:nvSpPr>
+        <p:spPr>
+          <a:xfrm>
+            <a:off x="548640" y="4487875"/>
+            <a:ext cx="411480" cy="411480"/>
+          </a:xfrm>
+          <a:prstGeom prst="ellipse">
+            <a:avLst/>
+          </a:prstGeom>
+          <a:solidFill>
+            <a:srgbClr val="4EA1FF"/>
+          </a:solidFill>
+          <a:ln>
+            <a:noFill/>
+          </a:ln>
+          <a:effectLst/>
+        </p:spPr>
+        <p:style>
+          <a:lnRef idx="1">
+            <a:schemeClr val="accent1"/>
+          </a:lnRef>
+          <a:fillRef idx="3">
+            <a:schemeClr val="accent1"/>
+          </a:fillRef>
+          <a:effectRef idx="2">
+            <a:schemeClr val="accent1"/>
+          </a:effectRef>
+          <a:fontRef idx="minor">
+            <a:schemeClr val="lt1"/>
+          </a:fontRef>
+        </p:style>
+        <p:txBody>
+          <a:bodyPr rtlCol="0" anchor="ctr" lIns="0" rIns="0" tIns="0" bIns="0"/>
+          <a:lstStyle/>
+          <a:p>
+            <a:pPr algn="ctr"/>
+            <a:r>
+              <a:rPr sz="1400" b="1">
+                <a:solidFill>
+                  <a:srgbClr val="202122"/>
+                </a:solidFill>
+                <a:latin typeface="Calibri"/>
+              </a:rPr>
+              <a:t>4</a:t>
+            </a:r>
+          </a:p>
+        </p:txBody>
+      </p:sp>
+      <p:sp>
+        <p:nvSpPr>
+          <p:cNvPr id="13" name="TextBox 12"/>
+          <p:cNvSpPr txBox="1"/>
+          <p:nvPr/>
+        </p:nvSpPr>
+        <p:spPr>
+          <a:xfrm>
+            <a:off x="1234440" y="4469587"/>
+            <a:ext cx="10408615" cy="791870"/>
+          </a:xfrm>
+          <a:prstGeom prst="rect">
+            <a:avLst/>
+          </a:prstGeom>
+          <a:noFill/>
+        </p:spPr>
+        <p:txBody>
+          <a:bodyPr wrap="square" anchor="t" lIns="0" rIns="0" tIns="0" bIns="0"/>
+          <a:lstStyle/>
+          <a:p>
+            <a:pPr algn="l"/>
+            <a:r>
+              <a:rPr sz="1800" b="0" i="0">
+                <a:solidFill>
+                  <a:srgbClr val="54595D"/>
+                </a:solidFill>
+                <a:latin typeface="Calibri"/>
+              </a:rPr>
+              <a:t>What two things does a VPN do for privacy?</a:t>
+            </a:r>
+          </a:p>
+          <a:p>
+            <a:r>
+              <a:rPr sz="1800" b="1">
+                <a:solidFill>
+                  <a:srgbClr val="03306E"/>
+                </a:solidFill>
+                <a:latin typeface="Calibri"/>
+              </a:rPr>
+              <a:t>Encrypts traffic and masks the client's IP address.</a:t>
+            </a:r>
+          </a:p>
+        </p:txBody>
+      </p:sp>
+      <p:sp>
+        <p:nvSpPr>
+          <p:cNvPr id="14" name="Oval 13"/>
+          <p:cNvSpPr/>
+          <p:nvPr/>
+        </p:nvSpPr>
+        <p:spPr>
+          <a:xfrm>
+            <a:off x="548640" y="5444337"/>
+            <a:ext cx="411480" cy="411480"/>
+          </a:xfrm>
+          <a:prstGeom prst="ellipse">
+            <a:avLst/>
+          </a:prstGeom>
+          <a:solidFill>
+            <a:srgbClr val="4EA1FF"/>
+          </a:solidFill>
+          <a:ln>
+            <a:noFill/>
+          </a:ln>
+          <a:effectLst/>
+        </p:spPr>
+        <p:style>
+          <a:lnRef idx="1">
+            <a:schemeClr val="accent1"/>
+          </a:lnRef>
+          <a:fillRef idx="3">
+            <a:schemeClr val="accent1"/>
+          </a:fillRef>
+          <a:effectRef idx="2">
+            <a:schemeClr val="accent1"/>
+          </a:effectRef>
+          <a:fontRef idx="minor">
+            <a:schemeClr val="lt1"/>
+          </a:fontRef>
+        </p:style>
+        <p:txBody>
+          <a:bodyPr rtlCol="0" anchor="ctr" lIns="0" rIns="0" tIns="0" bIns="0"/>
+          <a:lstStyle/>
+          <a:p>
+            <a:pPr algn="ctr"/>
+            <a:r>
+              <a:rPr sz="1400" b="1">
+                <a:solidFill>
+                  <a:srgbClr val="202122"/>
+                </a:solidFill>
+                <a:latin typeface="Calibri"/>
+              </a:rPr>
+              <a:t>5</a:t>
+            </a:r>
+          </a:p>
+        </p:txBody>
+      </p:sp>
+      <p:sp>
+        <p:nvSpPr>
+          <p:cNvPr id="15" name="TextBox 14"/>
+          <p:cNvSpPr txBox="1"/>
+          <p:nvPr/>
+        </p:nvSpPr>
+        <p:spPr>
+          <a:xfrm>
+            <a:off x="1234440" y="5426049"/>
+            <a:ext cx="10408615" cy="791870"/>
+          </a:xfrm>
+          <a:prstGeom prst="rect">
+            <a:avLst/>
+          </a:prstGeom>
+          <a:noFill/>
+        </p:spPr>
+        <p:txBody>
+          <a:bodyPr wrap="square" anchor="t" lIns="0" rIns="0" tIns="0" bIns="0"/>
+          <a:lstStyle/>
+          <a:p>
+            <a:pPr algn="l"/>
+            <a:r>
+              <a:rPr sz="1800" b="0" i="0">
+                <a:solidFill>
+                  <a:srgbClr val="54595D"/>
+                </a:solidFill>
+                <a:latin typeface="Calibri"/>
+              </a:rPr>
+              <a:t>What does a certificate authority issue?</a:t>
+            </a:r>
+          </a:p>
+          <a:p>
+            <a:r>
+              <a:rPr sz="1800" b="1">
+                <a:solidFill>
+                  <a:srgbClr val="03306E"/>
+                </a:solidFill>
+                <a:latin typeface="Calibri"/>
+              </a:rPr>
+              <a:t>Digital certificates.</a:t>
+            </a:r>
+          </a:p>
+        </p:txBody>
+      </p:sp>
+    </p:spTree>
+  </p:cSld>
+  <p:clrMapOvr>
+    <a:masterClrMapping/>
+  </p:clrMapOvr>
+</p:sld>
+</file>
+
+<file path=ppt/slides/slide15.xml><?xml version="1.0" encoding="utf-8"?>
+<p:sld xmlns:a="http://schemas.openxmlformats.org/drawingml/2006/main" xmlns:p="http://schemas.openxmlformats.org/presentationml/2006/main" xmlns:r="http://schemas.openxmlformats.org/officeDocument/2006/relationships">
+  <p:cSld>
+    <p:bg>
+      <p:bgPr>
+        <a:solidFill>
+          <a:srgbClr val="FFFFFF"/>
+        </a:solidFill>
+        <a:effectLst/>
+      </p:bgPr>
+    </p:bg>
+    <p:spTree>
+      <p:nvGrpSpPr>
+        <p:cNvPr id="1" name=""/>
+        <p:cNvGrpSpPr/>
+        <p:nvPr/>
+      </p:nvGrpSpPr>
+      <p:grpSpPr/>
+      <p:sp>
+        <p:nvSpPr>
+          <p:cNvPr id="2" name="TextBox 1"/>
+          <p:cNvSpPr txBox="1"/>
+          <p:nvPr/>
+        </p:nvSpPr>
+        <p:spPr>
+          <a:xfrm>
+            <a:off x="548640" y="320040"/>
+            <a:ext cx="11094415" cy="274320"/>
+          </a:xfrm>
+          <a:prstGeom prst="rect">
+            <a:avLst/>
+          </a:prstGeom>
+          <a:noFill/>
+        </p:spPr>
+        <p:txBody>
+          <a:bodyPr wrap="square" anchor="t" lIns="0" rIns="0" tIns="0" bIns="0"/>
+          <a:lstStyle/>
+          <a:p>
+            <a:pPr algn="l"/>
+            <a:r>
+              <a:rPr sz="1100" b="1" i="0">
+                <a:solidFill>
+                  <a:srgbClr val="54595D"/>
+                </a:solidFill>
+                <a:latin typeface="Calibri"/>
+              </a:rPr>
+              <a:t>DIGITAL SUPPORT  ·  Digital Support Content Area 2</a:t>
+            </a:r>
+          </a:p>
+        </p:txBody>
+      </p:sp>
+      <p:sp>
+        <p:nvSpPr>
+          <p:cNvPr id="3" name="TextBox 2"/>
+          <p:cNvSpPr txBox="1"/>
+          <p:nvPr/>
+        </p:nvSpPr>
+        <p:spPr>
+          <a:xfrm>
+            <a:off x="548640" y="566928"/>
+            <a:ext cx="11094415" cy="822960"/>
+          </a:xfrm>
+          <a:prstGeom prst="rect">
+            <a:avLst/>
+          </a:prstGeom>
+          <a:noFill/>
+        </p:spPr>
+        <p:txBody>
+          <a:bodyPr wrap="square" anchor="ctr" lIns="0" rIns="0" tIns="0" bIns="0"/>
+          <a:lstStyle/>
+          <a:p>
+            <a:pPr algn="l"/>
+            <a:r>
+              <a:rPr sz="3200" b="1" i="0">
+                <a:solidFill>
+                  <a:srgbClr val="03306E"/>
+                </a:solidFill>
+                <a:latin typeface="Cambria"/>
+              </a:rPr>
+              <a:t>Activity: Set up a mail client</a:t>
+            </a:r>
+          </a:p>
+        </p:txBody>
+      </p:sp>
+      <p:sp>
+        <p:nvSpPr>
+          <p:cNvPr id="4" name="TextBox 3"/>
+          <p:cNvSpPr txBox="1"/>
+          <p:nvPr/>
+        </p:nvSpPr>
+        <p:spPr>
+          <a:xfrm>
+            <a:off x="548640" y="6446520"/>
+            <a:ext cx="8229600" cy="274320"/>
+          </a:xfrm>
+          <a:prstGeom prst="rect">
+            <a:avLst/>
+          </a:prstGeom>
+          <a:noFill/>
+        </p:spPr>
+        <p:txBody>
+          <a:bodyPr wrap="square" anchor="t" lIns="0" rIns="0" tIns="0" bIns="0"/>
+          <a:lstStyle/>
+          <a:p>
+            <a:pPr algn="l"/>
+            <a:r>
+              <a:rPr sz="1000" b="0" i="0">
+                <a:solidFill>
+                  <a:srgbClr val="54595D"/>
+                </a:solidFill>
+                <a:latin typeface="Calibri"/>
+              </a:rPr>
+              <a:t>Digital Support and Security T Level  ·  Domains, Email and Remote Access</a:t>
+            </a:r>
+          </a:p>
+        </p:txBody>
+      </p:sp>
+      <p:sp>
+        <p:nvSpPr>
+          <p:cNvPr id="5" name="TextBox 4"/>
+          <p:cNvSpPr txBox="1"/>
+          <p:nvPr/>
+        </p:nvSpPr>
+        <p:spPr>
+          <a:xfrm>
+            <a:off x="10728655" y="6446520"/>
+            <a:ext cx="914400" cy="274320"/>
+          </a:xfrm>
+          <a:prstGeom prst="rect">
+            <a:avLst/>
+          </a:prstGeom>
+          <a:noFill/>
+        </p:spPr>
+        <p:txBody>
+          <a:bodyPr wrap="square" anchor="t" lIns="0" rIns="0" tIns="0" bIns="0"/>
+          <a:lstStyle/>
+          <a:p>
+            <a:pPr algn="r"/>
+            <a:r>
+              <a:rPr sz="1000" b="0" i="0">
+                <a:solidFill>
+                  <a:srgbClr val="54595D"/>
+                </a:solidFill>
+                <a:latin typeface="Calibri"/>
+              </a:rPr>
+              <a:t>15</a:t>
+            </a:r>
+          </a:p>
+        </p:txBody>
+      </p:sp>
+      <p:sp>
+        <p:nvSpPr>
+          <p:cNvPr id="6" name="Rounded Rectangle 5"/>
+          <p:cNvSpPr/>
+          <p:nvPr/>
+        </p:nvSpPr>
+        <p:spPr>
+          <a:xfrm>
+            <a:off x="548640" y="1508760"/>
+            <a:ext cx="2011680" cy="457200"/>
+          </a:xfrm>
+          <a:prstGeom prst="roundRect">
+            <a:avLst>
+              <a:gd name="adj" fmla="val 50000"/>
+            </a:avLst>
+          </a:prstGeom>
+          <a:solidFill>
+            <a:srgbClr val="4EA1FF"/>
+          </a:solidFill>
+          <a:ln>
+            <a:noFill/>
+          </a:ln>
+          <a:effectLst/>
+        </p:spPr>
+        <p:style>
+          <a:lnRef idx="1">
+            <a:schemeClr val="accent1"/>
+          </a:lnRef>
+          <a:fillRef idx="3">
+            <a:schemeClr val="accent1"/>
+          </a:fillRef>
+          <a:effectRef idx="2">
+            <a:schemeClr val="accent1"/>
+          </a:effectRef>
+          <a:fontRef idx="minor">
+            <a:schemeClr val="lt1"/>
+          </a:fontRef>
+        </p:style>
+        <p:txBody>
+          <a:bodyPr rtlCol="0" anchor="ctr"/>
+          <a:lstStyle/>
+          <a:p/>
+        </p:txBody>
+      </p:sp>
+      <p:sp>
+        <p:nvSpPr>
+          <p:cNvPr id="7" name="TextBox 6"/>
+          <p:cNvSpPr txBox="1"/>
+          <p:nvPr/>
+        </p:nvSpPr>
+        <p:spPr>
+          <a:xfrm>
+            <a:off x="548640" y="1508760"/>
+            <a:ext cx="2011680" cy="457200"/>
+          </a:xfrm>
+          <a:prstGeom prst="rect">
+            <a:avLst/>
+          </a:prstGeom>
+          <a:noFill/>
+        </p:spPr>
+        <p:txBody>
+          <a:bodyPr wrap="square" anchor="ctr" lIns="0" rIns="0" tIns="0" bIns="0"/>
+          <a:lstStyle/>
+          <a:p>
+            <a:pPr algn="ctr"/>
+            <a:r>
+              <a:rPr sz="1400" b="1" i="0">
+                <a:solidFill>
+                  <a:srgbClr val="202122"/>
+                </a:solidFill>
+                <a:latin typeface="Calibri"/>
+              </a:rPr>
+              <a:t>20 minutes</a:t>
+            </a:r>
+          </a:p>
+        </p:txBody>
+      </p:sp>
+      <p:sp>
+        <p:nvSpPr>
+          <p:cNvPr id="8" name="TextBox 7"/>
+          <p:cNvSpPr txBox="1"/>
+          <p:nvPr/>
+        </p:nvSpPr>
+        <p:spPr>
+          <a:xfrm>
+            <a:off x="2743200" y="1508760"/>
+            <a:ext cx="4754880" cy="457200"/>
+          </a:xfrm>
+          <a:prstGeom prst="rect">
+            <a:avLst/>
+          </a:prstGeom>
+          <a:noFill/>
+        </p:spPr>
+        <p:txBody>
+          <a:bodyPr wrap="square" anchor="ctr" lIns="0" rIns="0" tIns="0" bIns="0"/>
+          <a:lstStyle/>
+          <a:p>
+            <a:pPr algn="l"/>
+            <a:r>
+              <a:rPr sz="1400" b="0" i="1">
+                <a:solidFill>
+                  <a:srgbClr val="54595D"/>
+                </a:solidFill>
+                <a:latin typeface="Calibri"/>
+              </a:rPr>
+              <a:t>Pairs</a:t>
+            </a:r>
+          </a:p>
+        </p:txBody>
+      </p:sp>
+      <p:sp>
+        <p:nvSpPr>
+          <p:cNvPr id="9" name="Oval 8"/>
+          <p:cNvSpPr/>
+          <p:nvPr/>
+        </p:nvSpPr>
+        <p:spPr>
+          <a:xfrm>
+            <a:off x="548640" y="2482596"/>
+            <a:ext cx="384048" cy="384048"/>
+          </a:xfrm>
+          <a:prstGeom prst="ellipse">
+            <a:avLst/>
+          </a:prstGeom>
+          <a:solidFill>
+            <a:srgbClr val="0645AD"/>
+          </a:solidFill>
+          <a:ln>
+            <a:noFill/>
+          </a:ln>
+          <a:effectLst/>
+        </p:spPr>
+        <p:style>
+          <a:lnRef idx="1">
+            <a:schemeClr val="accent1"/>
+          </a:lnRef>
+          <a:fillRef idx="3">
+            <a:schemeClr val="accent1"/>
+          </a:fillRef>
+          <a:effectRef idx="2">
+            <a:schemeClr val="accent1"/>
+          </a:effectRef>
+          <a:fontRef idx="minor">
+            <a:schemeClr val="lt1"/>
+          </a:fontRef>
+        </p:style>
+        <p:txBody>
+          <a:bodyPr rtlCol="0" anchor="ctr" lIns="0" rIns="0" tIns="0" bIns="0"/>
+          <a:lstStyle/>
+          <a:p>
+            <a:pPr algn="ctr"/>
+            <a:r>
+              <a:rPr sz="1300" b="1">
+                <a:solidFill>
+                  <a:srgbClr val="FFFFFF"/>
+                </a:solidFill>
+                <a:latin typeface="Calibri"/>
+              </a:rPr>
+              <a:t>1</a:t>
+            </a:r>
+          </a:p>
+        </p:txBody>
+      </p:sp>
+      <p:sp>
+        <p:nvSpPr>
+          <p:cNvPr id="10" name="TextBox 9"/>
+          <p:cNvSpPr txBox="1"/>
+          <p:nvPr/>
+        </p:nvSpPr>
+        <p:spPr>
+          <a:xfrm>
+            <a:off x="1143000" y="2240280"/>
+            <a:ext cx="5943600" cy="868680"/>
+          </a:xfrm>
+          <a:prstGeom prst="rect">
+            <a:avLst/>
+          </a:prstGeom>
+          <a:noFill/>
+        </p:spPr>
+        <p:txBody>
+          <a:bodyPr wrap="square" anchor="ctr" lIns="0" rIns="0" tIns="0" bIns="0"/>
+          <a:lstStyle/>
+          <a:p>
+            <a:pPr algn="l"/>
+            <a:r>
+              <a:rPr sz="1700" b="0" i="0">
+                <a:solidFill>
+                  <a:srgbClr val="202122"/>
+                </a:solidFill>
+                <a:latin typeface="Calibri"/>
+              </a:rPr>
+              <a:t>Set up a test account in a desktop mail client using IMAP and SMTP with TLS.</a:t>
+            </a:r>
+          </a:p>
+        </p:txBody>
+      </p:sp>
+      <p:sp>
+        <p:nvSpPr>
+          <p:cNvPr id="11" name="Oval 10"/>
+          <p:cNvSpPr/>
+          <p:nvPr/>
+        </p:nvSpPr>
+        <p:spPr>
+          <a:xfrm>
+            <a:off x="548640" y="3461004"/>
+            <a:ext cx="384048" cy="384048"/>
+          </a:xfrm>
+          <a:prstGeom prst="ellipse">
+            <a:avLst/>
+          </a:prstGeom>
+          <a:solidFill>
+            <a:srgbClr val="0645AD"/>
+          </a:solidFill>
+          <a:ln>
+            <a:noFill/>
+          </a:ln>
+          <a:effectLst/>
+        </p:spPr>
+        <p:style>
+          <a:lnRef idx="1">
+            <a:schemeClr val="accent1"/>
+          </a:lnRef>
+          <a:fillRef idx="3">
+            <a:schemeClr val="accent1"/>
+          </a:fillRef>
+          <a:effectRef idx="2">
+            <a:schemeClr val="accent1"/>
+          </a:effectRef>
+          <a:fontRef idx="minor">
+            <a:schemeClr val="lt1"/>
+          </a:fontRef>
+        </p:style>
+        <p:txBody>
+          <a:bodyPr rtlCol="0" anchor="ctr" lIns="0" rIns="0" tIns="0" bIns="0"/>
+          <a:lstStyle/>
+          <a:p>
+            <a:pPr algn="ctr"/>
+            <a:r>
+              <a:rPr sz="1300" b="1">
+                <a:solidFill>
+                  <a:srgbClr val="FFFFFF"/>
+                </a:solidFill>
+                <a:latin typeface="Calibri"/>
+              </a:rPr>
+              <a:t>2</a:t>
+            </a:r>
+          </a:p>
+        </p:txBody>
+      </p:sp>
+      <p:sp>
+        <p:nvSpPr>
+          <p:cNvPr id="12" name="TextBox 11"/>
+          <p:cNvSpPr txBox="1"/>
+          <p:nvPr/>
+        </p:nvSpPr>
+        <p:spPr>
+          <a:xfrm>
+            <a:off x="1143000" y="3218688"/>
+            <a:ext cx="5943600" cy="868680"/>
+          </a:xfrm>
+          <a:prstGeom prst="rect">
+            <a:avLst/>
+          </a:prstGeom>
+          <a:noFill/>
+        </p:spPr>
+        <p:txBody>
+          <a:bodyPr wrap="square" anchor="ctr" lIns="0" rIns="0" tIns="0" bIns="0"/>
+          <a:lstStyle/>
+          <a:p>
+            <a:pPr algn="l"/>
+            <a:r>
+              <a:rPr sz="1700" b="0" i="0">
+                <a:solidFill>
+                  <a:srgbClr val="202122"/>
+                </a:solidFill>
+                <a:latin typeface="Calibri"/>
+              </a:rPr>
+              <a:t>Record the server names and ports used.</a:t>
+            </a:r>
+          </a:p>
+        </p:txBody>
+      </p:sp>
+      <p:sp>
+        <p:nvSpPr>
+          <p:cNvPr id="13" name="Oval 12"/>
+          <p:cNvSpPr/>
+          <p:nvPr/>
+        </p:nvSpPr>
+        <p:spPr>
+          <a:xfrm>
+            <a:off x="548640" y="4439412"/>
+            <a:ext cx="384048" cy="384048"/>
+          </a:xfrm>
+          <a:prstGeom prst="ellipse">
+            <a:avLst/>
+          </a:prstGeom>
+          <a:solidFill>
+            <a:srgbClr val="0645AD"/>
+          </a:solidFill>
+          <a:ln>
+            <a:noFill/>
+          </a:ln>
+          <a:effectLst/>
+        </p:spPr>
+        <p:style>
+          <a:lnRef idx="1">
+            <a:schemeClr val="accent1"/>
+          </a:lnRef>
+          <a:fillRef idx="3">
+            <a:schemeClr val="accent1"/>
+          </a:fillRef>
+          <a:effectRef idx="2">
+            <a:schemeClr val="accent1"/>
+          </a:effectRef>
+          <a:fontRef idx="minor">
+            <a:schemeClr val="lt1"/>
+          </a:fontRef>
+        </p:style>
+        <p:txBody>
+          <a:bodyPr rtlCol="0" anchor="ctr" lIns="0" rIns="0" tIns="0" bIns="0"/>
+          <a:lstStyle/>
+          <a:p>
+            <a:pPr algn="ctr"/>
+            <a:r>
+              <a:rPr sz="1300" b="1">
+                <a:solidFill>
+                  <a:srgbClr val="FFFFFF"/>
+                </a:solidFill>
+                <a:latin typeface="Calibri"/>
+              </a:rPr>
+              <a:t>3</a:t>
+            </a:r>
+          </a:p>
+        </p:txBody>
+      </p:sp>
+      <p:sp>
+        <p:nvSpPr>
+          <p:cNvPr id="14" name="TextBox 13"/>
+          <p:cNvSpPr txBox="1"/>
+          <p:nvPr/>
+        </p:nvSpPr>
+        <p:spPr>
+          <a:xfrm>
+            <a:off x="1143000" y="4197096"/>
+            <a:ext cx="5943600" cy="868680"/>
+          </a:xfrm>
+          <a:prstGeom prst="rect">
+            <a:avLst/>
+          </a:prstGeom>
+          <a:noFill/>
+        </p:spPr>
+        <p:txBody>
+          <a:bodyPr wrap="square" anchor="ctr" lIns="0" rIns="0" tIns="0" bIns="0"/>
+          <a:lstStyle/>
+          <a:p>
+            <a:pPr algn="l"/>
+            <a:r>
+              <a:rPr sz="1700" b="0" i="0">
+                <a:solidFill>
+                  <a:srgbClr val="202122"/>
+                </a:solidFill>
+                <a:latin typeface="Calibri"/>
+              </a:rPr>
+              <a:t>Explain why you chose IMAP over POP3 for a user with three devices.</a:t>
+            </a:r>
+          </a:p>
+        </p:txBody>
+      </p:sp>
+      <p:sp>
+        <p:nvSpPr>
+          <p:cNvPr id="15" name="Oval 14"/>
+          <p:cNvSpPr/>
+          <p:nvPr/>
+        </p:nvSpPr>
+        <p:spPr>
+          <a:xfrm>
+            <a:off x="548640" y="5417820"/>
+            <a:ext cx="384048" cy="384048"/>
+          </a:xfrm>
+          <a:prstGeom prst="ellipse">
+            <a:avLst/>
+          </a:prstGeom>
+          <a:solidFill>
+            <a:srgbClr val="0645AD"/>
+          </a:solidFill>
+          <a:ln>
+            <a:noFill/>
+          </a:ln>
+          <a:effectLst/>
+        </p:spPr>
+        <p:style>
+          <a:lnRef idx="1">
+            <a:schemeClr val="accent1"/>
+          </a:lnRef>
+          <a:fillRef idx="3">
+            <a:schemeClr val="accent1"/>
+          </a:fillRef>
+          <a:effectRef idx="2">
+            <a:schemeClr val="accent1"/>
+          </a:effectRef>
+          <a:fontRef idx="minor">
+            <a:schemeClr val="lt1"/>
+          </a:fontRef>
+        </p:style>
+        <p:txBody>
+          <a:bodyPr rtlCol="0" anchor="ctr" lIns="0" rIns="0" tIns="0" bIns="0"/>
+          <a:lstStyle/>
+          <a:p>
+            <a:pPr algn="ctr"/>
+            <a:r>
+              <a:rPr sz="1300" b="1">
+                <a:solidFill>
+                  <a:srgbClr val="FFFFFF"/>
+                </a:solidFill>
+                <a:latin typeface="Calibri"/>
+              </a:rPr>
+              <a:t>4</a:t>
+            </a:r>
+          </a:p>
+        </p:txBody>
+      </p:sp>
+      <p:sp>
+        <p:nvSpPr>
+          <p:cNvPr id="16" name="TextBox 15"/>
+          <p:cNvSpPr txBox="1"/>
+          <p:nvPr/>
+        </p:nvSpPr>
+        <p:spPr>
+          <a:xfrm>
+            <a:off x="1143000" y="5175504"/>
+            <a:ext cx="5943600" cy="868680"/>
+          </a:xfrm>
+          <a:prstGeom prst="rect">
+            <a:avLst/>
+          </a:prstGeom>
+          <a:noFill/>
+        </p:spPr>
+        <p:txBody>
+          <a:bodyPr wrap="square" anchor="ctr" lIns="0" rIns="0" tIns="0" bIns="0"/>
+          <a:lstStyle/>
+          <a:p>
+            <a:pPr algn="l"/>
+            <a:r>
+              <a:rPr sz="1700" b="0" i="0">
+                <a:solidFill>
+                  <a:srgbClr val="202122"/>
+                </a:solidFill>
+                <a:latin typeface="Calibri"/>
+              </a:rPr>
+              <a:t>Add a corporate signature that follows a given policy.</a:t>
+            </a:r>
+          </a:p>
+        </p:txBody>
+      </p:sp>
+      <p:sp>
+        <p:nvSpPr>
+          <p:cNvPr id="17" name="Rounded Rectangle 16"/>
+          <p:cNvSpPr/>
+          <p:nvPr/>
+        </p:nvSpPr>
+        <p:spPr>
+          <a:xfrm>
+            <a:off x="7772400" y="1508760"/>
+            <a:ext cx="3867912" cy="4572000"/>
+          </a:xfrm>
+          <a:prstGeom prst="roundRect">
+            <a:avLst>
+              <a:gd name="adj" fmla="val 8000"/>
+            </a:avLst>
+          </a:prstGeom>
+          <a:solidFill>
+            <a:srgbClr val="EAF3FF"/>
+          </a:solidFill>
+          <a:ln>
+            <a:noFill/>
+          </a:ln>
+          <a:effectLst/>
+        </p:spPr>
+        <p:style>
+          <a:lnRef idx="1">
+            <a:schemeClr val="accent1"/>
+          </a:lnRef>
+          <a:fillRef idx="3">
+            <a:schemeClr val="accent1"/>
+          </a:fillRef>
+          <a:effectRef idx="2">
+            <a:schemeClr val="accent1"/>
+          </a:effectRef>
+          <a:fontRef idx="minor">
+            <a:schemeClr val="lt1"/>
+          </a:fontRef>
+        </p:style>
+        <p:txBody>
+          <a:bodyPr rtlCol="0" anchor="ctr"/>
+          <a:lstStyle/>
+          <a:p/>
+        </p:txBody>
+      </p:sp>
+      <p:sp>
+        <p:nvSpPr>
+          <p:cNvPr id="18" name="TextBox 17"/>
+          <p:cNvSpPr txBox="1"/>
+          <p:nvPr/>
+        </p:nvSpPr>
+        <p:spPr>
+          <a:xfrm>
+            <a:off x="8046720" y="1737360"/>
+            <a:ext cx="3291840" cy="365760"/>
+          </a:xfrm>
+          <a:prstGeom prst="rect">
+            <a:avLst/>
+          </a:prstGeom>
+          <a:noFill/>
+        </p:spPr>
+        <p:txBody>
+          <a:bodyPr wrap="square" anchor="t" lIns="0" rIns="0" tIns="0" bIns="0"/>
+          <a:lstStyle/>
+          <a:p>
+            <a:pPr algn="l"/>
+            <a:r>
+              <a:rPr sz="1300" b="1" i="0">
+                <a:solidFill>
+                  <a:srgbClr val="0645AD"/>
+                </a:solidFill>
+                <a:latin typeface="Calibri"/>
+              </a:rPr>
+              <a:t>SUCCESS CRITERIA</a:t>
+            </a:r>
+          </a:p>
+        </p:txBody>
+      </p:sp>
+      <p:sp>
+        <p:nvSpPr>
+          <p:cNvPr id="19" name="TextBox 18"/>
+          <p:cNvSpPr txBox="1"/>
+          <p:nvPr/>
+        </p:nvSpPr>
+        <p:spPr>
+          <a:xfrm>
+            <a:off x="8046720" y="2240280"/>
+            <a:ext cx="3337560" cy="3657600"/>
+          </a:xfrm>
+          <a:prstGeom prst="rect">
+            <a:avLst/>
+          </a:prstGeom>
+          <a:noFill/>
+        </p:spPr>
+        <p:txBody>
+          <a:bodyPr wrap="square" lIns="0" rIns="0" tIns="0" bIns="0">
+            <a:spAutoFit/>
+          </a:bodyPr>
+          <a:lstStyle/>
+          <a:p>
+            <a:pPr marL="274320" indent="-274320">
+              <a:spcAft>
+                <a:spcPts val="810"/>
+              </a:spcAft>
+              <a:buClr>
+                <a:srgbClr val="0645AD"/>
+              </a:buClr>
+              <a:buFont typeface="Arial"/>
+              <a:buChar char="•"/>
+            </a:pPr>
+            <a:r>
+              <a:rPr sz="1800" b="0">
+                <a:solidFill>
+                  <a:srgbClr val="202122"/>
+                </a:solidFill>
+                <a:latin typeface="Calibri"/>
+              </a:rPr>
+              <a:t>Mail sends and receives</a:t>
+            </a:r>
+          </a:p>
+          <a:p>
+            <a:pPr marL="274320" indent="-274320">
+              <a:spcAft>
+                <a:spcPts val="810"/>
+              </a:spcAft>
+              <a:buClr>
+                <a:srgbClr val="0645AD"/>
+              </a:buClr>
+              <a:buFont typeface="Arial"/>
+              <a:buChar char="•"/>
+            </a:pPr>
+            <a:r>
+              <a:rPr sz="1800" b="0">
+                <a:solidFill>
+                  <a:srgbClr val="202122"/>
+                </a:solidFill>
+                <a:latin typeface="Calibri"/>
+              </a:rPr>
+              <a:t>Encrypted ports used</a:t>
+            </a:r>
+          </a:p>
+          <a:p>
+            <a:pPr marL="274320" indent="-274320">
+              <a:spcAft>
+                <a:spcPts val="810"/>
+              </a:spcAft>
+              <a:buClr>
+                <a:srgbClr val="0645AD"/>
+              </a:buClr>
+              <a:buFont typeface="Arial"/>
+              <a:buChar char="•"/>
+            </a:pPr>
+            <a:r>
+              <a:rPr sz="1800" b="0">
+                <a:solidFill>
+                  <a:srgbClr val="202122"/>
+                </a:solidFill>
+                <a:latin typeface="Calibri"/>
+              </a:rPr>
+              <a:t>Choice of protocol justified</a:t>
+            </a:r>
+          </a:p>
+        </p:txBody>
+      </p:sp>
+    </p:spTree>
+  </p:cSld>
+  <p:clrMapOvr>
+    <a:masterClrMapping/>
+  </p:clrMapOvr>
+</p:sld>
+</file>
+
+<file path=ppt/slides/slide16.xml><?xml version="1.0" encoding="utf-8"?>
+<p:sld xmlns:a="http://schemas.openxmlformats.org/drawingml/2006/main" xmlns:p="http://schemas.openxmlformats.org/presentationml/2006/main" xmlns:r="http://schemas.openxmlformats.org/officeDocument/2006/relationships">
+  <p:cSld>
+    <p:bg>
+      <p:bgPr>
+        <a:solidFill>
           <a:srgbClr val="03306E"/>
         </a:solidFill>
         <a:effectLst/>
@@ -5293,6 +9659,398 @@
                 <a:latin typeface="Calibri"/>
               </a:rPr>
               <a:t>3</a:t>
+            </a:r>
+          </a:p>
+        </p:txBody>
+      </p:sp>
+      <p:sp>
+        <p:nvSpPr>
+          <p:cNvPr id="6" name="TextBox 5"/>
+          <p:cNvSpPr txBox="1"/>
+          <p:nvPr/>
+        </p:nvSpPr>
+        <p:spPr>
+          <a:xfrm>
+            <a:off x="548640" y="1554480"/>
+            <a:ext cx="6720840" cy="4617720"/>
+          </a:xfrm>
+          <a:prstGeom prst="rect">
+            <a:avLst/>
+          </a:prstGeom>
+          <a:noFill/>
+        </p:spPr>
+        <p:txBody>
+          <a:bodyPr wrap="square" lIns="0" rIns="0" tIns="0" bIns="0">
+            <a:spAutoFit/>
+          </a:bodyPr>
+          <a:lstStyle/>
+          <a:p>
+            <a:pPr>
+              <a:spcAft>
+                <a:spcPts val="1260"/>
+              </a:spcAft>
+            </a:pPr>
+            <a:r>
+              <a:rPr sz="2100" b="0">
+                <a:solidFill>
+                  <a:srgbClr val="202122"/>
+                </a:solidFill>
+                <a:latin typeface="Calibri"/>
+              </a:rPr>
+              <a:t>A domain lets an organisation manage all its users and computers centrally.</a:t>
+            </a:r>
+          </a:p>
+          <a:p>
+            <a:pPr>
+              <a:spcAft>
+                <a:spcPts val="1260"/>
+              </a:spcAft>
+            </a:pPr>
+            <a:r>
+              <a:rPr sz="2100" b="0">
+                <a:solidFill>
+                  <a:srgbClr val="202122"/>
+                </a:solidFill>
+                <a:latin typeface="Calibri"/>
+              </a:rPr>
+              <a:t>Active Directory Domain Services (AD DS) stores accounts and groups in organisational units (OUs); Group Policy pushes settings to them. DHCP assigns IP addresses; DNS resolves names to addresses. File servers and DFS share storage with permissions; print servers share printers; mail servers handle email. A certificate authority issues digital certificates that prove identity.</a:t>
+            </a:r>
+          </a:p>
+          <a:p>
+            <a:pPr>
+              <a:spcAft>
+                <a:spcPts val="1260"/>
+              </a:spcAft>
+            </a:pPr>
+            <a:r>
+              <a:rPr sz="2100" b="0">
+                <a:solidFill>
+                  <a:srgbClr val="202122"/>
+                </a:solidFill>
+                <a:latin typeface="Calibri"/>
+              </a:rPr>
+              <a:t>Together they mean a user can log in on any domain PC and get the same files, printers and settings.</a:t>
+            </a:r>
+          </a:p>
+        </p:txBody>
+      </p:sp>
+      <p:sp>
+        <p:nvSpPr>
+          <p:cNvPr id="7" name="Rounded Rectangle 6"/>
+          <p:cNvSpPr/>
+          <p:nvPr/>
+        </p:nvSpPr>
+        <p:spPr>
+          <a:xfrm>
+            <a:off x="7772400" y="1554480"/>
+            <a:ext cx="3867912" cy="4526280"/>
+          </a:xfrm>
+          <a:prstGeom prst="roundRect">
+            <a:avLst>
+              <a:gd name="adj" fmla="val 8000"/>
+            </a:avLst>
+          </a:prstGeom>
+          <a:solidFill>
+            <a:srgbClr val="03306E"/>
+          </a:solidFill>
+          <a:ln>
+            <a:noFill/>
+          </a:ln>
+          <a:effectLst/>
+        </p:spPr>
+        <p:style>
+          <a:lnRef idx="1">
+            <a:schemeClr val="accent1"/>
+          </a:lnRef>
+          <a:fillRef idx="3">
+            <a:schemeClr val="accent1"/>
+          </a:fillRef>
+          <a:effectRef idx="2">
+            <a:schemeClr val="accent1"/>
+          </a:effectRef>
+          <a:fontRef idx="minor">
+            <a:schemeClr val="lt1"/>
+          </a:fontRef>
+        </p:style>
+        <p:txBody>
+          <a:bodyPr rtlCol="0" anchor="ctr"/>
+          <a:lstStyle/>
+          <a:p/>
+        </p:txBody>
+      </p:sp>
+      <p:sp>
+        <p:nvSpPr>
+          <p:cNvPr id="8" name="Oval 7"/>
+          <p:cNvSpPr/>
+          <p:nvPr/>
+        </p:nvSpPr>
+        <p:spPr>
+          <a:xfrm>
+            <a:off x="8046720" y="1828800"/>
+            <a:ext cx="548640" cy="548640"/>
+          </a:xfrm>
+          <a:prstGeom prst="ellipse">
+            <a:avLst/>
+          </a:prstGeom>
+          <a:solidFill>
+            <a:srgbClr val="4EA1FF"/>
+          </a:solidFill>
+          <a:ln>
+            <a:noFill/>
+          </a:ln>
+          <a:effectLst/>
+        </p:spPr>
+        <p:style>
+          <a:lnRef idx="1">
+            <a:schemeClr val="accent1"/>
+          </a:lnRef>
+          <a:fillRef idx="3">
+            <a:schemeClr val="accent1"/>
+          </a:fillRef>
+          <a:effectRef idx="2">
+            <a:schemeClr val="accent1"/>
+          </a:effectRef>
+          <a:fontRef idx="minor">
+            <a:schemeClr val="lt1"/>
+          </a:fontRef>
+        </p:style>
+        <p:txBody>
+          <a:bodyPr rtlCol="0" anchor="ctr" lIns="0" rIns="0" tIns="0" bIns="0"/>
+          <a:lstStyle/>
+          <a:p>
+            <a:pPr algn="ctr"/>
+            <a:r>
+              <a:rPr sz="1300" b="1">
+                <a:solidFill>
+                  <a:srgbClr val="202122"/>
+                </a:solidFill>
+                <a:latin typeface="Calibri"/>
+              </a:rPr>
+              <a:t>e.g.</a:t>
+            </a:r>
+          </a:p>
+        </p:txBody>
+      </p:sp>
+      <p:sp>
+        <p:nvSpPr>
+          <p:cNvPr id="9" name="TextBox 8"/>
+          <p:cNvSpPr txBox="1"/>
+          <p:nvPr/>
+        </p:nvSpPr>
+        <p:spPr>
+          <a:xfrm>
+            <a:off x="8046720" y="2560320"/>
+            <a:ext cx="3291840" cy="365760"/>
+          </a:xfrm>
+          <a:prstGeom prst="rect">
+            <a:avLst/>
+          </a:prstGeom>
+          <a:noFill/>
+        </p:spPr>
+        <p:txBody>
+          <a:bodyPr wrap="square" anchor="t" lIns="0" rIns="0" tIns="0" bIns="0"/>
+          <a:lstStyle/>
+          <a:p>
+            <a:pPr algn="l"/>
+            <a:r>
+              <a:rPr sz="1300" b="1" i="0">
+                <a:solidFill>
+                  <a:srgbClr val="A9C8F0"/>
+                </a:solidFill>
+                <a:latin typeface="Calibri"/>
+              </a:rPr>
+              <a:t>EXAMPLE</a:t>
+            </a:r>
+          </a:p>
+        </p:txBody>
+      </p:sp>
+      <p:sp>
+        <p:nvSpPr>
+          <p:cNvPr id="10" name="TextBox 9"/>
+          <p:cNvSpPr txBox="1"/>
+          <p:nvPr/>
+        </p:nvSpPr>
+        <p:spPr>
+          <a:xfrm>
+            <a:off x="8046720" y="2971800"/>
+            <a:ext cx="3291840" cy="2971800"/>
+          </a:xfrm>
+          <a:prstGeom prst="rect">
+            <a:avLst/>
+          </a:prstGeom>
+          <a:noFill/>
+        </p:spPr>
+        <p:txBody>
+          <a:bodyPr wrap="square" anchor="t" lIns="0" rIns="0" tIns="0" bIns="0"/>
+          <a:lstStyle/>
+          <a:p>
+            <a:pPr algn="l"/>
+            <a:r>
+              <a:rPr sz="1900" b="0" i="0">
+                <a:solidFill>
+                  <a:srgbClr val="FFFFFF"/>
+                </a:solidFill>
+                <a:latin typeface="Cambria"/>
+              </a:rPr>
+              <a:t>A teacher logs in on a classroom PC: AD DS checks their password, Group Policy maps their drive and printer, and DNS finds the servers.</a:t>
+            </a:r>
+          </a:p>
+        </p:txBody>
+      </p:sp>
+    </p:spTree>
+  </p:cSld>
+  <p:clrMapOvr>
+    <a:masterClrMapping/>
+  </p:clrMapOvr>
+</p:sld>
+</file>
+
+<file path=ppt/slides/slide4.xml><?xml version="1.0" encoding="utf-8"?>
+<p:sld xmlns:a="http://schemas.openxmlformats.org/drawingml/2006/main" xmlns:p="http://schemas.openxmlformats.org/presentationml/2006/main" xmlns:r="http://schemas.openxmlformats.org/officeDocument/2006/relationships">
+  <p:cSld>
+    <p:bg>
+      <p:bgPr>
+        <a:solidFill>
+          <a:srgbClr val="FFFFFF"/>
+        </a:solidFill>
+        <a:effectLst/>
+      </p:bgPr>
+    </p:bg>
+    <p:spTree>
+      <p:nvGrpSpPr>
+        <p:cNvPr id="1" name=""/>
+        <p:cNvGrpSpPr/>
+        <p:nvPr/>
+      </p:nvGrpSpPr>
+      <p:grpSpPr/>
+      <p:sp>
+        <p:nvSpPr>
+          <p:cNvPr id="2" name="TextBox 1"/>
+          <p:cNvSpPr txBox="1"/>
+          <p:nvPr/>
+        </p:nvSpPr>
+        <p:spPr>
+          <a:xfrm>
+            <a:off x="548640" y="320040"/>
+            <a:ext cx="11094415" cy="274320"/>
+          </a:xfrm>
+          <a:prstGeom prst="rect">
+            <a:avLst/>
+          </a:prstGeom>
+          <a:noFill/>
+        </p:spPr>
+        <p:txBody>
+          <a:bodyPr wrap="square" anchor="t" lIns="0" rIns="0" tIns="0" bIns="0"/>
+          <a:lstStyle/>
+          <a:p>
+            <a:pPr algn="l"/>
+            <a:r>
+              <a:rPr sz="1100" b="1" i="0">
+                <a:solidFill>
+                  <a:srgbClr val="54595D"/>
+                </a:solidFill>
+                <a:latin typeface="Calibri"/>
+              </a:rPr>
+              <a:t>DIGITAL SUPPORT  ·  Digital Support Content Area 2</a:t>
+            </a:r>
+          </a:p>
+        </p:txBody>
+      </p:sp>
+      <p:sp>
+        <p:nvSpPr>
+          <p:cNvPr id="3" name="TextBox 2"/>
+          <p:cNvSpPr txBox="1"/>
+          <p:nvPr/>
+        </p:nvSpPr>
+        <p:spPr>
+          <a:xfrm>
+            <a:off x="548640" y="566928"/>
+            <a:ext cx="11094415" cy="822960"/>
+          </a:xfrm>
+          <a:prstGeom prst="rect">
+            <a:avLst/>
+          </a:prstGeom>
+          <a:noFill/>
+        </p:spPr>
+        <p:txBody>
+          <a:bodyPr wrap="square" anchor="ctr" lIns="0" rIns="0" tIns="0" bIns="0"/>
+          <a:lstStyle/>
+          <a:p>
+            <a:pPr algn="l"/>
+            <a:r>
+              <a:rPr sz="3200" b="1" i="0">
+                <a:solidFill>
+                  <a:srgbClr val="03306E"/>
+                </a:solidFill>
+                <a:latin typeface="Cambria"/>
+              </a:rPr>
+              <a:t>Service functions in a domain</a:t>
+            </a:r>
+          </a:p>
+        </p:txBody>
+      </p:sp>
+      <p:sp>
+        <p:nvSpPr>
+          <p:cNvPr id="4" name="TextBox 3"/>
+          <p:cNvSpPr txBox="1"/>
+          <p:nvPr/>
+        </p:nvSpPr>
+        <p:spPr>
+          <a:xfrm>
+            <a:off x="548640" y="6446520"/>
+            <a:ext cx="8229600" cy="274320"/>
+          </a:xfrm>
+          <a:prstGeom prst="rect">
+            <a:avLst/>
+          </a:prstGeom>
+          <a:noFill/>
+        </p:spPr>
+        <p:txBody>
+          <a:bodyPr wrap="square" anchor="t" lIns="0" rIns="0" tIns="0" bIns="0"/>
+          <a:lstStyle/>
+          <a:p>
+            <a:pPr algn="l"/>
+            <a:r>
+              <a:rPr sz="1000" b="0" i="0">
+                <a:solidFill>
+                  <a:srgbClr val="54595D"/>
+                </a:solidFill>
+                <a:latin typeface="Calibri"/>
+              </a:rPr>
+              <a:t>Digital Support and Security T Level  ·  Domains, Email and Remote Access</a:t>
+            </a:r>
+          </a:p>
+        </p:txBody>
+      </p:sp>
+      <p:sp>
+        <p:nvSpPr>
+          <p:cNvPr id="5" name="TextBox 4"/>
+          <p:cNvSpPr txBox="1"/>
+          <p:nvPr/>
+        </p:nvSpPr>
+        <p:spPr>
+          <a:xfrm>
+            <a:off x="10728655" y="6446520"/>
+            <a:ext cx="914400" cy="274320"/>
+          </a:xfrm>
+          <a:prstGeom prst="rect">
+            <a:avLst/>
+          </a:prstGeom>
+          <a:noFill/>
+        </p:spPr>
+        <p:txBody>
+          <a:bodyPr wrap="square" anchor="t" lIns="0" rIns="0" tIns="0" bIns="0"/>
+          <a:lstStyle/>
+          <a:p>
+            <a:pPr algn="r"/>
+            <a:r>
+              <a:rPr sz="1000" b="0" i="0">
+                <a:solidFill>
+                  <a:srgbClr val="54595D"/>
+                </a:solidFill>
+                <a:latin typeface="Calibri"/>
+              </a:rPr>
+              <a:t>4</a:t>
             </a:r>
           </a:p>
         </p:txBody>
@@ -5699,7 +10457,7 @@
 </p:sld>
 </file>
 
-<file path=ppt/slides/slide4.xml><?xml version="1.0" encoding="utf-8"?>
+<file path=ppt/slides/slide5.xml><?xml version="1.0" encoding="utf-8"?>
 <p:sld xmlns:a="http://schemas.openxmlformats.org/drawingml/2006/main" xmlns:p="http://schemas.openxmlformats.org/presentationml/2006/main" xmlns:r="http://schemas.openxmlformats.org/officeDocument/2006/relationships">
   <p:cSld>
     <p:bg>
@@ -5778,7 +10536,7 @@
                 </a:solidFill>
                 <a:latin typeface="Cambria"/>
               </a:rPr>
-              <a:t>Email protocols</a:t>
+              <a:t>Quick check: Service functions in a domain</a:t>
             </a:r>
           </a:p>
         </p:txBody>
@@ -5844,7 +10602,880 @@
                 </a:solidFill>
                 <a:latin typeface="Calibri"/>
               </a:rPr>
-              <a:t>4</a:t>
+              <a:t>5</a:t>
+            </a:r>
+          </a:p>
+        </p:txBody>
+      </p:sp>
+      <p:sp>
+        <p:nvSpPr>
+          <p:cNvPr id="6" name="Oval 5"/>
+          <p:cNvSpPr/>
+          <p:nvPr/>
+        </p:nvSpPr>
+        <p:spPr>
+          <a:xfrm>
+            <a:off x="548640" y="1691640"/>
+            <a:ext cx="502920" cy="502920"/>
+          </a:xfrm>
+          <a:prstGeom prst="ellipse">
+            <a:avLst/>
+          </a:prstGeom>
+          <a:solidFill>
+            <a:srgbClr val="4EA1FF"/>
+          </a:solidFill>
+          <a:ln>
+            <a:noFill/>
+          </a:ln>
+          <a:effectLst/>
+        </p:spPr>
+        <p:style>
+          <a:lnRef idx="1">
+            <a:schemeClr val="accent1"/>
+          </a:lnRef>
+          <a:fillRef idx="3">
+            <a:schemeClr val="accent1"/>
+          </a:fillRef>
+          <a:effectRef idx="2">
+            <a:schemeClr val="accent1"/>
+          </a:effectRef>
+          <a:fontRef idx="minor">
+            <a:schemeClr val="lt1"/>
+          </a:fontRef>
+        </p:style>
+        <p:txBody>
+          <a:bodyPr rtlCol="0" anchor="ctr" lIns="0" rIns="0" tIns="0" bIns="0"/>
+          <a:lstStyle/>
+          <a:p>
+            <a:pPr algn="ctr"/>
+            <a:r>
+              <a:rPr sz="1600" b="1">
+                <a:solidFill>
+                  <a:srgbClr val="202122"/>
+                </a:solidFill>
+                <a:latin typeface="Calibri"/>
+              </a:rPr>
+              <a:t>1</a:t>
+            </a:r>
+          </a:p>
+        </p:txBody>
+      </p:sp>
+      <p:sp>
+        <p:nvSpPr>
+          <p:cNvPr id="7" name="TextBox 6"/>
+          <p:cNvSpPr txBox="1"/>
+          <p:nvPr/>
+        </p:nvSpPr>
+        <p:spPr>
+          <a:xfrm>
+            <a:off x="1371600" y="1645920"/>
+            <a:ext cx="10271455" cy="1188720"/>
+          </a:xfrm>
+          <a:prstGeom prst="rect">
+            <a:avLst/>
+          </a:prstGeom>
+          <a:noFill/>
+        </p:spPr>
+        <p:txBody>
+          <a:bodyPr wrap="square" anchor="t" lIns="0" rIns="0" tIns="0" bIns="0"/>
+          <a:lstStyle/>
+          <a:p>
+            <a:pPr algn="l"/>
+            <a:r>
+              <a:rPr sz="2400" b="0" i="0">
+                <a:solidFill>
+                  <a:srgbClr val="202122"/>
+                </a:solidFill>
+                <a:latin typeface="Calibri"/>
+              </a:rPr>
+              <a:t>What does Group Policy do?</a:t>
+            </a:r>
+          </a:p>
+        </p:txBody>
+      </p:sp>
+      <p:sp>
+        <p:nvSpPr>
+          <p:cNvPr id="8" name="Oval 7"/>
+          <p:cNvSpPr/>
+          <p:nvPr/>
+        </p:nvSpPr>
+        <p:spPr>
+          <a:xfrm>
+            <a:off x="548640" y="3108960"/>
+            <a:ext cx="502920" cy="502920"/>
+          </a:xfrm>
+          <a:prstGeom prst="ellipse">
+            <a:avLst/>
+          </a:prstGeom>
+          <a:solidFill>
+            <a:srgbClr val="4EA1FF"/>
+          </a:solidFill>
+          <a:ln>
+            <a:noFill/>
+          </a:ln>
+          <a:effectLst/>
+        </p:spPr>
+        <p:style>
+          <a:lnRef idx="1">
+            <a:schemeClr val="accent1"/>
+          </a:lnRef>
+          <a:fillRef idx="3">
+            <a:schemeClr val="accent1"/>
+          </a:fillRef>
+          <a:effectRef idx="2">
+            <a:schemeClr val="accent1"/>
+          </a:effectRef>
+          <a:fontRef idx="minor">
+            <a:schemeClr val="lt1"/>
+          </a:fontRef>
+        </p:style>
+        <p:txBody>
+          <a:bodyPr rtlCol="0" anchor="ctr" lIns="0" rIns="0" tIns="0" bIns="0"/>
+          <a:lstStyle/>
+          <a:p>
+            <a:pPr algn="ctr"/>
+            <a:r>
+              <a:rPr sz="1600" b="1">
+                <a:solidFill>
+                  <a:srgbClr val="202122"/>
+                </a:solidFill>
+                <a:latin typeface="Calibri"/>
+              </a:rPr>
+              <a:t>2</a:t>
+            </a:r>
+          </a:p>
+        </p:txBody>
+      </p:sp>
+      <p:sp>
+        <p:nvSpPr>
+          <p:cNvPr id="9" name="TextBox 8"/>
+          <p:cNvSpPr txBox="1"/>
+          <p:nvPr/>
+        </p:nvSpPr>
+        <p:spPr>
+          <a:xfrm>
+            <a:off x="1371600" y="3063240"/>
+            <a:ext cx="10271455" cy="1188720"/>
+          </a:xfrm>
+          <a:prstGeom prst="rect">
+            <a:avLst/>
+          </a:prstGeom>
+          <a:noFill/>
+        </p:spPr>
+        <p:txBody>
+          <a:bodyPr wrap="square" anchor="t" lIns="0" rIns="0" tIns="0" bIns="0"/>
+          <a:lstStyle/>
+          <a:p>
+            <a:pPr algn="l"/>
+            <a:r>
+              <a:rPr sz="2400" b="0" i="0">
+                <a:solidFill>
+                  <a:srgbClr val="202122"/>
+                </a:solidFill>
+                <a:latin typeface="Calibri"/>
+              </a:rPr>
+              <a:t>What does a certificate authority issue?</a:t>
+            </a:r>
+          </a:p>
+        </p:txBody>
+      </p:sp>
+      <p:sp>
+        <p:nvSpPr>
+          <p:cNvPr id="10" name="Oval 9"/>
+          <p:cNvSpPr/>
+          <p:nvPr/>
+        </p:nvSpPr>
+        <p:spPr>
+          <a:xfrm>
+            <a:off x="548640" y="4526280"/>
+            <a:ext cx="502920" cy="502920"/>
+          </a:xfrm>
+          <a:prstGeom prst="ellipse">
+            <a:avLst/>
+          </a:prstGeom>
+          <a:solidFill>
+            <a:srgbClr val="4EA1FF"/>
+          </a:solidFill>
+          <a:ln>
+            <a:noFill/>
+          </a:ln>
+          <a:effectLst/>
+        </p:spPr>
+        <p:style>
+          <a:lnRef idx="1">
+            <a:schemeClr val="accent1"/>
+          </a:lnRef>
+          <a:fillRef idx="3">
+            <a:schemeClr val="accent1"/>
+          </a:fillRef>
+          <a:effectRef idx="2">
+            <a:schemeClr val="accent1"/>
+          </a:effectRef>
+          <a:fontRef idx="minor">
+            <a:schemeClr val="lt1"/>
+          </a:fontRef>
+        </p:style>
+        <p:txBody>
+          <a:bodyPr rtlCol="0" anchor="ctr" lIns="0" rIns="0" tIns="0" bIns="0"/>
+          <a:lstStyle/>
+          <a:p>
+            <a:pPr algn="ctr"/>
+            <a:r>
+              <a:rPr sz="1600" b="1">
+                <a:solidFill>
+                  <a:srgbClr val="202122"/>
+                </a:solidFill>
+                <a:latin typeface="Calibri"/>
+              </a:rPr>
+              <a:t>3</a:t>
+            </a:r>
+          </a:p>
+        </p:txBody>
+      </p:sp>
+      <p:sp>
+        <p:nvSpPr>
+          <p:cNvPr id="11" name="TextBox 10"/>
+          <p:cNvSpPr txBox="1"/>
+          <p:nvPr/>
+        </p:nvSpPr>
+        <p:spPr>
+          <a:xfrm>
+            <a:off x="1371600" y="4480560"/>
+            <a:ext cx="10271455" cy="1188720"/>
+          </a:xfrm>
+          <a:prstGeom prst="rect">
+            <a:avLst/>
+          </a:prstGeom>
+          <a:noFill/>
+        </p:spPr>
+        <p:txBody>
+          <a:bodyPr wrap="square" anchor="t" lIns="0" rIns="0" tIns="0" bIns="0"/>
+          <a:lstStyle/>
+          <a:p>
+            <a:pPr algn="l"/>
+            <a:r>
+              <a:rPr sz="2400" b="0" i="0">
+                <a:solidFill>
+                  <a:srgbClr val="202122"/>
+                </a:solidFill>
+                <a:latin typeface="Calibri"/>
+              </a:rPr>
+              <a:t>Why use a domain?</a:t>
+            </a:r>
+          </a:p>
+        </p:txBody>
+      </p:sp>
+      <p:sp>
+        <p:nvSpPr>
+          <p:cNvPr id="12" name="TextBox 11"/>
+          <p:cNvSpPr txBox="1"/>
+          <p:nvPr/>
+        </p:nvSpPr>
+        <p:spPr>
+          <a:xfrm>
+            <a:off x="548640" y="5852160"/>
+            <a:ext cx="11094415" cy="365760"/>
+          </a:xfrm>
+          <a:prstGeom prst="rect">
+            <a:avLst/>
+          </a:prstGeom>
+          <a:noFill/>
+        </p:spPr>
+        <p:txBody>
+          <a:bodyPr wrap="square" anchor="t" lIns="0" rIns="0" tIns="0" bIns="0"/>
+          <a:lstStyle/>
+          <a:p>
+            <a:pPr algn="l"/>
+            <a:r>
+              <a:rPr sz="1300" b="0" i="1">
+                <a:solidFill>
+                  <a:srgbClr val="54595D"/>
+                </a:solidFill>
+                <a:latin typeface="Calibri"/>
+              </a:rPr>
+              <a:t>Answer on mini whiteboards or in your book. Answers are in the speaker notes.</a:t>
+            </a:r>
+          </a:p>
+        </p:txBody>
+      </p:sp>
+    </p:spTree>
+  </p:cSld>
+  <p:clrMapOvr>
+    <a:masterClrMapping/>
+  </p:clrMapOvr>
+</p:sld>
+</file>
+
+<file path=ppt/slides/slide6.xml><?xml version="1.0" encoding="utf-8"?>
+<p:sld xmlns:a="http://schemas.openxmlformats.org/drawingml/2006/main" xmlns:p="http://schemas.openxmlformats.org/presentationml/2006/main" xmlns:r="http://schemas.openxmlformats.org/officeDocument/2006/relationships">
+  <p:cSld>
+    <p:bg>
+      <p:bgPr>
+        <a:solidFill>
+          <a:srgbClr val="FFFFFF"/>
+        </a:solidFill>
+        <a:effectLst/>
+      </p:bgPr>
+    </p:bg>
+    <p:spTree>
+      <p:nvGrpSpPr>
+        <p:cNvPr id="1" name=""/>
+        <p:cNvGrpSpPr/>
+        <p:nvPr/>
+      </p:nvGrpSpPr>
+      <p:grpSpPr/>
+      <p:sp>
+        <p:nvSpPr>
+          <p:cNvPr id="2" name="TextBox 1"/>
+          <p:cNvSpPr txBox="1"/>
+          <p:nvPr/>
+        </p:nvSpPr>
+        <p:spPr>
+          <a:xfrm>
+            <a:off x="548640" y="320040"/>
+            <a:ext cx="11094415" cy="274320"/>
+          </a:xfrm>
+          <a:prstGeom prst="rect">
+            <a:avLst/>
+          </a:prstGeom>
+          <a:noFill/>
+        </p:spPr>
+        <p:txBody>
+          <a:bodyPr wrap="square" anchor="t" lIns="0" rIns="0" tIns="0" bIns="0"/>
+          <a:lstStyle/>
+          <a:p>
+            <a:pPr algn="l"/>
+            <a:r>
+              <a:rPr sz="1100" b="1" i="0">
+                <a:solidFill>
+                  <a:srgbClr val="54595D"/>
+                </a:solidFill>
+                <a:latin typeface="Calibri"/>
+              </a:rPr>
+              <a:t>DIGITAL SUPPORT  ·  Digital Support Content Area 2</a:t>
+            </a:r>
+          </a:p>
+        </p:txBody>
+      </p:sp>
+      <p:sp>
+        <p:nvSpPr>
+          <p:cNvPr id="3" name="TextBox 2"/>
+          <p:cNvSpPr txBox="1"/>
+          <p:nvPr/>
+        </p:nvSpPr>
+        <p:spPr>
+          <a:xfrm>
+            <a:off x="548640" y="566928"/>
+            <a:ext cx="11094415" cy="822960"/>
+          </a:xfrm>
+          <a:prstGeom prst="rect">
+            <a:avLst/>
+          </a:prstGeom>
+          <a:noFill/>
+        </p:spPr>
+        <p:txBody>
+          <a:bodyPr wrap="square" anchor="ctr" lIns="0" rIns="0" tIns="0" bIns="0"/>
+          <a:lstStyle/>
+          <a:p>
+            <a:pPr algn="l"/>
+            <a:r>
+              <a:rPr sz="3200" b="1" i="0">
+                <a:solidFill>
+                  <a:srgbClr val="03306E"/>
+                </a:solidFill>
+                <a:latin typeface="Cambria"/>
+              </a:rPr>
+              <a:t>Email protocols</a:t>
+            </a:r>
+          </a:p>
+        </p:txBody>
+      </p:sp>
+      <p:sp>
+        <p:nvSpPr>
+          <p:cNvPr id="4" name="TextBox 3"/>
+          <p:cNvSpPr txBox="1"/>
+          <p:nvPr/>
+        </p:nvSpPr>
+        <p:spPr>
+          <a:xfrm>
+            <a:off x="548640" y="6446520"/>
+            <a:ext cx="8229600" cy="274320"/>
+          </a:xfrm>
+          <a:prstGeom prst="rect">
+            <a:avLst/>
+          </a:prstGeom>
+          <a:noFill/>
+        </p:spPr>
+        <p:txBody>
+          <a:bodyPr wrap="square" anchor="t" lIns="0" rIns="0" tIns="0" bIns="0"/>
+          <a:lstStyle/>
+          <a:p>
+            <a:pPr algn="l"/>
+            <a:r>
+              <a:rPr sz="1000" b="0" i="0">
+                <a:solidFill>
+                  <a:srgbClr val="54595D"/>
+                </a:solidFill>
+                <a:latin typeface="Calibri"/>
+              </a:rPr>
+              <a:t>Digital Support and Security T Level  ·  Domains, Email and Remote Access</a:t>
+            </a:r>
+          </a:p>
+        </p:txBody>
+      </p:sp>
+      <p:sp>
+        <p:nvSpPr>
+          <p:cNvPr id="5" name="TextBox 4"/>
+          <p:cNvSpPr txBox="1"/>
+          <p:nvPr/>
+        </p:nvSpPr>
+        <p:spPr>
+          <a:xfrm>
+            <a:off x="10728655" y="6446520"/>
+            <a:ext cx="914400" cy="274320"/>
+          </a:xfrm>
+          <a:prstGeom prst="rect">
+            <a:avLst/>
+          </a:prstGeom>
+          <a:noFill/>
+        </p:spPr>
+        <p:txBody>
+          <a:bodyPr wrap="square" anchor="t" lIns="0" rIns="0" tIns="0" bIns="0"/>
+          <a:lstStyle/>
+          <a:p>
+            <a:pPr algn="r"/>
+            <a:r>
+              <a:rPr sz="1000" b="0" i="0">
+                <a:solidFill>
+                  <a:srgbClr val="54595D"/>
+                </a:solidFill>
+                <a:latin typeface="Calibri"/>
+              </a:rPr>
+              <a:t>6</a:t>
+            </a:r>
+          </a:p>
+        </p:txBody>
+      </p:sp>
+      <p:sp>
+        <p:nvSpPr>
+          <p:cNvPr id="6" name="TextBox 5"/>
+          <p:cNvSpPr txBox="1"/>
+          <p:nvPr/>
+        </p:nvSpPr>
+        <p:spPr>
+          <a:xfrm>
+            <a:off x="548640" y="1554480"/>
+            <a:ext cx="6720840" cy="4617720"/>
+          </a:xfrm>
+          <a:prstGeom prst="rect">
+            <a:avLst/>
+          </a:prstGeom>
+          <a:noFill/>
+        </p:spPr>
+        <p:txBody>
+          <a:bodyPr wrap="square" lIns="0" rIns="0" tIns="0" bIns="0">
+            <a:spAutoFit/>
+          </a:bodyPr>
+          <a:lstStyle/>
+          <a:p>
+            <a:pPr>
+              <a:spcAft>
+                <a:spcPts val="1080"/>
+              </a:spcAft>
+            </a:pPr>
+            <a:r>
+              <a:rPr sz="1800" b="0">
+                <a:solidFill>
+                  <a:srgbClr val="202122"/>
+                </a:solidFill>
+                <a:latin typeface="Calibri"/>
+              </a:rPr>
+              <a:t>Email uses different protocols for sending and receiving.</a:t>
+            </a:r>
+          </a:p>
+          <a:p>
+            <a:pPr>
+              <a:spcAft>
+                <a:spcPts val="1080"/>
+              </a:spcAft>
+            </a:pPr>
+            <a:r>
+              <a:rPr sz="1800" b="0">
+                <a:solidFill>
+                  <a:srgbClr val="202122"/>
+                </a:solidFill>
+                <a:latin typeface="Calibri"/>
+              </a:rPr>
+              <a:t>SMTP sends mail between servers and from your client to your server.</a:t>
+            </a:r>
+          </a:p>
+          <a:p>
+            <a:pPr>
+              <a:spcAft>
+                <a:spcPts val="1080"/>
+              </a:spcAft>
+            </a:pPr>
+            <a:r>
+              <a:rPr sz="1800" b="0">
+                <a:solidFill>
+                  <a:srgbClr val="202122"/>
+                </a:solidFill>
+                <a:latin typeface="Calibri"/>
+              </a:rPr>
+              <a:t>POP3 downloads mail to one device and usually removes it from the server: fine for one computer, poor for several.</a:t>
+            </a:r>
+          </a:p>
+          <a:p>
+            <a:pPr>
+              <a:spcAft>
+                <a:spcPts val="1080"/>
+              </a:spcAft>
+            </a:pPr>
+            <a:r>
+              <a:rPr sz="1800" b="0">
+                <a:solidFill>
+                  <a:srgbClr val="202122"/>
+                </a:solidFill>
+                <a:latin typeface="Calibri"/>
+              </a:rPr>
+              <a:t>IMAP keeps mail on the server and syncs it, so your phone, laptop and webmail all match.</a:t>
+            </a:r>
+          </a:p>
+          <a:p>
+            <a:pPr>
+              <a:spcAft>
+                <a:spcPts val="1080"/>
+              </a:spcAft>
+            </a:pPr>
+            <a:r>
+              <a:rPr sz="1800" b="0">
+                <a:solidFill>
+                  <a:srgbClr val="202122"/>
+                </a:solidFill>
+                <a:latin typeface="Calibri"/>
+              </a:rPr>
+              <a:t>S/MIME encrypts and signs individual messages. TLS (the successor to SSL) encrypts the connection between client and server. Configuration also needs the provider, the right ports and the domain's MX record, which tells the internet which server receives its mail.</a:t>
+            </a:r>
+          </a:p>
+        </p:txBody>
+      </p:sp>
+      <p:sp>
+        <p:nvSpPr>
+          <p:cNvPr id="7" name="Rounded Rectangle 6"/>
+          <p:cNvSpPr/>
+          <p:nvPr/>
+        </p:nvSpPr>
+        <p:spPr>
+          <a:xfrm>
+            <a:off x="7772400" y="1554480"/>
+            <a:ext cx="3867912" cy="4526280"/>
+          </a:xfrm>
+          <a:prstGeom prst="roundRect">
+            <a:avLst>
+              <a:gd name="adj" fmla="val 8000"/>
+            </a:avLst>
+          </a:prstGeom>
+          <a:solidFill>
+            <a:srgbClr val="03306E"/>
+          </a:solidFill>
+          <a:ln>
+            <a:noFill/>
+          </a:ln>
+          <a:effectLst/>
+        </p:spPr>
+        <p:style>
+          <a:lnRef idx="1">
+            <a:schemeClr val="accent1"/>
+          </a:lnRef>
+          <a:fillRef idx="3">
+            <a:schemeClr val="accent1"/>
+          </a:fillRef>
+          <a:effectRef idx="2">
+            <a:schemeClr val="accent1"/>
+          </a:effectRef>
+          <a:fontRef idx="minor">
+            <a:schemeClr val="lt1"/>
+          </a:fontRef>
+        </p:style>
+        <p:txBody>
+          <a:bodyPr rtlCol="0" anchor="ctr"/>
+          <a:lstStyle/>
+          <a:p/>
+        </p:txBody>
+      </p:sp>
+      <p:sp>
+        <p:nvSpPr>
+          <p:cNvPr id="8" name="Oval 7"/>
+          <p:cNvSpPr/>
+          <p:nvPr/>
+        </p:nvSpPr>
+        <p:spPr>
+          <a:xfrm>
+            <a:off x="8046720" y="1828800"/>
+            <a:ext cx="548640" cy="548640"/>
+          </a:xfrm>
+          <a:prstGeom prst="ellipse">
+            <a:avLst/>
+          </a:prstGeom>
+          <a:solidFill>
+            <a:srgbClr val="4EA1FF"/>
+          </a:solidFill>
+          <a:ln>
+            <a:noFill/>
+          </a:ln>
+          <a:effectLst/>
+        </p:spPr>
+        <p:style>
+          <a:lnRef idx="1">
+            <a:schemeClr val="accent1"/>
+          </a:lnRef>
+          <a:fillRef idx="3">
+            <a:schemeClr val="accent1"/>
+          </a:fillRef>
+          <a:effectRef idx="2">
+            <a:schemeClr val="accent1"/>
+          </a:effectRef>
+          <a:fontRef idx="minor">
+            <a:schemeClr val="lt1"/>
+          </a:fontRef>
+        </p:style>
+        <p:txBody>
+          <a:bodyPr rtlCol="0" anchor="ctr" lIns="0" rIns="0" tIns="0" bIns="0"/>
+          <a:lstStyle/>
+          <a:p>
+            <a:pPr algn="ctr"/>
+            <a:r>
+              <a:rPr sz="1300" b="1">
+                <a:solidFill>
+                  <a:srgbClr val="202122"/>
+                </a:solidFill>
+                <a:latin typeface="Calibri"/>
+              </a:rPr>
+              <a:t>e.g.</a:t>
+            </a:r>
+          </a:p>
+        </p:txBody>
+      </p:sp>
+      <p:sp>
+        <p:nvSpPr>
+          <p:cNvPr id="9" name="TextBox 8"/>
+          <p:cNvSpPr txBox="1"/>
+          <p:nvPr/>
+        </p:nvSpPr>
+        <p:spPr>
+          <a:xfrm>
+            <a:off x="8046720" y="2560320"/>
+            <a:ext cx="3291840" cy="365760"/>
+          </a:xfrm>
+          <a:prstGeom prst="rect">
+            <a:avLst/>
+          </a:prstGeom>
+          <a:noFill/>
+        </p:spPr>
+        <p:txBody>
+          <a:bodyPr wrap="square" anchor="t" lIns="0" rIns="0" tIns="0" bIns="0"/>
+          <a:lstStyle/>
+          <a:p>
+            <a:pPr algn="l"/>
+            <a:r>
+              <a:rPr sz="1300" b="1" i="0">
+                <a:solidFill>
+                  <a:srgbClr val="A9C8F0"/>
+                </a:solidFill>
+                <a:latin typeface="Calibri"/>
+              </a:rPr>
+              <a:t>EXAMPLE</a:t>
+            </a:r>
+          </a:p>
+        </p:txBody>
+      </p:sp>
+      <p:sp>
+        <p:nvSpPr>
+          <p:cNvPr id="10" name="TextBox 9"/>
+          <p:cNvSpPr txBox="1"/>
+          <p:nvPr/>
+        </p:nvSpPr>
+        <p:spPr>
+          <a:xfrm>
+            <a:off x="8046720" y="2971800"/>
+            <a:ext cx="3291840" cy="2971800"/>
+          </a:xfrm>
+          <a:prstGeom prst="rect">
+            <a:avLst/>
+          </a:prstGeom>
+          <a:noFill/>
+        </p:spPr>
+        <p:txBody>
+          <a:bodyPr wrap="square" anchor="t" lIns="0" rIns="0" tIns="0" bIns="0"/>
+          <a:lstStyle/>
+          <a:p>
+            <a:pPr algn="l"/>
+            <a:r>
+              <a:rPr sz="1900" b="0" i="0">
+                <a:solidFill>
+                  <a:srgbClr val="FFFFFF"/>
+                </a:solidFill>
+                <a:latin typeface="Cambria"/>
+              </a:rPr>
+              <a:t>A user complains emails read on their phone don't show as read on their laptop: they're set up with POP3 and need IMAP.</a:t>
+            </a:r>
+          </a:p>
+        </p:txBody>
+      </p:sp>
+    </p:spTree>
+  </p:cSld>
+  <p:clrMapOvr>
+    <a:masterClrMapping/>
+  </p:clrMapOvr>
+</p:sld>
+</file>
+
+<file path=ppt/slides/slide7.xml><?xml version="1.0" encoding="utf-8"?>
+<p:sld xmlns:a="http://schemas.openxmlformats.org/drawingml/2006/main" xmlns:p="http://schemas.openxmlformats.org/presentationml/2006/main" xmlns:r="http://schemas.openxmlformats.org/officeDocument/2006/relationships">
+  <p:cSld>
+    <p:bg>
+      <p:bgPr>
+        <a:solidFill>
+          <a:srgbClr val="FFFFFF"/>
+        </a:solidFill>
+        <a:effectLst/>
+      </p:bgPr>
+    </p:bg>
+    <p:spTree>
+      <p:nvGrpSpPr>
+        <p:cNvPr id="1" name=""/>
+        <p:cNvGrpSpPr/>
+        <p:nvPr/>
+      </p:nvGrpSpPr>
+      <p:grpSpPr/>
+      <p:sp>
+        <p:nvSpPr>
+          <p:cNvPr id="2" name="TextBox 1"/>
+          <p:cNvSpPr txBox="1"/>
+          <p:nvPr/>
+        </p:nvSpPr>
+        <p:spPr>
+          <a:xfrm>
+            <a:off x="548640" y="320040"/>
+            <a:ext cx="11094415" cy="274320"/>
+          </a:xfrm>
+          <a:prstGeom prst="rect">
+            <a:avLst/>
+          </a:prstGeom>
+          <a:noFill/>
+        </p:spPr>
+        <p:txBody>
+          <a:bodyPr wrap="square" anchor="t" lIns="0" rIns="0" tIns="0" bIns="0"/>
+          <a:lstStyle/>
+          <a:p>
+            <a:pPr algn="l"/>
+            <a:r>
+              <a:rPr sz="1100" b="1" i="0">
+                <a:solidFill>
+                  <a:srgbClr val="54595D"/>
+                </a:solidFill>
+                <a:latin typeface="Calibri"/>
+              </a:rPr>
+              <a:t>DIGITAL SUPPORT  ·  Digital Support Content Area 2</a:t>
+            </a:r>
+          </a:p>
+        </p:txBody>
+      </p:sp>
+      <p:sp>
+        <p:nvSpPr>
+          <p:cNvPr id="3" name="TextBox 2"/>
+          <p:cNvSpPr txBox="1"/>
+          <p:nvPr/>
+        </p:nvSpPr>
+        <p:spPr>
+          <a:xfrm>
+            <a:off x="548640" y="566928"/>
+            <a:ext cx="11094415" cy="822960"/>
+          </a:xfrm>
+          <a:prstGeom prst="rect">
+            <a:avLst/>
+          </a:prstGeom>
+          <a:noFill/>
+        </p:spPr>
+        <p:txBody>
+          <a:bodyPr wrap="square" anchor="ctr" lIns="0" rIns="0" tIns="0" bIns="0"/>
+          <a:lstStyle/>
+          <a:p>
+            <a:pPr algn="l"/>
+            <a:r>
+              <a:rPr sz="3200" b="1" i="0">
+                <a:solidFill>
+                  <a:srgbClr val="03306E"/>
+                </a:solidFill>
+                <a:latin typeface="Cambria"/>
+              </a:rPr>
+              <a:t>Email protocols</a:t>
+            </a:r>
+          </a:p>
+        </p:txBody>
+      </p:sp>
+      <p:sp>
+        <p:nvSpPr>
+          <p:cNvPr id="4" name="TextBox 3"/>
+          <p:cNvSpPr txBox="1"/>
+          <p:nvPr/>
+        </p:nvSpPr>
+        <p:spPr>
+          <a:xfrm>
+            <a:off x="548640" y="6446520"/>
+            <a:ext cx="8229600" cy="274320"/>
+          </a:xfrm>
+          <a:prstGeom prst="rect">
+            <a:avLst/>
+          </a:prstGeom>
+          <a:noFill/>
+        </p:spPr>
+        <p:txBody>
+          <a:bodyPr wrap="square" anchor="t" lIns="0" rIns="0" tIns="0" bIns="0"/>
+          <a:lstStyle/>
+          <a:p>
+            <a:pPr algn="l"/>
+            <a:r>
+              <a:rPr sz="1000" b="0" i="0">
+                <a:solidFill>
+                  <a:srgbClr val="54595D"/>
+                </a:solidFill>
+                <a:latin typeface="Calibri"/>
+              </a:rPr>
+              <a:t>Digital Support and Security T Level  ·  Domains, Email and Remote Access</a:t>
+            </a:r>
+          </a:p>
+        </p:txBody>
+      </p:sp>
+      <p:sp>
+        <p:nvSpPr>
+          <p:cNvPr id="5" name="TextBox 4"/>
+          <p:cNvSpPr txBox="1"/>
+          <p:nvPr/>
+        </p:nvSpPr>
+        <p:spPr>
+          <a:xfrm>
+            <a:off x="10728655" y="6446520"/>
+            <a:ext cx="914400" cy="274320"/>
+          </a:xfrm>
+          <a:prstGeom prst="rect">
+            <a:avLst/>
+          </a:prstGeom>
+          <a:noFill/>
+        </p:spPr>
+        <p:txBody>
+          <a:bodyPr wrap="square" anchor="t" lIns="0" rIns="0" tIns="0" bIns="0"/>
+          <a:lstStyle/>
+          <a:p>
+            <a:pPr algn="r"/>
+            <a:r>
+              <a:rPr sz="1000" b="0" i="0">
+                <a:solidFill>
+                  <a:srgbClr val="54595D"/>
+                </a:solidFill>
+                <a:latin typeface="Calibri"/>
+              </a:rPr>
+              <a:t>7</a:t>
             </a:r>
           </a:p>
         </p:txBody>
@@ -6192,2244 +11823,6 @@
 </p:sld>
 </file>
 
-<file path=ppt/slides/slide5.xml><?xml version="1.0" encoding="utf-8"?>
-<p:sld xmlns:a="http://schemas.openxmlformats.org/drawingml/2006/main" xmlns:p="http://schemas.openxmlformats.org/presentationml/2006/main" xmlns:r="http://schemas.openxmlformats.org/officeDocument/2006/relationships">
-  <p:cSld>
-    <p:bg>
-      <p:bgPr>
-        <a:solidFill>
-          <a:srgbClr val="FFFFFF"/>
-        </a:solidFill>
-        <a:effectLst/>
-      </p:bgPr>
-    </p:bg>
-    <p:spTree>
-      <p:nvGrpSpPr>
-        <p:cNvPr id="1" name=""/>
-        <p:cNvGrpSpPr/>
-        <p:nvPr/>
-      </p:nvGrpSpPr>
-      <p:grpSpPr/>
-      <p:sp>
-        <p:nvSpPr>
-          <p:cNvPr id="2" name="TextBox 1"/>
-          <p:cNvSpPr txBox="1"/>
-          <p:nvPr/>
-        </p:nvSpPr>
-        <p:spPr>
-          <a:xfrm>
-            <a:off x="548640" y="320040"/>
-            <a:ext cx="11094415" cy="274320"/>
-          </a:xfrm>
-          <a:prstGeom prst="rect">
-            <a:avLst/>
-          </a:prstGeom>
-          <a:noFill/>
-        </p:spPr>
-        <p:txBody>
-          <a:bodyPr wrap="square" anchor="t" lIns="0" rIns="0" tIns="0" bIns="0"/>
-          <a:lstStyle/>
-          <a:p>
-            <a:pPr algn="l"/>
-            <a:r>
-              <a:rPr sz="1100" b="1" i="0">
-                <a:solidFill>
-                  <a:srgbClr val="54595D"/>
-                </a:solidFill>
-                <a:latin typeface="Calibri"/>
-              </a:rPr>
-              <a:t>DIGITAL SUPPORT  ·  Digital Support Content Area 2</a:t>
-            </a:r>
-          </a:p>
-        </p:txBody>
-      </p:sp>
-      <p:sp>
-        <p:nvSpPr>
-          <p:cNvPr id="3" name="TextBox 2"/>
-          <p:cNvSpPr txBox="1"/>
-          <p:nvPr/>
-        </p:nvSpPr>
-        <p:spPr>
-          <a:xfrm>
-            <a:off x="548640" y="566928"/>
-            <a:ext cx="11094415" cy="822960"/>
-          </a:xfrm>
-          <a:prstGeom prst="rect">
-            <a:avLst/>
-          </a:prstGeom>
-          <a:noFill/>
-        </p:spPr>
-        <p:txBody>
-          <a:bodyPr wrap="square" anchor="ctr" lIns="0" rIns="0" tIns="0" bIns="0"/>
-          <a:lstStyle/>
-          <a:p>
-            <a:pPr algn="l"/>
-            <a:r>
-              <a:rPr sz="3200" b="1" i="0">
-                <a:solidFill>
-                  <a:srgbClr val="03306E"/>
-                </a:solidFill>
-                <a:latin typeface="Cambria"/>
-              </a:rPr>
-              <a:t>Remote access and VPNs</a:t>
-            </a:r>
-          </a:p>
-        </p:txBody>
-      </p:sp>
-      <p:sp>
-        <p:nvSpPr>
-          <p:cNvPr id="4" name="TextBox 3"/>
-          <p:cNvSpPr txBox="1"/>
-          <p:nvPr/>
-        </p:nvSpPr>
-        <p:spPr>
-          <a:xfrm>
-            <a:off x="548640" y="6446520"/>
-            <a:ext cx="8229600" cy="274320"/>
-          </a:xfrm>
-          <a:prstGeom prst="rect">
-            <a:avLst/>
-          </a:prstGeom>
-          <a:noFill/>
-        </p:spPr>
-        <p:txBody>
-          <a:bodyPr wrap="square" anchor="t" lIns="0" rIns="0" tIns="0" bIns="0"/>
-          <a:lstStyle/>
-          <a:p>
-            <a:pPr algn="l"/>
-            <a:r>
-              <a:rPr sz="1000" b="0" i="0">
-                <a:solidFill>
-                  <a:srgbClr val="54595D"/>
-                </a:solidFill>
-                <a:latin typeface="Calibri"/>
-              </a:rPr>
-              <a:t>Digital Support and Security T Level  ·  Domains, Email and Remote Access</a:t>
-            </a:r>
-          </a:p>
-        </p:txBody>
-      </p:sp>
-      <p:sp>
-        <p:nvSpPr>
-          <p:cNvPr id="5" name="TextBox 4"/>
-          <p:cNvSpPr txBox="1"/>
-          <p:nvPr/>
-        </p:nvSpPr>
-        <p:spPr>
-          <a:xfrm>
-            <a:off x="10728655" y="6446520"/>
-            <a:ext cx="914400" cy="274320"/>
-          </a:xfrm>
-          <a:prstGeom prst="rect">
-            <a:avLst/>
-          </a:prstGeom>
-          <a:noFill/>
-        </p:spPr>
-        <p:txBody>
-          <a:bodyPr wrap="square" anchor="t" lIns="0" rIns="0" tIns="0" bIns="0"/>
-          <a:lstStyle/>
-          <a:p>
-            <a:pPr algn="r"/>
-            <a:r>
-              <a:rPr sz="1000" b="0" i="0">
-                <a:solidFill>
-                  <a:srgbClr val="54595D"/>
-                </a:solidFill>
-                <a:latin typeface="Calibri"/>
-              </a:rPr>
-              <a:t>5</a:t>
-            </a:r>
-          </a:p>
-        </p:txBody>
-      </p:sp>
-      <p:sp>
-        <p:nvSpPr>
-          <p:cNvPr id="6" name="Rounded Rectangle 5"/>
-          <p:cNvSpPr/>
-          <p:nvPr/>
-        </p:nvSpPr>
-        <p:spPr>
-          <a:xfrm>
-            <a:off x="548640" y="1600200"/>
-            <a:ext cx="5364327" cy="640080"/>
-          </a:xfrm>
-          <a:prstGeom prst="roundRect">
-            <a:avLst>
-              <a:gd name="adj" fmla="val 15000"/>
-            </a:avLst>
-          </a:prstGeom>
-          <a:solidFill>
-            <a:srgbClr val="03306E"/>
-          </a:solidFill>
-          <a:ln>
-            <a:noFill/>
-          </a:ln>
-          <a:effectLst/>
-        </p:spPr>
-        <p:style>
-          <a:lnRef idx="1">
-            <a:schemeClr val="accent1"/>
-          </a:lnRef>
-          <a:fillRef idx="3">
-            <a:schemeClr val="accent1"/>
-          </a:fillRef>
-          <a:effectRef idx="2">
-            <a:schemeClr val="accent1"/>
-          </a:effectRef>
-          <a:fontRef idx="minor">
-            <a:schemeClr val="lt1"/>
-          </a:fontRef>
-        </p:style>
-        <p:txBody>
-          <a:bodyPr rtlCol="0" anchor="ctr"/>
-          <a:lstStyle/>
-          <a:p/>
-        </p:txBody>
-      </p:sp>
-      <p:sp>
-        <p:nvSpPr>
-          <p:cNvPr id="7" name="TextBox 6"/>
-          <p:cNvSpPr txBox="1"/>
-          <p:nvPr/>
-        </p:nvSpPr>
-        <p:spPr>
-          <a:xfrm>
-            <a:off x="777240" y="1600200"/>
-            <a:ext cx="4907127" cy="640080"/>
-          </a:xfrm>
-          <a:prstGeom prst="rect">
-            <a:avLst/>
-          </a:prstGeom>
-          <a:noFill/>
-        </p:spPr>
-        <p:txBody>
-          <a:bodyPr wrap="square" anchor="ctr" lIns="0" rIns="0" tIns="0" bIns="0"/>
-          <a:lstStyle/>
-          <a:p>
-            <a:pPr algn="l"/>
-            <a:r>
-              <a:rPr sz="2000" b="1" i="0">
-                <a:solidFill>
-                  <a:srgbClr val="FFFFFF"/>
-                </a:solidFill>
-                <a:latin typeface="Calibri"/>
-              </a:rPr>
-              <a:t>Remote access</a:t>
-            </a:r>
-          </a:p>
-        </p:txBody>
-      </p:sp>
-      <p:sp>
-        <p:nvSpPr>
-          <p:cNvPr id="8" name="Rounded Rectangle 7"/>
-          <p:cNvSpPr/>
-          <p:nvPr/>
-        </p:nvSpPr>
-        <p:spPr>
-          <a:xfrm>
-            <a:off x="548640" y="2377440"/>
-            <a:ext cx="5364327" cy="3794760"/>
-          </a:xfrm>
-          <a:prstGeom prst="roundRect">
-            <a:avLst>
-              <a:gd name="adj" fmla="val 4000"/>
-            </a:avLst>
-          </a:prstGeom>
-          <a:solidFill>
-            <a:srgbClr val="EAF3FF"/>
-          </a:solidFill>
-          <a:ln>
-            <a:noFill/>
-          </a:ln>
-          <a:effectLst/>
-        </p:spPr>
-        <p:style>
-          <a:lnRef idx="1">
-            <a:schemeClr val="accent1"/>
-          </a:lnRef>
-          <a:fillRef idx="3">
-            <a:schemeClr val="accent1"/>
-          </a:fillRef>
-          <a:effectRef idx="2">
-            <a:schemeClr val="accent1"/>
-          </a:effectRef>
-          <a:fontRef idx="minor">
-            <a:schemeClr val="lt1"/>
-          </a:fontRef>
-        </p:style>
-        <p:txBody>
-          <a:bodyPr rtlCol="0" anchor="ctr"/>
-          <a:lstStyle/>
-          <a:p/>
-        </p:txBody>
-      </p:sp>
-      <p:sp>
-        <p:nvSpPr>
-          <p:cNvPr id="9" name="TextBox 8"/>
-          <p:cNvSpPr txBox="1"/>
-          <p:nvPr/>
-        </p:nvSpPr>
-        <p:spPr>
-          <a:xfrm>
-            <a:off x="822959" y="2606040"/>
-            <a:ext cx="4815687" cy="3337560"/>
-          </a:xfrm>
-          <a:prstGeom prst="rect">
-            <a:avLst/>
-          </a:prstGeom>
-          <a:noFill/>
-        </p:spPr>
-        <p:txBody>
-          <a:bodyPr wrap="square" lIns="0" rIns="0" tIns="0" bIns="0">
-            <a:spAutoFit/>
-          </a:bodyPr>
-          <a:lstStyle/>
-          <a:p>
-            <a:pPr marL="274320" indent="-274320">
-              <a:spcAft>
-                <a:spcPts val="990"/>
-              </a:spcAft>
-              <a:buClr>
-                <a:srgbClr val="0645AD"/>
-              </a:buClr>
-              <a:buFont typeface="Arial"/>
-              <a:buChar char="•"/>
-            </a:pPr>
-            <a:r>
-              <a:rPr sz="2200" b="0">
-                <a:solidFill>
-                  <a:srgbClr val="202122"/>
-                </a:solidFill>
-                <a:latin typeface="Calibri"/>
-              </a:rPr>
-              <a:t>Work remotely as if on the network</a:t>
-            </a:r>
-          </a:p>
-          <a:p>
-            <a:pPr marL="274320" indent="-274320">
-              <a:spcAft>
-                <a:spcPts val="990"/>
-              </a:spcAft>
-              <a:buClr>
-                <a:srgbClr val="0645AD"/>
-              </a:buClr>
-              <a:buFont typeface="Arial"/>
-              <a:buChar char="•"/>
-            </a:pPr>
-            <a:r>
-              <a:rPr sz="2200" b="0">
-                <a:solidFill>
-                  <a:srgbClr val="202122"/>
-                </a:solidFill>
-                <a:latin typeface="Calibri"/>
-              </a:rPr>
-              <a:t>Supports home working in a BCP</a:t>
-            </a:r>
-          </a:p>
-          <a:p>
-            <a:pPr marL="274320" indent="-274320">
-              <a:spcAft>
-                <a:spcPts val="990"/>
-              </a:spcAft>
-              <a:buClr>
-                <a:srgbClr val="0645AD"/>
-              </a:buClr>
-              <a:buFont typeface="Arial"/>
-              <a:buChar char="•"/>
-            </a:pPr>
-            <a:r>
-              <a:rPr sz="2200" b="0">
-                <a:solidFill>
-                  <a:srgbClr val="202122"/>
-                </a:solidFill>
-                <a:latin typeface="Calibri"/>
-              </a:rPr>
-              <a:t>Desktop sharing</a:t>
-            </a:r>
-          </a:p>
-          <a:p>
-            <a:pPr marL="274320" indent="-274320">
-              <a:spcAft>
-                <a:spcPts val="990"/>
-              </a:spcAft>
-              <a:buClr>
-                <a:srgbClr val="0645AD"/>
-              </a:buClr>
-              <a:buFont typeface="Arial"/>
-              <a:buChar char="•"/>
-            </a:pPr>
-            <a:r>
-              <a:rPr sz="2200" b="0">
-                <a:solidFill>
-                  <a:srgbClr val="202122"/>
-                </a:solidFill>
-                <a:latin typeface="Calibri"/>
-              </a:rPr>
-              <a:t>Remote support and fault diagnosis</a:t>
-            </a:r>
-          </a:p>
-          <a:p>
-            <a:pPr marL="274320" indent="-274320">
-              <a:spcAft>
-                <a:spcPts val="990"/>
-              </a:spcAft>
-              <a:buClr>
-                <a:srgbClr val="0645AD"/>
-              </a:buClr>
-              <a:buFont typeface="Arial"/>
-              <a:buChar char="•"/>
-            </a:pPr>
-            <a:r>
-              <a:rPr sz="2200" b="0">
-                <a:solidFill>
-                  <a:srgbClr val="202122"/>
-                </a:solidFill>
-                <a:latin typeface="Calibri"/>
-              </a:rPr>
-              <a:t>Off-site working</a:t>
-            </a:r>
-          </a:p>
-        </p:txBody>
-      </p:sp>
-      <p:sp>
-        <p:nvSpPr>
-          <p:cNvPr id="10" name="Rounded Rectangle 9"/>
-          <p:cNvSpPr/>
-          <p:nvPr/>
-        </p:nvSpPr>
-        <p:spPr>
-          <a:xfrm>
-            <a:off x="6278727" y="1600200"/>
-            <a:ext cx="5364327" cy="640080"/>
-          </a:xfrm>
-          <a:prstGeom prst="roundRect">
-            <a:avLst>
-              <a:gd name="adj" fmla="val 15000"/>
-            </a:avLst>
-          </a:prstGeom>
-          <a:solidFill>
-            <a:srgbClr val="0645AD"/>
-          </a:solidFill>
-          <a:ln>
-            <a:noFill/>
-          </a:ln>
-          <a:effectLst/>
-        </p:spPr>
-        <p:style>
-          <a:lnRef idx="1">
-            <a:schemeClr val="accent1"/>
-          </a:lnRef>
-          <a:fillRef idx="3">
-            <a:schemeClr val="accent1"/>
-          </a:fillRef>
-          <a:effectRef idx="2">
-            <a:schemeClr val="accent1"/>
-          </a:effectRef>
-          <a:fontRef idx="minor">
-            <a:schemeClr val="lt1"/>
-          </a:fontRef>
-        </p:style>
-        <p:txBody>
-          <a:bodyPr rtlCol="0" anchor="ctr"/>
-          <a:lstStyle/>
-          <a:p/>
-        </p:txBody>
-      </p:sp>
-      <p:sp>
-        <p:nvSpPr>
-          <p:cNvPr id="11" name="TextBox 10"/>
-          <p:cNvSpPr txBox="1"/>
-          <p:nvPr/>
-        </p:nvSpPr>
-        <p:spPr>
-          <a:xfrm>
-            <a:off x="6507327" y="1600200"/>
-            <a:ext cx="4907127" cy="640080"/>
-          </a:xfrm>
-          <a:prstGeom prst="rect">
-            <a:avLst/>
-          </a:prstGeom>
-          <a:noFill/>
-        </p:spPr>
-        <p:txBody>
-          <a:bodyPr wrap="square" anchor="ctr" lIns="0" rIns="0" tIns="0" bIns="0"/>
-          <a:lstStyle/>
-          <a:p>
-            <a:pPr algn="l"/>
-            <a:r>
-              <a:rPr sz="2000" b="1" i="0">
-                <a:solidFill>
-                  <a:srgbClr val="FFFFFF"/>
-                </a:solidFill>
-                <a:latin typeface="Calibri"/>
-              </a:rPr>
-              <a:t>VPNs</a:t>
-            </a:r>
-          </a:p>
-        </p:txBody>
-      </p:sp>
-      <p:sp>
-        <p:nvSpPr>
-          <p:cNvPr id="12" name="Rounded Rectangle 11"/>
-          <p:cNvSpPr/>
-          <p:nvPr/>
-        </p:nvSpPr>
-        <p:spPr>
-          <a:xfrm>
-            <a:off x="6278727" y="2377440"/>
-            <a:ext cx="5364327" cy="3794760"/>
-          </a:xfrm>
-          <a:prstGeom prst="roundRect">
-            <a:avLst>
-              <a:gd name="adj" fmla="val 4000"/>
-            </a:avLst>
-          </a:prstGeom>
-          <a:solidFill>
-            <a:srgbClr val="EAF3FF"/>
-          </a:solidFill>
-          <a:ln>
-            <a:noFill/>
-          </a:ln>
-          <a:effectLst/>
-        </p:spPr>
-        <p:style>
-          <a:lnRef idx="1">
-            <a:schemeClr val="accent1"/>
-          </a:lnRef>
-          <a:fillRef idx="3">
-            <a:schemeClr val="accent1"/>
-          </a:fillRef>
-          <a:effectRef idx="2">
-            <a:schemeClr val="accent1"/>
-          </a:effectRef>
-          <a:fontRef idx="minor">
-            <a:schemeClr val="lt1"/>
-          </a:fontRef>
-        </p:style>
-        <p:txBody>
-          <a:bodyPr rtlCol="0" anchor="ctr"/>
-          <a:lstStyle/>
-          <a:p/>
-        </p:txBody>
-      </p:sp>
-      <p:sp>
-        <p:nvSpPr>
-          <p:cNvPr id="13" name="TextBox 12"/>
-          <p:cNvSpPr txBox="1"/>
-          <p:nvPr/>
-        </p:nvSpPr>
-        <p:spPr>
-          <a:xfrm>
-            <a:off x="6553047" y="2606040"/>
-            <a:ext cx="4815687" cy="3337560"/>
-          </a:xfrm>
-          <a:prstGeom prst="rect">
-            <a:avLst/>
-          </a:prstGeom>
-          <a:noFill/>
-        </p:spPr>
-        <p:txBody>
-          <a:bodyPr wrap="square" lIns="0" rIns="0" tIns="0" bIns="0">
-            <a:spAutoFit/>
-          </a:bodyPr>
-          <a:lstStyle/>
-          <a:p>
-            <a:pPr marL="274320" indent="-274320">
-              <a:spcAft>
-                <a:spcPts val="990"/>
-              </a:spcAft>
-              <a:buClr>
-                <a:srgbClr val="0645AD"/>
-              </a:buClr>
-              <a:buFont typeface="Arial"/>
-              <a:buChar char="•"/>
-            </a:pPr>
-            <a:r>
-              <a:rPr sz="2200" b="0">
-                <a:solidFill>
-                  <a:srgbClr val="202122"/>
-                </a:solidFill>
-                <a:latin typeface="Calibri"/>
-              </a:rPr>
-              <a:t>Encrypt traffic and mask the client's IP</a:t>
-            </a:r>
-          </a:p>
-          <a:p>
-            <a:pPr marL="274320" indent="-274320">
-              <a:spcAft>
-                <a:spcPts val="990"/>
-              </a:spcAft>
-              <a:buClr>
-                <a:srgbClr val="0645AD"/>
-              </a:buClr>
-              <a:buFont typeface="Arial"/>
-              <a:buChar char="•"/>
-            </a:pPr>
-            <a:r>
-              <a:rPr sz="2200" b="0">
-                <a:solidFill>
-                  <a:srgbClr val="202122"/>
-                </a:solidFill>
-                <a:latin typeface="Calibri"/>
-              </a:rPr>
-              <a:t>Choose port and security protocol</a:t>
-            </a:r>
-          </a:p>
-          <a:p>
-            <a:pPr marL="274320" indent="-274320">
-              <a:spcAft>
-                <a:spcPts val="990"/>
-              </a:spcAft>
-              <a:buClr>
-                <a:srgbClr val="0645AD"/>
-              </a:buClr>
-              <a:buFont typeface="Arial"/>
-              <a:buChar char="•"/>
-            </a:pPr>
-            <a:r>
-              <a:rPr sz="2200" b="0">
-                <a:solidFill>
-                  <a:srgbClr val="202122"/>
-                </a:solidFill>
-                <a:latin typeface="Calibri"/>
-              </a:rPr>
-              <a:t>Set encryption and certificates</a:t>
-            </a:r>
-          </a:p>
-          <a:p>
-            <a:pPr marL="274320" indent="-274320">
-              <a:spcAft>
-                <a:spcPts val="990"/>
-              </a:spcAft>
-              <a:buClr>
-                <a:srgbClr val="0645AD"/>
-              </a:buClr>
-              <a:buFont typeface="Arial"/>
-              <a:buChar char="•"/>
-            </a:pPr>
-            <a:r>
-              <a:rPr sz="2200" b="0">
-                <a:solidFill>
-                  <a:srgbClr val="202122"/>
-                </a:solidFill>
-                <a:latin typeface="Calibri"/>
-              </a:rPr>
-              <a:t>Configure authentication</a:t>
-            </a:r>
-          </a:p>
-        </p:txBody>
-      </p:sp>
-    </p:spTree>
-  </p:cSld>
-  <p:clrMapOvr>
-    <a:masterClrMapping/>
-  </p:clrMapOvr>
-</p:sld>
-</file>
-
-<file path=ppt/slides/slide6.xml><?xml version="1.0" encoding="utf-8"?>
-<p:sld xmlns:a="http://schemas.openxmlformats.org/drawingml/2006/main" xmlns:p="http://schemas.openxmlformats.org/presentationml/2006/main" xmlns:r="http://schemas.openxmlformats.org/officeDocument/2006/relationships">
-  <p:cSld>
-    <p:bg>
-      <p:bgPr>
-        <a:solidFill>
-          <a:srgbClr val="FFFFFF"/>
-        </a:solidFill>
-        <a:effectLst/>
-      </p:bgPr>
-    </p:bg>
-    <p:spTree>
-      <p:nvGrpSpPr>
-        <p:cNvPr id="1" name=""/>
-        <p:cNvGrpSpPr/>
-        <p:nvPr/>
-      </p:nvGrpSpPr>
-      <p:grpSpPr/>
-      <p:sp>
-        <p:nvSpPr>
-          <p:cNvPr id="2" name="TextBox 1"/>
-          <p:cNvSpPr txBox="1"/>
-          <p:nvPr/>
-        </p:nvSpPr>
-        <p:spPr>
-          <a:xfrm>
-            <a:off x="548640" y="320040"/>
-            <a:ext cx="11094415" cy="274320"/>
-          </a:xfrm>
-          <a:prstGeom prst="rect">
-            <a:avLst/>
-          </a:prstGeom>
-          <a:noFill/>
-        </p:spPr>
-        <p:txBody>
-          <a:bodyPr wrap="square" anchor="t" lIns="0" rIns="0" tIns="0" bIns="0"/>
-          <a:lstStyle/>
-          <a:p>
-            <a:pPr algn="l"/>
-            <a:r>
-              <a:rPr sz="1100" b="1" i="0">
-                <a:solidFill>
-                  <a:srgbClr val="54595D"/>
-                </a:solidFill>
-                <a:latin typeface="Calibri"/>
-              </a:rPr>
-              <a:t>DIGITAL SUPPORT  ·  Digital Support Content Area 2</a:t>
-            </a:r>
-          </a:p>
-        </p:txBody>
-      </p:sp>
-      <p:sp>
-        <p:nvSpPr>
-          <p:cNvPr id="3" name="TextBox 2"/>
-          <p:cNvSpPr txBox="1"/>
-          <p:nvPr/>
-        </p:nvSpPr>
-        <p:spPr>
-          <a:xfrm>
-            <a:off x="548640" y="566928"/>
-            <a:ext cx="11094415" cy="822960"/>
-          </a:xfrm>
-          <a:prstGeom prst="rect">
-            <a:avLst/>
-          </a:prstGeom>
-          <a:noFill/>
-        </p:spPr>
-        <p:txBody>
-          <a:bodyPr wrap="square" anchor="ctr" lIns="0" rIns="0" tIns="0" bIns="0"/>
-          <a:lstStyle/>
-          <a:p>
-            <a:pPr algn="l"/>
-            <a:r>
-              <a:rPr sz="3200" b="1" i="0">
-                <a:solidFill>
-                  <a:srgbClr val="03306E"/>
-                </a:solidFill>
-                <a:latin typeface="Cambria"/>
-              </a:rPr>
-              <a:t>Configuring a simple VPN</a:t>
-            </a:r>
-          </a:p>
-        </p:txBody>
-      </p:sp>
-      <p:sp>
-        <p:nvSpPr>
-          <p:cNvPr id="4" name="TextBox 3"/>
-          <p:cNvSpPr txBox="1"/>
-          <p:nvPr/>
-        </p:nvSpPr>
-        <p:spPr>
-          <a:xfrm>
-            <a:off x="548640" y="6446520"/>
-            <a:ext cx="8229600" cy="274320"/>
-          </a:xfrm>
-          <a:prstGeom prst="rect">
-            <a:avLst/>
-          </a:prstGeom>
-          <a:noFill/>
-        </p:spPr>
-        <p:txBody>
-          <a:bodyPr wrap="square" anchor="t" lIns="0" rIns="0" tIns="0" bIns="0"/>
-          <a:lstStyle/>
-          <a:p>
-            <a:pPr algn="l"/>
-            <a:r>
-              <a:rPr sz="1000" b="0" i="0">
-                <a:solidFill>
-                  <a:srgbClr val="54595D"/>
-                </a:solidFill>
-                <a:latin typeface="Calibri"/>
-              </a:rPr>
-              <a:t>Digital Support and Security T Level  ·  Domains, Email and Remote Access</a:t>
-            </a:r>
-          </a:p>
-        </p:txBody>
-      </p:sp>
-      <p:sp>
-        <p:nvSpPr>
-          <p:cNvPr id="5" name="TextBox 4"/>
-          <p:cNvSpPr txBox="1"/>
-          <p:nvPr/>
-        </p:nvSpPr>
-        <p:spPr>
-          <a:xfrm>
-            <a:off x="10728655" y="6446520"/>
-            <a:ext cx="914400" cy="274320"/>
-          </a:xfrm>
-          <a:prstGeom prst="rect">
-            <a:avLst/>
-          </a:prstGeom>
-          <a:noFill/>
-        </p:spPr>
-        <p:txBody>
-          <a:bodyPr wrap="square" anchor="t" lIns="0" rIns="0" tIns="0" bIns="0"/>
-          <a:lstStyle/>
-          <a:p>
-            <a:pPr algn="r"/>
-            <a:r>
-              <a:rPr sz="1000" b="0" i="0">
-                <a:solidFill>
-                  <a:srgbClr val="54595D"/>
-                </a:solidFill>
-                <a:latin typeface="Calibri"/>
-              </a:rPr>
-              <a:t>6</a:t>
-            </a:r>
-          </a:p>
-        </p:txBody>
-      </p:sp>
-      <p:sp>
-        <p:nvSpPr>
-          <p:cNvPr id="6" name="Rectangle 5"/>
-          <p:cNvSpPr/>
-          <p:nvPr/>
-        </p:nvSpPr>
-        <p:spPr>
-          <a:xfrm>
-            <a:off x="1603217" y="2656332"/>
-            <a:ext cx="8985260" cy="36576"/>
-          </a:xfrm>
-          <a:prstGeom prst="rect">
-            <a:avLst/>
-          </a:prstGeom>
-          <a:solidFill>
-            <a:srgbClr val="A9C8F0"/>
-          </a:solidFill>
-          <a:ln>
-            <a:noFill/>
-          </a:ln>
-          <a:effectLst/>
-        </p:spPr>
-        <p:style>
-          <a:lnRef idx="1">
-            <a:schemeClr val="accent1"/>
-          </a:lnRef>
-          <a:fillRef idx="3">
-            <a:schemeClr val="accent1"/>
-          </a:fillRef>
-          <a:effectRef idx="2">
-            <a:schemeClr val="accent1"/>
-          </a:effectRef>
-          <a:fontRef idx="minor">
-            <a:schemeClr val="lt1"/>
-          </a:fontRef>
-        </p:style>
-        <p:txBody>
-          <a:bodyPr rtlCol="0" anchor="ctr"/>
-          <a:lstStyle/>
-          <a:p/>
-        </p:txBody>
-      </p:sp>
-      <p:sp>
-        <p:nvSpPr>
-          <p:cNvPr id="7" name="Oval 6"/>
-          <p:cNvSpPr/>
-          <p:nvPr/>
-        </p:nvSpPr>
-        <p:spPr>
-          <a:xfrm>
-            <a:off x="1283177" y="2354580"/>
-            <a:ext cx="640080" cy="640080"/>
-          </a:xfrm>
-          <a:prstGeom prst="ellipse">
-            <a:avLst/>
-          </a:prstGeom>
-          <a:solidFill>
-            <a:srgbClr val="4EA1FF"/>
-          </a:solidFill>
-          <a:ln>
-            <a:noFill/>
-          </a:ln>
-          <a:effectLst/>
-        </p:spPr>
-        <p:style>
-          <a:lnRef idx="1">
-            <a:schemeClr val="accent1"/>
-          </a:lnRef>
-          <a:fillRef idx="3">
-            <a:schemeClr val="accent1"/>
-          </a:fillRef>
-          <a:effectRef idx="2">
-            <a:schemeClr val="accent1"/>
-          </a:effectRef>
-          <a:fontRef idx="minor">
-            <a:schemeClr val="lt1"/>
-          </a:fontRef>
-        </p:style>
-        <p:txBody>
-          <a:bodyPr rtlCol="0" anchor="ctr" lIns="0" rIns="0" tIns="0" bIns="0"/>
-          <a:lstStyle/>
-          <a:p>
-            <a:pPr algn="ctr"/>
-            <a:r>
-              <a:rPr sz="2000" b="1">
-                <a:solidFill>
-                  <a:srgbClr val="202122"/>
-                </a:solidFill>
-                <a:latin typeface="Calibri"/>
-              </a:rPr>
-              <a:t>1</a:t>
-            </a:r>
-          </a:p>
-        </p:txBody>
-      </p:sp>
-      <p:sp>
-        <p:nvSpPr>
-          <p:cNvPr id="8" name="TextBox 7"/>
-          <p:cNvSpPr txBox="1"/>
-          <p:nvPr/>
-        </p:nvSpPr>
-        <p:spPr>
-          <a:xfrm>
-            <a:off x="548640" y="3131820"/>
-            <a:ext cx="2109155" cy="731520"/>
-          </a:xfrm>
-          <a:prstGeom prst="rect">
-            <a:avLst/>
-          </a:prstGeom>
-          <a:noFill/>
-        </p:spPr>
-        <p:txBody>
-          <a:bodyPr wrap="square" anchor="t" lIns="0" rIns="0" tIns="0" bIns="0"/>
-          <a:lstStyle/>
-          <a:p>
-            <a:pPr algn="ctr"/>
-            <a:r>
-              <a:rPr sz="1700" b="1" i="0">
-                <a:solidFill>
-                  <a:srgbClr val="03306E"/>
-                </a:solidFill>
-                <a:latin typeface="Calibri"/>
-              </a:rPr>
-              <a:t>Enable</a:t>
-            </a:r>
-          </a:p>
-        </p:txBody>
-      </p:sp>
-      <p:sp>
-        <p:nvSpPr>
-          <p:cNvPr id="9" name="Rounded Rectangle 8"/>
-          <p:cNvSpPr/>
-          <p:nvPr/>
-        </p:nvSpPr>
-        <p:spPr>
-          <a:xfrm>
-            <a:off x="548640" y="3909060"/>
-            <a:ext cx="2109155" cy="1508760"/>
-          </a:xfrm>
-          <a:prstGeom prst="roundRect">
-            <a:avLst>
-              <a:gd name="adj" fmla="val 6000"/>
-            </a:avLst>
-          </a:prstGeom>
-          <a:solidFill>
-            <a:srgbClr val="EAF3FF"/>
-          </a:solidFill>
-          <a:ln>
-            <a:noFill/>
-          </a:ln>
-          <a:effectLst/>
-        </p:spPr>
-        <p:style>
-          <a:lnRef idx="1">
-            <a:schemeClr val="accent1"/>
-          </a:lnRef>
-          <a:fillRef idx="3">
-            <a:schemeClr val="accent1"/>
-          </a:fillRef>
-          <a:effectRef idx="2">
-            <a:schemeClr val="accent1"/>
-          </a:effectRef>
-          <a:fontRef idx="minor">
-            <a:schemeClr val="lt1"/>
-          </a:fontRef>
-        </p:style>
-        <p:txBody>
-          <a:bodyPr rtlCol="0" anchor="ctr"/>
-          <a:lstStyle/>
-          <a:p/>
-        </p:txBody>
-      </p:sp>
-      <p:sp>
-        <p:nvSpPr>
-          <p:cNvPr id="10" name="TextBox 9"/>
-          <p:cNvSpPr txBox="1"/>
-          <p:nvPr/>
-        </p:nvSpPr>
-        <p:spPr>
-          <a:xfrm>
-            <a:off x="685800" y="4046220"/>
-            <a:ext cx="1834835" cy="1234439"/>
-          </a:xfrm>
-          <a:prstGeom prst="rect">
-            <a:avLst/>
-          </a:prstGeom>
-          <a:noFill/>
-        </p:spPr>
-        <p:txBody>
-          <a:bodyPr wrap="square" anchor="t" lIns="0" rIns="0" tIns="0" bIns="0"/>
-          <a:lstStyle/>
-          <a:p>
-            <a:pPr algn="l"/>
-            <a:r>
-              <a:rPr sz="1800" b="0" i="0">
-                <a:solidFill>
-                  <a:srgbClr val="202122"/>
-                </a:solidFill>
-                <a:latin typeface="Calibri"/>
-              </a:rPr>
-              <a:t>Turn on the VPN service on the server.</a:t>
-            </a:r>
-          </a:p>
-        </p:txBody>
-      </p:sp>
-      <p:sp>
-        <p:nvSpPr>
-          <p:cNvPr id="11" name="Oval 10"/>
-          <p:cNvSpPr/>
-          <p:nvPr/>
-        </p:nvSpPr>
-        <p:spPr>
-          <a:xfrm>
-            <a:off x="3529492" y="2354580"/>
-            <a:ext cx="640080" cy="640080"/>
-          </a:xfrm>
-          <a:prstGeom prst="ellipse">
-            <a:avLst/>
-          </a:prstGeom>
-          <a:solidFill>
-            <a:srgbClr val="4EA1FF"/>
-          </a:solidFill>
-          <a:ln>
-            <a:noFill/>
-          </a:ln>
-          <a:effectLst/>
-        </p:spPr>
-        <p:style>
-          <a:lnRef idx="1">
-            <a:schemeClr val="accent1"/>
-          </a:lnRef>
-          <a:fillRef idx="3">
-            <a:schemeClr val="accent1"/>
-          </a:fillRef>
-          <a:effectRef idx="2">
-            <a:schemeClr val="accent1"/>
-          </a:effectRef>
-          <a:fontRef idx="minor">
-            <a:schemeClr val="lt1"/>
-          </a:fontRef>
-        </p:style>
-        <p:txBody>
-          <a:bodyPr rtlCol="0" anchor="ctr" lIns="0" rIns="0" tIns="0" bIns="0"/>
-          <a:lstStyle/>
-          <a:p>
-            <a:pPr algn="ctr"/>
-            <a:r>
-              <a:rPr sz="2000" b="1">
-                <a:solidFill>
-                  <a:srgbClr val="202122"/>
-                </a:solidFill>
-                <a:latin typeface="Calibri"/>
-              </a:rPr>
-              <a:t>2</a:t>
-            </a:r>
-          </a:p>
-        </p:txBody>
-      </p:sp>
-      <p:sp>
-        <p:nvSpPr>
-          <p:cNvPr id="12" name="TextBox 11"/>
-          <p:cNvSpPr txBox="1"/>
-          <p:nvPr/>
-        </p:nvSpPr>
-        <p:spPr>
-          <a:xfrm>
-            <a:off x="2794955" y="3131820"/>
-            <a:ext cx="2109155" cy="731520"/>
-          </a:xfrm>
-          <a:prstGeom prst="rect">
-            <a:avLst/>
-          </a:prstGeom>
-          <a:noFill/>
-        </p:spPr>
-        <p:txBody>
-          <a:bodyPr wrap="square" anchor="t" lIns="0" rIns="0" tIns="0" bIns="0"/>
-          <a:lstStyle/>
-          <a:p>
-            <a:pPr algn="ctr"/>
-            <a:r>
-              <a:rPr sz="1700" b="1" i="0">
-                <a:solidFill>
-                  <a:srgbClr val="03306E"/>
-                </a:solidFill>
-                <a:latin typeface="Calibri"/>
-              </a:rPr>
-              <a:t>Address</a:t>
-            </a:r>
-          </a:p>
-        </p:txBody>
-      </p:sp>
-      <p:sp>
-        <p:nvSpPr>
-          <p:cNvPr id="13" name="Rounded Rectangle 12"/>
-          <p:cNvSpPr/>
-          <p:nvPr/>
-        </p:nvSpPr>
-        <p:spPr>
-          <a:xfrm>
-            <a:off x="2794955" y="3909060"/>
-            <a:ext cx="2109155" cy="1508760"/>
-          </a:xfrm>
-          <a:prstGeom prst="roundRect">
-            <a:avLst>
-              <a:gd name="adj" fmla="val 6000"/>
-            </a:avLst>
-          </a:prstGeom>
-          <a:solidFill>
-            <a:srgbClr val="EAF3FF"/>
-          </a:solidFill>
-          <a:ln>
-            <a:noFill/>
-          </a:ln>
-          <a:effectLst/>
-        </p:spPr>
-        <p:style>
-          <a:lnRef idx="1">
-            <a:schemeClr val="accent1"/>
-          </a:lnRef>
-          <a:fillRef idx="3">
-            <a:schemeClr val="accent1"/>
-          </a:fillRef>
-          <a:effectRef idx="2">
-            <a:schemeClr val="accent1"/>
-          </a:effectRef>
-          <a:fontRef idx="minor">
-            <a:schemeClr val="lt1"/>
-          </a:fontRef>
-        </p:style>
-        <p:txBody>
-          <a:bodyPr rtlCol="0" anchor="ctr"/>
-          <a:lstStyle/>
-          <a:p/>
-        </p:txBody>
-      </p:sp>
-      <p:sp>
-        <p:nvSpPr>
-          <p:cNvPr id="14" name="TextBox 13"/>
-          <p:cNvSpPr txBox="1"/>
-          <p:nvPr/>
-        </p:nvSpPr>
-        <p:spPr>
-          <a:xfrm>
-            <a:off x="2932115" y="4046220"/>
-            <a:ext cx="1834835" cy="1234439"/>
-          </a:xfrm>
-          <a:prstGeom prst="rect">
-            <a:avLst/>
-          </a:prstGeom>
-          <a:noFill/>
-        </p:spPr>
-        <p:txBody>
-          <a:bodyPr wrap="square" anchor="t" lIns="0" rIns="0" tIns="0" bIns="0"/>
-          <a:lstStyle/>
-          <a:p>
-            <a:pPr algn="l"/>
-            <a:r>
-              <a:rPr sz="1800" b="0" i="0">
-                <a:solidFill>
-                  <a:srgbClr val="202122"/>
-                </a:solidFill>
-                <a:latin typeface="Calibri"/>
-              </a:rPr>
-              <a:t>Set IP and DNS for the VPN interface.</a:t>
-            </a:r>
-          </a:p>
-        </p:txBody>
-      </p:sp>
-      <p:sp>
-        <p:nvSpPr>
-          <p:cNvPr id="15" name="Oval 14"/>
-          <p:cNvSpPr/>
-          <p:nvPr/>
-        </p:nvSpPr>
-        <p:spPr>
-          <a:xfrm>
-            <a:off x="5775807" y="2354580"/>
-            <a:ext cx="640080" cy="640080"/>
-          </a:xfrm>
-          <a:prstGeom prst="ellipse">
-            <a:avLst/>
-          </a:prstGeom>
-          <a:solidFill>
-            <a:srgbClr val="4EA1FF"/>
-          </a:solidFill>
-          <a:ln>
-            <a:noFill/>
-          </a:ln>
-          <a:effectLst/>
-        </p:spPr>
-        <p:style>
-          <a:lnRef idx="1">
-            <a:schemeClr val="accent1"/>
-          </a:lnRef>
-          <a:fillRef idx="3">
-            <a:schemeClr val="accent1"/>
-          </a:fillRef>
-          <a:effectRef idx="2">
-            <a:schemeClr val="accent1"/>
-          </a:effectRef>
-          <a:fontRef idx="minor">
-            <a:schemeClr val="lt1"/>
-          </a:fontRef>
-        </p:style>
-        <p:txBody>
-          <a:bodyPr rtlCol="0" anchor="ctr" lIns="0" rIns="0" tIns="0" bIns="0"/>
-          <a:lstStyle/>
-          <a:p>
-            <a:pPr algn="ctr"/>
-            <a:r>
-              <a:rPr sz="2000" b="1">
-                <a:solidFill>
-                  <a:srgbClr val="202122"/>
-                </a:solidFill>
-                <a:latin typeface="Calibri"/>
-              </a:rPr>
-              <a:t>3</a:t>
-            </a:r>
-          </a:p>
-        </p:txBody>
-      </p:sp>
-      <p:sp>
-        <p:nvSpPr>
-          <p:cNvPr id="16" name="TextBox 15"/>
-          <p:cNvSpPr txBox="1"/>
-          <p:nvPr/>
-        </p:nvSpPr>
-        <p:spPr>
-          <a:xfrm>
-            <a:off x="5041270" y="3131820"/>
-            <a:ext cx="2109155" cy="731520"/>
-          </a:xfrm>
-          <a:prstGeom prst="rect">
-            <a:avLst/>
-          </a:prstGeom>
-          <a:noFill/>
-        </p:spPr>
-        <p:txBody>
-          <a:bodyPr wrap="square" anchor="t" lIns="0" rIns="0" tIns="0" bIns="0"/>
-          <a:lstStyle/>
-          <a:p>
-            <a:pPr algn="ctr"/>
-            <a:r>
-              <a:rPr sz="1700" b="1" i="0">
-                <a:solidFill>
-                  <a:srgbClr val="03306E"/>
-                </a:solidFill>
-                <a:latin typeface="Calibri"/>
-              </a:rPr>
-              <a:t>Access</a:t>
-            </a:r>
-          </a:p>
-        </p:txBody>
-      </p:sp>
-      <p:sp>
-        <p:nvSpPr>
-          <p:cNvPr id="17" name="Rounded Rectangle 16"/>
-          <p:cNvSpPr/>
-          <p:nvPr/>
-        </p:nvSpPr>
-        <p:spPr>
-          <a:xfrm>
-            <a:off x="5041270" y="3909060"/>
-            <a:ext cx="2109155" cy="1508760"/>
-          </a:xfrm>
-          <a:prstGeom prst="roundRect">
-            <a:avLst>
-              <a:gd name="adj" fmla="val 6000"/>
-            </a:avLst>
-          </a:prstGeom>
-          <a:solidFill>
-            <a:srgbClr val="EAF3FF"/>
-          </a:solidFill>
-          <a:ln>
-            <a:noFill/>
-          </a:ln>
-          <a:effectLst/>
-        </p:spPr>
-        <p:style>
-          <a:lnRef idx="1">
-            <a:schemeClr val="accent1"/>
-          </a:lnRef>
-          <a:fillRef idx="3">
-            <a:schemeClr val="accent1"/>
-          </a:fillRef>
-          <a:effectRef idx="2">
-            <a:schemeClr val="accent1"/>
-          </a:effectRef>
-          <a:fontRef idx="minor">
-            <a:schemeClr val="lt1"/>
-          </a:fontRef>
-        </p:style>
-        <p:txBody>
-          <a:bodyPr rtlCol="0" anchor="ctr"/>
-          <a:lstStyle/>
-          <a:p/>
-        </p:txBody>
-      </p:sp>
-      <p:sp>
-        <p:nvSpPr>
-          <p:cNvPr id="18" name="TextBox 17"/>
-          <p:cNvSpPr txBox="1"/>
-          <p:nvPr/>
-        </p:nvSpPr>
-        <p:spPr>
-          <a:xfrm>
-            <a:off x="5178430" y="4046220"/>
-            <a:ext cx="1834835" cy="1234439"/>
-          </a:xfrm>
-          <a:prstGeom prst="rect">
-            <a:avLst/>
-          </a:prstGeom>
-          <a:noFill/>
-        </p:spPr>
-        <p:txBody>
-          <a:bodyPr wrap="square" anchor="t" lIns="0" rIns="0" tIns="0" bIns="0"/>
-          <a:lstStyle/>
-          <a:p>
-            <a:pPr algn="l"/>
-            <a:r>
-              <a:rPr sz="1800" b="0" i="0">
-                <a:solidFill>
-                  <a:srgbClr val="202122"/>
-                </a:solidFill>
-                <a:latin typeface="Calibri"/>
-              </a:rPr>
-              <a:t>Manage authentication and permissions.</a:t>
-            </a:r>
-          </a:p>
-        </p:txBody>
-      </p:sp>
-      <p:sp>
-        <p:nvSpPr>
-          <p:cNvPr id="19" name="Oval 18"/>
-          <p:cNvSpPr/>
-          <p:nvPr/>
-        </p:nvSpPr>
-        <p:spPr>
-          <a:xfrm>
-            <a:off x="8022122" y="2354580"/>
-            <a:ext cx="640080" cy="640080"/>
-          </a:xfrm>
-          <a:prstGeom prst="ellipse">
-            <a:avLst/>
-          </a:prstGeom>
-          <a:solidFill>
-            <a:srgbClr val="4EA1FF"/>
-          </a:solidFill>
-          <a:ln>
-            <a:noFill/>
-          </a:ln>
-          <a:effectLst/>
-        </p:spPr>
-        <p:style>
-          <a:lnRef idx="1">
-            <a:schemeClr val="accent1"/>
-          </a:lnRef>
-          <a:fillRef idx="3">
-            <a:schemeClr val="accent1"/>
-          </a:fillRef>
-          <a:effectRef idx="2">
-            <a:schemeClr val="accent1"/>
-          </a:effectRef>
-          <a:fontRef idx="minor">
-            <a:schemeClr val="lt1"/>
-          </a:fontRef>
-        </p:style>
-        <p:txBody>
-          <a:bodyPr rtlCol="0" anchor="ctr" lIns="0" rIns="0" tIns="0" bIns="0"/>
-          <a:lstStyle/>
-          <a:p>
-            <a:pPr algn="ctr"/>
-            <a:r>
-              <a:rPr sz="2000" b="1">
-                <a:solidFill>
-                  <a:srgbClr val="202122"/>
-                </a:solidFill>
-                <a:latin typeface="Calibri"/>
-              </a:rPr>
-              <a:t>4</a:t>
-            </a:r>
-          </a:p>
-        </p:txBody>
-      </p:sp>
-      <p:sp>
-        <p:nvSpPr>
-          <p:cNvPr id="20" name="TextBox 19"/>
-          <p:cNvSpPr txBox="1"/>
-          <p:nvPr/>
-        </p:nvSpPr>
-        <p:spPr>
-          <a:xfrm>
-            <a:off x="7287585" y="3131820"/>
-            <a:ext cx="2109155" cy="731520"/>
-          </a:xfrm>
-          <a:prstGeom prst="rect">
-            <a:avLst/>
-          </a:prstGeom>
-          <a:noFill/>
-        </p:spPr>
-        <p:txBody>
-          <a:bodyPr wrap="square" anchor="t" lIns="0" rIns="0" tIns="0" bIns="0"/>
-          <a:lstStyle/>
-          <a:p>
-            <a:pPr algn="ctr"/>
-            <a:r>
-              <a:rPr sz="1700" b="1" i="0">
-                <a:solidFill>
-                  <a:srgbClr val="03306E"/>
-                </a:solidFill>
-                <a:latin typeface="Calibri"/>
-              </a:rPr>
-              <a:t>Client</a:t>
-            </a:r>
-          </a:p>
-        </p:txBody>
-      </p:sp>
-      <p:sp>
-        <p:nvSpPr>
-          <p:cNvPr id="21" name="Rounded Rectangle 20"/>
-          <p:cNvSpPr/>
-          <p:nvPr/>
-        </p:nvSpPr>
-        <p:spPr>
-          <a:xfrm>
-            <a:off x="7287585" y="3909060"/>
-            <a:ext cx="2109155" cy="1508760"/>
-          </a:xfrm>
-          <a:prstGeom prst="roundRect">
-            <a:avLst>
-              <a:gd name="adj" fmla="val 6000"/>
-            </a:avLst>
-          </a:prstGeom>
-          <a:solidFill>
-            <a:srgbClr val="EAF3FF"/>
-          </a:solidFill>
-          <a:ln>
-            <a:noFill/>
-          </a:ln>
-          <a:effectLst/>
-        </p:spPr>
-        <p:style>
-          <a:lnRef idx="1">
-            <a:schemeClr val="accent1"/>
-          </a:lnRef>
-          <a:fillRef idx="3">
-            <a:schemeClr val="accent1"/>
-          </a:fillRef>
-          <a:effectRef idx="2">
-            <a:schemeClr val="accent1"/>
-          </a:effectRef>
-          <a:fontRef idx="minor">
-            <a:schemeClr val="lt1"/>
-          </a:fontRef>
-        </p:style>
-        <p:txBody>
-          <a:bodyPr rtlCol="0" anchor="ctr"/>
-          <a:lstStyle/>
-          <a:p/>
-        </p:txBody>
-      </p:sp>
-      <p:sp>
-        <p:nvSpPr>
-          <p:cNvPr id="22" name="TextBox 21"/>
-          <p:cNvSpPr txBox="1"/>
-          <p:nvPr/>
-        </p:nvSpPr>
-        <p:spPr>
-          <a:xfrm>
-            <a:off x="7424745" y="4046220"/>
-            <a:ext cx="1834835" cy="1234439"/>
-          </a:xfrm>
-          <a:prstGeom prst="rect">
-            <a:avLst/>
-          </a:prstGeom>
-          <a:noFill/>
-        </p:spPr>
-        <p:txBody>
-          <a:bodyPr wrap="square" anchor="t" lIns="0" rIns="0" tIns="0" bIns="0"/>
-          <a:lstStyle/>
-          <a:p>
-            <a:pPr algn="l"/>
-            <a:r>
-              <a:rPr sz="1800" b="0" i="0">
-                <a:solidFill>
-                  <a:srgbClr val="202122"/>
-                </a:solidFill>
-                <a:latin typeface="Calibri"/>
-              </a:rPr>
-              <a:t>Create the connection to the server's IP or FQDN.</a:t>
-            </a:r>
-          </a:p>
-        </p:txBody>
-      </p:sp>
-      <p:sp>
-        <p:nvSpPr>
-          <p:cNvPr id="23" name="Oval 22"/>
-          <p:cNvSpPr/>
-          <p:nvPr/>
-        </p:nvSpPr>
-        <p:spPr>
-          <a:xfrm>
-            <a:off x="10268437" y="2354580"/>
-            <a:ext cx="640080" cy="640080"/>
-          </a:xfrm>
-          <a:prstGeom prst="ellipse">
-            <a:avLst/>
-          </a:prstGeom>
-          <a:solidFill>
-            <a:srgbClr val="4EA1FF"/>
-          </a:solidFill>
-          <a:ln>
-            <a:noFill/>
-          </a:ln>
-          <a:effectLst/>
-        </p:spPr>
-        <p:style>
-          <a:lnRef idx="1">
-            <a:schemeClr val="accent1"/>
-          </a:lnRef>
-          <a:fillRef idx="3">
-            <a:schemeClr val="accent1"/>
-          </a:fillRef>
-          <a:effectRef idx="2">
-            <a:schemeClr val="accent1"/>
-          </a:effectRef>
-          <a:fontRef idx="minor">
-            <a:schemeClr val="lt1"/>
-          </a:fontRef>
-        </p:style>
-        <p:txBody>
-          <a:bodyPr rtlCol="0" anchor="ctr" lIns="0" rIns="0" tIns="0" bIns="0"/>
-          <a:lstStyle/>
-          <a:p>
-            <a:pPr algn="ctr"/>
-            <a:r>
-              <a:rPr sz="2000" b="1">
-                <a:solidFill>
-                  <a:srgbClr val="202122"/>
-                </a:solidFill>
-                <a:latin typeface="Calibri"/>
-              </a:rPr>
-              <a:t>5</a:t>
-            </a:r>
-          </a:p>
-        </p:txBody>
-      </p:sp>
-      <p:sp>
-        <p:nvSpPr>
-          <p:cNvPr id="24" name="TextBox 23"/>
-          <p:cNvSpPr txBox="1"/>
-          <p:nvPr/>
-        </p:nvSpPr>
-        <p:spPr>
-          <a:xfrm>
-            <a:off x="9533900" y="3131820"/>
-            <a:ext cx="2109155" cy="731520"/>
-          </a:xfrm>
-          <a:prstGeom prst="rect">
-            <a:avLst/>
-          </a:prstGeom>
-          <a:noFill/>
-        </p:spPr>
-        <p:txBody>
-          <a:bodyPr wrap="square" anchor="t" lIns="0" rIns="0" tIns="0" bIns="0"/>
-          <a:lstStyle/>
-          <a:p>
-            <a:pPr algn="ctr"/>
-            <a:r>
-              <a:rPr sz="1700" b="1" i="0">
-                <a:solidFill>
-                  <a:srgbClr val="03306E"/>
-                </a:solidFill>
-                <a:latin typeface="Calibri"/>
-              </a:rPr>
-              <a:t>Test</a:t>
-            </a:r>
-          </a:p>
-        </p:txBody>
-      </p:sp>
-      <p:sp>
-        <p:nvSpPr>
-          <p:cNvPr id="25" name="Rounded Rectangle 24"/>
-          <p:cNvSpPr/>
-          <p:nvPr/>
-        </p:nvSpPr>
-        <p:spPr>
-          <a:xfrm>
-            <a:off x="9533900" y="3909060"/>
-            <a:ext cx="2109155" cy="1508760"/>
-          </a:xfrm>
-          <a:prstGeom prst="roundRect">
-            <a:avLst>
-              <a:gd name="adj" fmla="val 6000"/>
-            </a:avLst>
-          </a:prstGeom>
-          <a:solidFill>
-            <a:srgbClr val="EAF3FF"/>
-          </a:solidFill>
-          <a:ln>
-            <a:noFill/>
-          </a:ln>
-          <a:effectLst/>
-        </p:spPr>
-        <p:style>
-          <a:lnRef idx="1">
-            <a:schemeClr val="accent1"/>
-          </a:lnRef>
-          <a:fillRef idx="3">
-            <a:schemeClr val="accent1"/>
-          </a:fillRef>
-          <a:effectRef idx="2">
-            <a:schemeClr val="accent1"/>
-          </a:effectRef>
-          <a:fontRef idx="minor">
-            <a:schemeClr val="lt1"/>
-          </a:fontRef>
-        </p:style>
-        <p:txBody>
-          <a:bodyPr rtlCol="0" anchor="ctr"/>
-          <a:lstStyle/>
-          <a:p/>
-        </p:txBody>
-      </p:sp>
-      <p:sp>
-        <p:nvSpPr>
-          <p:cNvPr id="26" name="TextBox 25"/>
-          <p:cNvSpPr txBox="1"/>
-          <p:nvPr/>
-        </p:nvSpPr>
-        <p:spPr>
-          <a:xfrm>
-            <a:off x="9671060" y="4046220"/>
-            <a:ext cx="1834835" cy="1234439"/>
-          </a:xfrm>
-          <a:prstGeom prst="rect">
-            <a:avLst/>
-          </a:prstGeom>
-          <a:noFill/>
-        </p:spPr>
-        <p:txBody>
-          <a:bodyPr wrap="square" anchor="t" lIns="0" rIns="0" tIns="0" bIns="0"/>
-          <a:lstStyle/>
-          <a:p>
-            <a:pPr algn="l"/>
-            <a:r>
-              <a:rPr sz="1800" b="0" i="0">
-                <a:solidFill>
-                  <a:srgbClr val="202122"/>
-                </a:solidFill>
-                <a:latin typeface="Calibri"/>
-              </a:rPr>
-              <a:t>Connect and check access to resources.</a:t>
-            </a:r>
-          </a:p>
-        </p:txBody>
-      </p:sp>
-    </p:spTree>
-  </p:cSld>
-  <p:clrMapOvr>
-    <a:masterClrMapping/>
-  </p:clrMapOvr>
-</p:sld>
-</file>
-
-<file path=ppt/slides/slide7.xml><?xml version="1.0" encoding="utf-8"?>
-<p:sld xmlns:a="http://schemas.openxmlformats.org/drawingml/2006/main" xmlns:p="http://schemas.openxmlformats.org/presentationml/2006/main" xmlns:r="http://schemas.openxmlformats.org/officeDocument/2006/relationships">
-  <p:cSld>
-    <p:bg>
-      <p:bgPr>
-        <a:solidFill>
-          <a:srgbClr val="FFFFFF"/>
-        </a:solidFill>
-        <a:effectLst/>
-      </p:bgPr>
-    </p:bg>
-    <p:spTree>
-      <p:nvGrpSpPr>
-        <p:cNvPr id="1" name=""/>
-        <p:cNvGrpSpPr/>
-        <p:nvPr/>
-      </p:nvGrpSpPr>
-      <p:grpSpPr/>
-      <p:sp>
-        <p:nvSpPr>
-          <p:cNvPr id="2" name="TextBox 1"/>
-          <p:cNvSpPr txBox="1"/>
-          <p:nvPr/>
-        </p:nvSpPr>
-        <p:spPr>
-          <a:xfrm>
-            <a:off x="548640" y="320040"/>
-            <a:ext cx="11094415" cy="274320"/>
-          </a:xfrm>
-          <a:prstGeom prst="rect">
-            <a:avLst/>
-          </a:prstGeom>
-          <a:noFill/>
-        </p:spPr>
-        <p:txBody>
-          <a:bodyPr wrap="square" anchor="t" lIns="0" rIns="0" tIns="0" bIns="0"/>
-          <a:lstStyle/>
-          <a:p>
-            <a:pPr algn="l"/>
-            <a:r>
-              <a:rPr sz="1100" b="1" i="0">
-                <a:solidFill>
-                  <a:srgbClr val="54595D"/>
-                </a:solidFill>
-                <a:latin typeface="Calibri"/>
-              </a:rPr>
-              <a:t>DIGITAL SUPPORT  ·  Digital Support Content Area 2</a:t>
-            </a:r>
-          </a:p>
-        </p:txBody>
-      </p:sp>
-      <p:sp>
-        <p:nvSpPr>
-          <p:cNvPr id="3" name="TextBox 2"/>
-          <p:cNvSpPr txBox="1"/>
-          <p:nvPr/>
-        </p:nvSpPr>
-        <p:spPr>
-          <a:xfrm>
-            <a:off x="548640" y="566928"/>
-            <a:ext cx="11094415" cy="822960"/>
-          </a:xfrm>
-          <a:prstGeom prst="rect">
-            <a:avLst/>
-          </a:prstGeom>
-          <a:noFill/>
-        </p:spPr>
-        <p:txBody>
-          <a:bodyPr wrap="square" anchor="ctr" lIns="0" rIns="0" tIns="0" bIns="0"/>
-          <a:lstStyle/>
-          <a:p>
-            <a:pPr algn="l"/>
-            <a:r>
-              <a:rPr sz="3200" b="1" i="0">
-                <a:solidFill>
-                  <a:srgbClr val="03306E"/>
-                </a:solidFill>
-                <a:latin typeface="Cambria"/>
-              </a:rPr>
-              <a:t>Check your understanding</a:t>
-            </a:r>
-          </a:p>
-        </p:txBody>
-      </p:sp>
-      <p:sp>
-        <p:nvSpPr>
-          <p:cNvPr id="4" name="TextBox 3"/>
-          <p:cNvSpPr txBox="1"/>
-          <p:nvPr/>
-        </p:nvSpPr>
-        <p:spPr>
-          <a:xfrm>
-            <a:off x="548640" y="6446520"/>
-            <a:ext cx="8229600" cy="274320"/>
-          </a:xfrm>
-          <a:prstGeom prst="rect">
-            <a:avLst/>
-          </a:prstGeom>
-          <a:noFill/>
-        </p:spPr>
-        <p:txBody>
-          <a:bodyPr wrap="square" anchor="t" lIns="0" rIns="0" tIns="0" bIns="0"/>
-          <a:lstStyle/>
-          <a:p>
-            <a:pPr algn="l"/>
-            <a:r>
-              <a:rPr sz="1000" b="0" i="0">
-                <a:solidFill>
-                  <a:srgbClr val="54595D"/>
-                </a:solidFill>
-                <a:latin typeface="Calibri"/>
-              </a:rPr>
-              <a:t>Digital Support and Security T Level  ·  Domains, Email and Remote Access</a:t>
-            </a:r>
-          </a:p>
-        </p:txBody>
-      </p:sp>
-      <p:sp>
-        <p:nvSpPr>
-          <p:cNvPr id="5" name="TextBox 4"/>
-          <p:cNvSpPr txBox="1"/>
-          <p:nvPr/>
-        </p:nvSpPr>
-        <p:spPr>
-          <a:xfrm>
-            <a:off x="10728655" y="6446520"/>
-            <a:ext cx="914400" cy="274320"/>
-          </a:xfrm>
-          <a:prstGeom prst="rect">
-            <a:avLst/>
-          </a:prstGeom>
-          <a:noFill/>
-        </p:spPr>
-        <p:txBody>
-          <a:bodyPr wrap="square" anchor="t" lIns="0" rIns="0" tIns="0" bIns="0"/>
-          <a:lstStyle/>
-          <a:p>
-            <a:pPr algn="r"/>
-            <a:r>
-              <a:rPr sz="1000" b="0" i="0">
-                <a:solidFill>
-                  <a:srgbClr val="54595D"/>
-                </a:solidFill>
-                <a:latin typeface="Calibri"/>
-              </a:rPr>
-              <a:t>7</a:t>
-            </a:r>
-          </a:p>
-        </p:txBody>
-      </p:sp>
-      <p:sp>
-        <p:nvSpPr>
-          <p:cNvPr id="6" name="Oval 5"/>
-          <p:cNvSpPr/>
-          <p:nvPr/>
-        </p:nvSpPr>
-        <p:spPr>
-          <a:xfrm>
-            <a:off x="548640" y="1618488"/>
-            <a:ext cx="411480" cy="411480"/>
-          </a:xfrm>
-          <a:prstGeom prst="ellipse">
-            <a:avLst/>
-          </a:prstGeom>
-          <a:solidFill>
-            <a:srgbClr val="4EA1FF"/>
-          </a:solidFill>
-          <a:ln>
-            <a:noFill/>
-          </a:ln>
-          <a:effectLst/>
-        </p:spPr>
-        <p:style>
-          <a:lnRef idx="1">
-            <a:schemeClr val="accent1"/>
-          </a:lnRef>
-          <a:fillRef idx="3">
-            <a:schemeClr val="accent1"/>
-          </a:fillRef>
-          <a:effectRef idx="2">
-            <a:schemeClr val="accent1"/>
-          </a:effectRef>
-          <a:fontRef idx="minor">
-            <a:schemeClr val="lt1"/>
-          </a:fontRef>
-        </p:style>
-        <p:txBody>
-          <a:bodyPr rtlCol="0" anchor="ctr" lIns="0" rIns="0" tIns="0" bIns="0"/>
-          <a:lstStyle/>
-          <a:p>
-            <a:pPr algn="ctr"/>
-            <a:r>
-              <a:rPr sz="1400" b="1">
-                <a:solidFill>
-                  <a:srgbClr val="202122"/>
-                </a:solidFill>
-                <a:latin typeface="Calibri"/>
-              </a:rPr>
-              <a:t>1</a:t>
-            </a:r>
-          </a:p>
-        </p:txBody>
-      </p:sp>
-      <p:sp>
-        <p:nvSpPr>
-          <p:cNvPr id="7" name="TextBox 6"/>
-          <p:cNvSpPr txBox="1"/>
-          <p:nvPr/>
-        </p:nvSpPr>
-        <p:spPr>
-          <a:xfrm>
-            <a:off x="1234440" y="1600200"/>
-            <a:ext cx="10408615" cy="791870"/>
-          </a:xfrm>
-          <a:prstGeom prst="rect">
-            <a:avLst/>
-          </a:prstGeom>
-          <a:noFill/>
-        </p:spPr>
-        <p:txBody>
-          <a:bodyPr wrap="square" anchor="t" lIns="0" rIns="0" tIns="0" bIns="0"/>
-          <a:lstStyle/>
-          <a:p>
-            <a:pPr algn="l"/>
-            <a:r>
-              <a:rPr sz="2200" b="0" i="0">
-                <a:solidFill>
-                  <a:srgbClr val="202122"/>
-                </a:solidFill>
-                <a:latin typeface="Calibri"/>
-              </a:rPr>
-              <a:t>Which protocol keeps mail on the server?</a:t>
-            </a:r>
-          </a:p>
-        </p:txBody>
-      </p:sp>
-      <p:sp>
-        <p:nvSpPr>
-          <p:cNvPr id="8" name="Oval 7"/>
-          <p:cNvSpPr/>
-          <p:nvPr/>
-        </p:nvSpPr>
-        <p:spPr>
-          <a:xfrm>
-            <a:off x="548640" y="2574950"/>
-            <a:ext cx="411480" cy="411480"/>
-          </a:xfrm>
-          <a:prstGeom prst="ellipse">
-            <a:avLst/>
-          </a:prstGeom>
-          <a:solidFill>
-            <a:srgbClr val="4EA1FF"/>
-          </a:solidFill>
-          <a:ln>
-            <a:noFill/>
-          </a:ln>
-          <a:effectLst/>
-        </p:spPr>
-        <p:style>
-          <a:lnRef idx="1">
-            <a:schemeClr val="accent1"/>
-          </a:lnRef>
-          <a:fillRef idx="3">
-            <a:schemeClr val="accent1"/>
-          </a:fillRef>
-          <a:effectRef idx="2">
-            <a:schemeClr val="accent1"/>
-          </a:effectRef>
-          <a:fontRef idx="minor">
-            <a:schemeClr val="lt1"/>
-          </a:fontRef>
-        </p:style>
-        <p:txBody>
-          <a:bodyPr rtlCol="0" anchor="ctr" lIns="0" rIns="0" tIns="0" bIns="0"/>
-          <a:lstStyle/>
-          <a:p>
-            <a:pPr algn="ctr"/>
-            <a:r>
-              <a:rPr sz="1400" b="1">
-                <a:solidFill>
-                  <a:srgbClr val="202122"/>
-                </a:solidFill>
-                <a:latin typeface="Calibri"/>
-              </a:rPr>
-              <a:t>2</a:t>
-            </a:r>
-          </a:p>
-        </p:txBody>
-      </p:sp>
-      <p:sp>
-        <p:nvSpPr>
-          <p:cNvPr id="9" name="TextBox 8"/>
-          <p:cNvSpPr txBox="1"/>
-          <p:nvPr/>
-        </p:nvSpPr>
-        <p:spPr>
-          <a:xfrm>
-            <a:off x="1234440" y="2556662"/>
-            <a:ext cx="10408615" cy="791870"/>
-          </a:xfrm>
-          <a:prstGeom prst="rect">
-            <a:avLst/>
-          </a:prstGeom>
-          <a:noFill/>
-        </p:spPr>
-        <p:txBody>
-          <a:bodyPr wrap="square" anchor="t" lIns="0" rIns="0" tIns="0" bIns="0"/>
-          <a:lstStyle/>
-          <a:p>
-            <a:pPr algn="l"/>
-            <a:r>
-              <a:rPr sz="2200" b="0" i="0">
-                <a:solidFill>
-                  <a:srgbClr val="202122"/>
-                </a:solidFill>
-                <a:latin typeface="Calibri"/>
-              </a:rPr>
-              <a:t>Which protocol sends email?</a:t>
-            </a:r>
-          </a:p>
-        </p:txBody>
-      </p:sp>
-      <p:sp>
-        <p:nvSpPr>
-          <p:cNvPr id="10" name="Oval 9"/>
-          <p:cNvSpPr/>
-          <p:nvPr/>
-        </p:nvSpPr>
-        <p:spPr>
-          <a:xfrm>
-            <a:off x="548640" y="3531412"/>
-            <a:ext cx="411480" cy="411480"/>
-          </a:xfrm>
-          <a:prstGeom prst="ellipse">
-            <a:avLst/>
-          </a:prstGeom>
-          <a:solidFill>
-            <a:srgbClr val="4EA1FF"/>
-          </a:solidFill>
-          <a:ln>
-            <a:noFill/>
-          </a:ln>
-          <a:effectLst/>
-        </p:spPr>
-        <p:style>
-          <a:lnRef idx="1">
-            <a:schemeClr val="accent1"/>
-          </a:lnRef>
-          <a:fillRef idx="3">
-            <a:schemeClr val="accent1"/>
-          </a:fillRef>
-          <a:effectRef idx="2">
-            <a:schemeClr val="accent1"/>
-          </a:effectRef>
-          <a:fontRef idx="minor">
-            <a:schemeClr val="lt1"/>
-          </a:fontRef>
-        </p:style>
-        <p:txBody>
-          <a:bodyPr rtlCol="0" anchor="ctr" lIns="0" rIns="0" tIns="0" bIns="0"/>
-          <a:lstStyle/>
-          <a:p>
-            <a:pPr algn="ctr"/>
-            <a:r>
-              <a:rPr sz="1400" b="1">
-                <a:solidFill>
-                  <a:srgbClr val="202122"/>
-                </a:solidFill>
-                <a:latin typeface="Calibri"/>
-              </a:rPr>
-              <a:t>3</a:t>
-            </a:r>
-          </a:p>
-        </p:txBody>
-      </p:sp>
-      <p:sp>
-        <p:nvSpPr>
-          <p:cNvPr id="11" name="TextBox 10"/>
-          <p:cNvSpPr txBox="1"/>
-          <p:nvPr/>
-        </p:nvSpPr>
-        <p:spPr>
-          <a:xfrm>
-            <a:off x="1234440" y="3513124"/>
-            <a:ext cx="10408615" cy="791870"/>
-          </a:xfrm>
-          <a:prstGeom prst="rect">
-            <a:avLst/>
-          </a:prstGeom>
-          <a:noFill/>
-        </p:spPr>
-        <p:txBody>
-          <a:bodyPr wrap="square" anchor="t" lIns="0" rIns="0" tIns="0" bIns="0"/>
-          <a:lstStyle/>
-          <a:p>
-            <a:pPr algn="l"/>
-            <a:r>
-              <a:rPr sz="2200" b="0" i="0">
-                <a:solidFill>
-                  <a:srgbClr val="202122"/>
-                </a:solidFill>
-                <a:latin typeface="Calibri"/>
-              </a:rPr>
-              <a:t>What is an MX record?</a:t>
-            </a:r>
-          </a:p>
-        </p:txBody>
-      </p:sp>
-      <p:sp>
-        <p:nvSpPr>
-          <p:cNvPr id="12" name="Oval 11"/>
-          <p:cNvSpPr/>
-          <p:nvPr/>
-        </p:nvSpPr>
-        <p:spPr>
-          <a:xfrm>
-            <a:off x="548640" y="4487875"/>
-            <a:ext cx="411480" cy="411480"/>
-          </a:xfrm>
-          <a:prstGeom prst="ellipse">
-            <a:avLst/>
-          </a:prstGeom>
-          <a:solidFill>
-            <a:srgbClr val="4EA1FF"/>
-          </a:solidFill>
-          <a:ln>
-            <a:noFill/>
-          </a:ln>
-          <a:effectLst/>
-        </p:spPr>
-        <p:style>
-          <a:lnRef idx="1">
-            <a:schemeClr val="accent1"/>
-          </a:lnRef>
-          <a:fillRef idx="3">
-            <a:schemeClr val="accent1"/>
-          </a:fillRef>
-          <a:effectRef idx="2">
-            <a:schemeClr val="accent1"/>
-          </a:effectRef>
-          <a:fontRef idx="minor">
-            <a:schemeClr val="lt1"/>
-          </a:fontRef>
-        </p:style>
-        <p:txBody>
-          <a:bodyPr rtlCol="0" anchor="ctr" lIns="0" rIns="0" tIns="0" bIns="0"/>
-          <a:lstStyle/>
-          <a:p>
-            <a:pPr algn="ctr"/>
-            <a:r>
-              <a:rPr sz="1400" b="1">
-                <a:solidFill>
-                  <a:srgbClr val="202122"/>
-                </a:solidFill>
-                <a:latin typeface="Calibri"/>
-              </a:rPr>
-              <a:t>4</a:t>
-            </a:r>
-          </a:p>
-        </p:txBody>
-      </p:sp>
-      <p:sp>
-        <p:nvSpPr>
-          <p:cNvPr id="13" name="TextBox 12"/>
-          <p:cNvSpPr txBox="1"/>
-          <p:nvPr/>
-        </p:nvSpPr>
-        <p:spPr>
-          <a:xfrm>
-            <a:off x="1234440" y="4469587"/>
-            <a:ext cx="10408615" cy="791870"/>
-          </a:xfrm>
-          <a:prstGeom prst="rect">
-            <a:avLst/>
-          </a:prstGeom>
-          <a:noFill/>
-        </p:spPr>
-        <p:txBody>
-          <a:bodyPr wrap="square" anchor="t" lIns="0" rIns="0" tIns="0" bIns="0"/>
-          <a:lstStyle/>
-          <a:p>
-            <a:pPr algn="l"/>
-            <a:r>
-              <a:rPr sz="2200" b="0" i="0">
-                <a:solidFill>
-                  <a:srgbClr val="202122"/>
-                </a:solidFill>
-                <a:latin typeface="Calibri"/>
-              </a:rPr>
-              <a:t>What two things does a VPN do for privacy?</a:t>
-            </a:r>
-          </a:p>
-        </p:txBody>
-      </p:sp>
-      <p:sp>
-        <p:nvSpPr>
-          <p:cNvPr id="14" name="Oval 13"/>
-          <p:cNvSpPr/>
-          <p:nvPr/>
-        </p:nvSpPr>
-        <p:spPr>
-          <a:xfrm>
-            <a:off x="548640" y="5444337"/>
-            <a:ext cx="411480" cy="411480"/>
-          </a:xfrm>
-          <a:prstGeom prst="ellipse">
-            <a:avLst/>
-          </a:prstGeom>
-          <a:solidFill>
-            <a:srgbClr val="4EA1FF"/>
-          </a:solidFill>
-          <a:ln>
-            <a:noFill/>
-          </a:ln>
-          <a:effectLst/>
-        </p:spPr>
-        <p:style>
-          <a:lnRef idx="1">
-            <a:schemeClr val="accent1"/>
-          </a:lnRef>
-          <a:fillRef idx="3">
-            <a:schemeClr val="accent1"/>
-          </a:fillRef>
-          <a:effectRef idx="2">
-            <a:schemeClr val="accent1"/>
-          </a:effectRef>
-          <a:fontRef idx="minor">
-            <a:schemeClr val="lt1"/>
-          </a:fontRef>
-        </p:style>
-        <p:txBody>
-          <a:bodyPr rtlCol="0" anchor="ctr" lIns="0" rIns="0" tIns="0" bIns="0"/>
-          <a:lstStyle/>
-          <a:p>
-            <a:pPr algn="ctr"/>
-            <a:r>
-              <a:rPr sz="1400" b="1">
-                <a:solidFill>
-                  <a:srgbClr val="202122"/>
-                </a:solidFill>
-                <a:latin typeface="Calibri"/>
-              </a:rPr>
-              <a:t>5</a:t>
-            </a:r>
-          </a:p>
-        </p:txBody>
-      </p:sp>
-      <p:sp>
-        <p:nvSpPr>
-          <p:cNvPr id="15" name="TextBox 14"/>
-          <p:cNvSpPr txBox="1"/>
-          <p:nvPr/>
-        </p:nvSpPr>
-        <p:spPr>
-          <a:xfrm>
-            <a:off x="1234440" y="5426049"/>
-            <a:ext cx="10408615" cy="791870"/>
-          </a:xfrm>
-          <a:prstGeom prst="rect">
-            <a:avLst/>
-          </a:prstGeom>
-          <a:noFill/>
-        </p:spPr>
-        <p:txBody>
-          <a:bodyPr wrap="square" anchor="t" lIns="0" rIns="0" tIns="0" bIns="0"/>
-          <a:lstStyle/>
-          <a:p>
-            <a:pPr algn="l"/>
-            <a:r>
-              <a:rPr sz="2200" b="0" i="0">
-                <a:solidFill>
-                  <a:srgbClr val="202122"/>
-                </a:solidFill>
-                <a:latin typeface="Calibri"/>
-              </a:rPr>
-              <a:t>What does a certificate authority issue?</a:t>
-            </a:r>
-          </a:p>
-        </p:txBody>
-      </p:sp>
-    </p:spTree>
-  </p:cSld>
-  <p:clrMapOvr>
-    <a:masterClrMapping/>
-  </p:clrMapOvr>
-</p:sld>
-</file>
-
 <file path=ppt/slides/slide8.xml><?xml version="1.0" encoding="utf-8"?>
 <p:sld xmlns:a="http://schemas.openxmlformats.org/drawingml/2006/main" xmlns:p="http://schemas.openxmlformats.org/presentationml/2006/main" xmlns:r="http://schemas.openxmlformats.org/officeDocument/2006/relationships">
   <p:cSld>
@@ -8509,7 +11902,7 @@
                 </a:solidFill>
                 <a:latin typeface="Cambria"/>
               </a:rPr>
-              <a:t>Answers</a:t>
+              <a:t>Quick check: Email protocols</a:t>
             </a:r>
           </a:p>
         </p:txBody>
@@ -8588,8 +11981,8 @@
         </p:nvSpPr>
         <p:spPr>
           <a:xfrm>
-            <a:off x="548640" y="1618488"/>
-            <a:ext cx="411480" cy="411480"/>
+            <a:off x="548640" y="1691640"/>
+            <a:ext cx="502920" cy="502920"/>
           </a:xfrm>
           <a:prstGeom prst="ellipse">
             <a:avLst/>
@@ -8622,7 +12015,7 @@
           <a:p>
             <a:pPr algn="ctr"/>
             <a:r>
-              <a:rPr sz="1400" b="1">
+              <a:rPr sz="1600" b="1">
                 <a:solidFill>
                   <a:srgbClr val="202122"/>
                 </a:solidFill>
@@ -8641,8 +12034,8 @@
         </p:nvSpPr>
         <p:spPr>
           <a:xfrm>
-            <a:off x="1234440" y="1600200"/>
-            <a:ext cx="10408615" cy="791870"/>
+            <a:off x="1371600" y="1645920"/>
+            <a:ext cx="10271455" cy="1188720"/>
           </a:xfrm>
           <a:prstGeom prst="rect">
             <a:avLst/>
@@ -8655,24 +12048,13 @@
           <a:p>
             <a:pPr algn="l"/>
             <a:r>
-              <a:rPr sz="1800" b="0" i="0">
-                <a:solidFill>
-                  <a:srgbClr val="54595D"/>
-                </a:solidFill>
-                <a:latin typeface="Calibri"/>
-              </a:rPr>
-              <a:t>Which protocol keeps mail on the server?</a:t>
-            </a:r>
-          </a:p>
-          <a:p>
-            <a:r>
-              <a:rPr sz="1800" b="1">
-                <a:solidFill>
-                  <a:srgbClr val="03306E"/>
-                </a:solidFill>
-                <a:latin typeface="Calibri"/>
-              </a:rPr>
-              <a:t>IMAP.</a:t>
+              <a:rPr sz="2400" b="0" i="0">
+                <a:solidFill>
+                  <a:srgbClr val="202122"/>
+                </a:solidFill>
+                <a:latin typeface="Calibri"/>
+              </a:rPr>
+              <a:t>Which protocol sends email?</a:t>
             </a:r>
           </a:p>
         </p:txBody>
@@ -8685,8 +12067,8 @@
         </p:nvSpPr>
         <p:spPr>
           <a:xfrm>
-            <a:off x="548640" y="2574950"/>
-            <a:ext cx="411480" cy="411480"/>
+            <a:off x="548640" y="3108960"/>
+            <a:ext cx="502920" cy="502920"/>
           </a:xfrm>
           <a:prstGeom prst="ellipse">
             <a:avLst/>
@@ -8719,7 +12101,7 @@
           <a:p>
             <a:pPr algn="ctr"/>
             <a:r>
-              <a:rPr sz="1400" b="1">
+              <a:rPr sz="1600" b="1">
                 <a:solidFill>
                   <a:srgbClr val="202122"/>
                 </a:solidFill>
@@ -8738,8 +12120,8 @@
         </p:nvSpPr>
         <p:spPr>
           <a:xfrm>
-            <a:off x="1234440" y="2556662"/>
-            <a:ext cx="10408615" cy="791870"/>
+            <a:off x="1371600" y="3063240"/>
+            <a:ext cx="10271455" cy="1188720"/>
           </a:xfrm>
           <a:prstGeom prst="rect">
             <a:avLst/>
@@ -8752,24 +12134,13 @@
           <a:p>
             <a:pPr algn="l"/>
             <a:r>
-              <a:rPr sz="1800" b="0" i="0">
-                <a:solidFill>
-                  <a:srgbClr val="54595D"/>
-                </a:solidFill>
-                <a:latin typeface="Calibri"/>
-              </a:rPr>
-              <a:t>Which protocol sends email?</a:t>
-            </a:r>
-          </a:p>
-          <a:p>
-            <a:r>
-              <a:rPr sz="1800" b="1">
-                <a:solidFill>
-                  <a:srgbClr val="03306E"/>
-                </a:solidFill>
-                <a:latin typeface="Calibri"/>
-              </a:rPr>
-              <a:t>SMTP.</a:t>
+              <a:rPr sz="2400" b="0" i="0">
+                <a:solidFill>
+                  <a:srgbClr val="202122"/>
+                </a:solidFill>
+                <a:latin typeface="Calibri"/>
+              </a:rPr>
+              <a:t>Why use IMAP for several devices?</a:t>
             </a:r>
           </a:p>
         </p:txBody>
@@ -8782,8 +12153,8 @@
         </p:nvSpPr>
         <p:spPr>
           <a:xfrm>
-            <a:off x="548640" y="3531412"/>
-            <a:ext cx="411480" cy="411480"/>
+            <a:off x="548640" y="4526280"/>
+            <a:ext cx="502920" cy="502920"/>
           </a:xfrm>
           <a:prstGeom prst="ellipse">
             <a:avLst/>
@@ -8816,7 +12187,7 @@
           <a:p>
             <a:pPr algn="ctr"/>
             <a:r>
-              <a:rPr sz="1400" b="1">
+              <a:rPr sz="1600" b="1">
                 <a:solidFill>
                   <a:srgbClr val="202122"/>
                 </a:solidFill>
@@ -8835,8 +12206,8 @@
         </p:nvSpPr>
         <p:spPr>
           <a:xfrm>
-            <a:off x="1234440" y="3513124"/>
-            <a:ext cx="10408615" cy="791870"/>
+            <a:off x="1371600" y="4480560"/>
+            <a:ext cx="10271455" cy="1188720"/>
           </a:xfrm>
           <a:prstGeom prst="rect">
             <a:avLst/>
@@ -8849,218 +12220,46 @@
           <a:p>
             <a:pPr algn="l"/>
             <a:r>
-              <a:rPr sz="1800" b="0" i="0">
+              <a:rPr sz="2400" b="0" i="0">
+                <a:solidFill>
+                  <a:srgbClr val="202122"/>
+                </a:solidFill>
+                <a:latin typeface="Calibri"/>
+              </a:rPr>
+              <a:t>What is an MX record?</a:t>
+            </a:r>
+          </a:p>
+        </p:txBody>
+      </p:sp>
+      <p:sp>
+        <p:nvSpPr>
+          <p:cNvPr id="12" name="TextBox 11"/>
+          <p:cNvSpPr txBox="1"/>
+          <p:nvPr/>
+        </p:nvSpPr>
+        <p:spPr>
+          <a:xfrm>
+            <a:off x="548640" y="5852160"/>
+            <a:ext cx="11094415" cy="365760"/>
+          </a:xfrm>
+          <a:prstGeom prst="rect">
+            <a:avLst/>
+          </a:prstGeom>
+          <a:noFill/>
+        </p:spPr>
+        <p:txBody>
+          <a:bodyPr wrap="square" anchor="t" lIns="0" rIns="0" tIns="0" bIns="0"/>
+          <a:lstStyle/>
+          <a:p>
+            <a:pPr algn="l"/>
+            <a:r>
+              <a:rPr sz="1300" b="0" i="1">
                 <a:solidFill>
                   <a:srgbClr val="54595D"/>
                 </a:solidFill>
                 <a:latin typeface="Calibri"/>
               </a:rPr>
-              <a:t>What is an MX record?</a:t>
-            </a:r>
-          </a:p>
-          <a:p>
-            <a:r>
-              <a:rPr sz="1800" b="1">
-                <a:solidFill>
-                  <a:srgbClr val="03306E"/>
-                </a:solidFill>
-                <a:latin typeface="Calibri"/>
-              </a:rPr>
-              <a:t>A DNS record that says which server receives mail for a domain.</a:t>
-            </a:r>
-          </a:p>
-        </p:txBody>
-      </p:sp>
-      <p:sp>
-        <p:nvSpPr>
-          <p:cNvPr id="12" name="Oval 11"/>
-          <p:cNvSpPr/>
-          <p:nvPr/>
-        </p:nvSpPr>
-        <p:spPr>
-          <a:xfrm>
-            <a:off x="548640" y="4487875"/>
-            <a:ext cx="411480" cy="411480"/>
-          </a:xfrm>
-          <a:prstGeom prst="ellipse">
-            <a:avLst/>
-          </a:prstGeom>
-          <a:solidFill>
-            <a:srgbClr val="4EA1FF"/>
-          </a:solidFill>
-          <a:ln>
-            <a:noFill/>
-          </a:ln>
-          <a:effectLst/>
-        </p:spPr>
-        <p:style>
-          <a:lnRef idx="1">
-            <a:schemeClr val="accent1"/>
-          </a:lnRef>
-          <a:fillRef idx="3">
-            <a:schemeClr val="accent1"/>
-          </a:fillRef>
-          <a:effectRef idx="2">
-            <a:schemeClr val="accent1"/>
-          </a:effectRef>
-          <a:fontRef idx="minor">
-            <a:schemeClr val="lt1"/>
-          </a:fontRef>
-        </p:style>
-        <p:txBody>
-          <a:bodyPr rtlCol="0" anchor="ctr" lIns="0" rIns="0" tIns="0" bIns="0"/>
-          <a:lstStyle/>
-          <a:p>
-            <a:pPr algn="ctr"/>
-            <a:r>
-              <a:rPr sz="1400" b="1">
-                <a:solidFill>
-                  <a:srgbClr val="202122"/>
-                </a:solidFill>
-                <a:latin typeface="Calibri"/>
-              </a:rPr>
-              <a:t>4</a:t>
-            </a:r>
-          </a:p>
-        </p:txBody>
-      </p:sp>
-      <p:sp>
-        <p:nvSpPr>
-          <p:cNvPr id="13" name="TextBox 12"/>
-          <p:cNvSpPr txBox="1"/>
-          <p:nvPr/>
-        </p:nvSpPr>
-        <p:spPr>
-          <a:xfrm>
-            <a:off x="1234440" y="4469587"/>
-            <a:ext cx="10408615" cy="791870"/>
-          </a:xfrm>
-          <a:prstGeom prst="rect">
-            <a:avLst/>
-          </a:prstGeom>
-          <a:noFill/>
-        </p:spPr>
-        <p:txBody>
-          <a:bodyPr wrap="square" anchor="t" lIns="0" rIns="0" tIns="0" bIns="0"/>
-          <a:lstStyle/>
-          <a:p>
-            <a:pPr algn="l"/>
-            <a:r>
-              <a:rPr sz="1800" b="0" i="0">
-                <a:solidFill>
-                  <a:srgbClr val="54595D"/>
-                </a:solidFill>
-                <a:latin typeface="Calibri"/>
-              </a:rPr>
-              <a:t>What two things does a VPN do for privacy?</a:t>
-            </a:r>
-          </a:p>
-          <a:p>
-            <a:r>
-              <a:rPr sz="1800" b="1">
-                <a:solidFill>
-                  <a:srgbClr val="03306E"/>
-                </a:solidFill>
-                <a:latin typeface="Calibri"/>
-              </a:rPr>
-              <a:t>Encrypts traffic and masks the client's IP address.</a:t>
-            </a:r>
-          </a:p>
-        </p:txBody>
-      </p:sp>
-      <p:sp>
-        <p:nvSpPr>
-          <p:cNvPr id="14" name="Oval 13"/>
-          <p:cNvSpPr/>
-          <p:nvPr/>
-        </p:nvSpPr>
-        <p:spPr>
-          <a:xfrm>
-            <a:off x="548640" y="5444337"/>
-            <a:ext cx="411480" cy="411480"/>
-          </a:xfrm>
-          <a:prstGeom prst="ellipse">
-            <a:avLst/>
-          </a:prstGeom>
-          <a:solidFill>
-            <a:srgbClr val="4EA1FF"/>
-          </a:solidFill>
-          <a:ln>
-            <a:noFill/>
-          </a:ln>
-          <a:effectLst/>
-        </p:spPr>
-        <p:style>
-          <a:lnRef idx="1">
-            <a:schemeClr val="accent1"/>
-          </a:lnRef>
-          <a:fillRef idx="3">
-            <a:schemeClr val="accent1"/>
-          </a:fillRef>
-          <a:effectRef idx="2">
-            <a:schemeClr val="accent1"/>
-          </a:effectRef>
-          <a:fontRef idx="minor">
-            <a:schemeClr val="lt1"/>
-          </a:fontRef>
-        </p:style>
-        <p:txBody>
-          <a:bodyPr rtlCol="0" anchor="ctr" lIns="0" rIns="0" tIns="0" bIns="0"/>
-          <a:lstStyle/>
-          <a:p>
-            <a:pPr algn="ctr"/>
-            <a:r>
-              <a:rPr sz="1400" b="1">
-                <a:solidFill>
-                  <a:srgbClr val="202122"/>
-                </a:solidFill>
-                <a:latin typeface="Calibri"/>
-              </a:rPr>
-              <a:t>5</a:t>
-            </a:r>
-          </a:p>
-        </p:txBody>
-      </p:sp>
-      <p:sp>
-        <p:nvSpPr>
-          <p:cNvPr id="15" name="TextBox 14"/>
-          <p:cNvSpPr txBox="1"/>
-          <p:nvPr/>
-        </p:nvSpPr>
-        <p:spPr>
-          <a:xfrm>
-            <a:off x="1234440" y="5426049"/>
-            <a:ext cx="10408615" cy="791870"/>
-          </a:xfrm>
-          <a:prstGeom prst="rect">
-            <a:avLst/>
-          </a:prstGeom>
-          <a:noFill/>
-        </p:spPr>
-        <p:txBody>
-          <a:bodyPr wrap="square" anchor="t" lIns="0" rIns="0" tIns="0" bIns="0"/>
-          <a:lstStyle/>
-          <a:p>
-            <a:pPr algn="l"/>
-            <a:r>
-              <a:rPr sz="1800" b="0" i="0">
-                <a:solidFill>
-                  <a:srgbClr val="54595D"/>
-                </a:solidFill>
-                <a:latin typeface="Calibri"/>
-              </a:rPr>
-              <a:t>What does a certificate authority issue?</a:t>
-            </a:r>
-          </a:p>
-          <a:p>
-            <a:r>
-              <a:rPr sz="1800" b="1">
-                <a:solidFill>
-                  <a:srgbClr val="03306E"/>
-                </a:solidFill>
-                <a:latin typeface="Calibri"/>
-              </a:rPr>
-              <a:t>Digital certificates.</a:t>
+              <a:t>Answer on mini whiteboards or in your book. Answers are in the speaker notes.</a:t>
             </a:r>
           </a:p>
         </p:txBody>
@@ -9152,7 +12351,7 @@
                 </a:solidFill>
                 <a:latin typeface="Cambria"/>
               </a:rPr>
-              <a:t>Activity: Set up a mail client</a:t>
+              <a:t>Remote access and VPNs</a:t>
             </a:r>
           </a:p>
         </p:txBody>
@@ -9225,19 +12424,132 @@
       </p:sp>
       <p:sp>
         <p:nvSpPr>
-          <p:cNvPr id="6" name="Rounded Rectangle 5"/>
+          <p:cNvPr id="6" name="TextBox 5"/>
+          <p:cNvSpPr txBox="1"/>
+          <p:nvPr/>
+        </p:nvSpPr>
+        <p:spPr>
+          <a:xfrm>
+            <a:off x="548640" y="1554480"/>
+            <a:ext cx="6720840" cy="4617720"/>
+          </a:xfrm>
+          <a:prstGeom prst="rect">
+            <a:avLst/>
+          </a:prstGeom>
+          <a:noFill/>
+        </p:spPr>
+        <p:txBody>
+          <a:bodyPr wrap="square" lIns="0" rIns="0" tIns="0" bIns="0">
+            <a:spAutoFit/>
+          </a:bodyPr>
+          <a:lstStyle/>
+          <a:p>
+            <a:pPr>
+              <a:spcAft>
+                <a:spcPts val="1320"/>
+              </a:spcAft>
+            </a:pPr>
+            <a:r>
+              <a:rPr sz="2200" b="0">
+                <a:solidFill>
+                  <a:srgbClr val="202122"/>
+                </a:solidFill>
+                <a:latin typeface="Calibri"/>
+              </a:rPr>
+              <a:t>Remote access lets someone work away from the office as if they were connected to it: desktop sharing, remote support and off-site working. It's a key part of business continuity plans.</a:t>
+            </a:r>
+          </a:p>
+          <a:p>
+            <a:pPr>
+              <a:spcAft>
+                <a:spcPts val="1320"/>
+              </a:spcAft>
+            </a:pPr>
+            <a:r>
+              <a:rPr sz="2200" b="0">
+                <a:solidFill>
+                  <a:srgbClr val="202122"/>
+                </a:solidFill>
+                <a:latin typeface="Calibri"/>
+              </a:rPr>
+              <a:t>A VPN protects remote access by encrypting all traffic between the device and the organisation's network and hiding the device's own IP address.</a:t>
+            </a:r>
+          </a:p>
+          <a:p>
+            <a:pPr>
+              <a:spcAft>
+                <a:spcPts val="1320"/>
+              </a:spcAft>
+            </a:pPr>
+            <a:r>
+              <a:rPr sz="2200" b="0">
+                <a:solidFill>
+                  <a:srgbClr val="202122"/>
+                </a:solidFill>
+                <a:latin typeface="Calibri"/>
+              </a:rPr>
+              <a:t>Setting one up means choosing the security protocol and port, encryption settings and certificates, and how users authenticate, on both the server and the client.</a:t>
+            </a:r>
+          </a:p>
+        </p:txBody>
+      </p:sp>
+      <p:sp>
+        <p:nvSpPr>
+          <p:cNvPr id="7" name="Rounded Rectangle 6"/>
           <p:cNvSpPr/>
           <p:nvPr/>
         </p:nvSpPr>
         <p:spPr>
           <a:xfrm>
-            <a:off x="548640" y="1508760"/>
-            <a:ext cx="2011680" cy="457200"/>
+            <a:off x="7772400" y="1554480"/>
+            <a:ext cx="3867912" cy="4526280"/>
           </a:xfrm>
           <a:prstGeom prst="roundRect">
             <a:avLst>
-              <a:gd name="adj" fmla="val 50000"/>
+              <a:gd name="adj" fmla="val 8000"/>
             </a:avLst>
+          </a:prstGeom>
+          <a:solidFill>
+            <a:srgbClr val="03306E"/>
+          </a:solidFill>
+          <a:ln>
+            <a:noFill/>
+          </a:ln>
+          <a:effectLst/>
+        </p:spPr>
+        <p:style>
+          <a:lnRef idx="1">
+            <a:schemeClr val="accent1"/>
+          </a:lnRef>
+          <a:fillRef idx="3">
+            <a:schemeClr val="accent1"/>
+          </a:fillRef>
+          <a:effectRef idx="2">
+            <a:schemeClr val="accent1"/>
+          </a:effectRef>
+          <a:fontRef idx="minor">
+            <a:schemeClr val="lt1"/>
+          </a:fontRef>
+        </p:style>
+        <p:txBody>
+          <a:bodyPr rtlCol="0" anchor="ctr"/>
+          <a:lstStyle/>
+          <a:p/>
+        </p:txBody>
+      </p:sp>
+      <p:sp>
+        <p:nvSpPr>
+          <p:cNvPr id="8" name="Oval 7"/>
+          <p:cNvSpPr/>
+          <p:nvPr/>
+        </p:nvSpPr>
+        <p:spPr>
+          <a:xfrm>
+            <a:off x="8046720" y="1828800"/>
+            <a:ext cx="548640" cy="548640"/>
+          </a:xfrm>
+          <a:prstGeom prst="ellipse">
+            <a:avLst/>
           </a:prstGeom>
           <a:solidFill>
             <a:srgbClr val="4EA1FF"/>
@@ -9262,21 +12574,32 @@
           </a:fontRef>
         </p:style>
         <p:txBody>
-          <a:bodyPr rtlCol="0" anchor="ctr"/>
-          <a:lstStyle/>
-          <a:p/>
-        </p:txBody>
-      </p:sp>
-      <p:sp>
-        <p:nvSpPr>
-          <p:cNvPr id="7" name="TextBox 6"/>
+          <a:bodyPr rtlCol="0" anchor="ctr" lIns="0" rIns="0" tIns="0" bIns="0"/>
+          <a:lstStyle/>
+          <a:p>
+            <a:pPr algn="ctr"/>
+            <a:r>
+              <a:rPr sz="1300" b="1">
+                <a:solidFill>
+                  <a:srgbClr val="202122"/>
+                </a:solidFill>
+                <a:latin typeface="Calibri"/>
+              </a:rPr>
+              <a:t>e.g.</a:t>
+            </a:r>
+          </a:p>
+        </p:txBody>
+      </p:sp>
+      <p:sp>
+        <p:nvSpPr>
+          <p:cNvPr id="9" name="TextBox 8"/>
           <p:cNvSpPr txBox="1"/>
           <p:nvPr/>
         </p:nvSpPr>
         <p:spPr>
           <a:xfrm>
-            <a:off x="548640" y="1508760"/>
-            <a:ext cx="2011680" cy="457200"/>
+            <a:off x="8046720" y="2560320"/>
+            <a:ext cx="3291840" cy="365760"/>
           </a:xfrm>
           <a:prstGeom prst="rect">
             <a:avLst/>
@@ -9284,104 +12607,18 @@
           <a:noFill/>
         </p:spPr>
         <p:txBody>
-          <a:bodyPr wrap="square" anchor="ctr" lIns="0" rIns="0" tIns="0" bIns="0"/>
-          <a:lstStyle/>
-          <a:p>
-            <a:pPr algn="ctr"/>
-            <a:r>
-              <a:rPr sz="1400" b="1" i="0">
-                <a:solidFill>
-                  <a:srgbClr val="202122"/>
-                </a:solidFill>
-                <a:latin typeface="Calibri"/>
-              </a:rPr>
-              <a:t>20 minutes</a:t>
-            </a:r>
-          </a:p>
-        </p:txBody>
-      </p:sp>
-      <p:sp>
-        <p:nvSpPr>
-          <p:cNvPr id="8" name="TextBox 7"/>
-          <p:cNvSpPr txBox="1"/>
-          <p:nvPr/>
-        </p:nvSpPr>
-        <p:spPr>
-          <a:xfrm>
-            <a:off x="2743200" y="1508760"/>
-            <a:ext cx="4754880" cy="457200"/>
-          </a:xfrm>
-          <a:prstGeom prst="rect">
-            <a:avLst/>
-          </a:prstGeom>
-          <a:noFill/>
-        </p:spPr>
-        <p:txBody>
-          <a:bodyPr wrap="square" anchor="ctr" lIns="0" rIns="0" tIns="0" bIns="0"/>
+          <a:bodyPr wrap="square" anchor="t" lIns="0" rIns="0" tIns="0" bIns="0"/>
           <a:lstStyle/>
           <a:p>
             <a:pPr algn="l"/>
             <a:r>
-              <a:rPr sz="1400" b="0" i="1">
-                <a:solidFill>
-                  <a:srgbClr val="54595D"/>
-                </a:solidFill>
-                <a:latin typeface="Calibri"/>
-              </a:rPr>
-              <a:t>Pairs</a:t>
-            </a:r>
-          </a:p>
-        </p:txBody>
-      </p:sp>
-      <p:sp>
-        <p:nvSpPr>
-          <p:cNvPr id="9" name="Oval 8"/>
-          <p:cNvSpPr/>
-          <p:nvPr/>
-        </p:nvSpPr>
-        <p:spPr>
-          <a:xfrm>
-            <a:off x="548640" y="2482596"/>
-            <a:ext cx="384048" cy="384048"/>
-          </a:xfrm>
-          <a:prstGeom prst="ellipse">
-            <a:avLst/>
-          </a:prstGeom>
-          <a:solidFill>
-            <a:srgbClr val="0645AD"/>
-          </a:solidFill>
-          <a:ln>
-            <a:noFill/>
-          </a:ln>
-          <a:effectLst/>
-        </p:spPr>
-        <p:style>
-          <a:lnRef idx="1">
-            <a:schemeClr val="accent1"/>
-          </a:lnRef>
-          <a:fillRef idx="3">
-            <a:schemeClr val="accent1"/>
-          </a:fillRef>
-          <a:effectRef idx="2">
-            <a:schemeClr val="accent1"/>
-          </a:effectRef>
-          <a:fontRef idx="minor">
-            <a:schemeClr val="lt1"/>
-          </a:fontRef>
-        </p:style>
-        <p:txBody>
-          <a:bodyPr rtlCol="0" anchor="ctr" lIns="0" rIns="0" tIns="0" bIns="0"/>
-          <a:lstStyle/>
-          <a:p>
-            <a:pPr algn="ctr"/>
-            <a:r>
-              <a:rPr sz="1300" b="1">
-                <a:solidFill>
-                  <a:srgbClr val="FFFFFF"/>
-                </a:solidFill>
-                <a:latin typeface="Calibri"/>
-              </a:rPr>
-              <a:t>1</a:t>
+              <a:rPr sz="1300" b="1" i="0">
+                <a:solidFill>
+                  <a:srgbClr val="A9C8F0"/>
+                </a:solidFill>
+                <a:latin typeface="Calibri"/>
+              </a:rPr>
+              <a:t>EXAMPLE</a:t>
             </a:r>
           </a:p>
         </p:txBody>
@@ -9394,8 +12631,8 @@
         </p:nvSpPr>
         <p:spPr>
           <a:xfrm>
-            <a:off x="1143000" y="2240280"/>
-            <a:ext cx="5943600" cy="868680"/>
+            <a:off x="8046720" y="2971800"/>
+            <a:ext cx="3291840" cy="2971800"/>
           </a:xfrm>
           <a:prstGeom prst="rect">
             <a:avLst/>
@@ -9403,439 +12640,18 @@
           <a:noFill/>
         </p:spPr>
         <p:txBody>
-          <a:bodyPr wrap="square" anchor="ctr" lIns="0" rIns="0" tIns="0" bIns="0"/>
+          <a:bodyPr wrap="square" anchor="t" lIns="0" rIns="0" tIns="0" bIns="0"/>
           <a:lstStyle/>
           <a:p>
             <a:pPr algn="l"/>
             <a:r>
-              <a:rPr sz="1700" b="0" i="0">
-                <a:solidFill>
-                  <a:srgbClr val="202122"/>
-                </a:solidFill>
-                <a:latin typeface="Calibri"/>
-              </a:rPr>
-              <a:t>Set up a test account in a desktop mail client using IMAP and SMTP with TLS.</a:t>
-            </a:r>
-          </a:p>
-        </p:txBody>
-      </p:sp>
-      <p:sp>
-        <p:nvSpPr>
-          <p:cNvPr id="11" name="Oval 10"/>
-          <p:cNvSpPr/>
-          <p:nvPr/>
-        </p:nvSpPr>
-        <p:spPr>
-          <a:xfrm>
-            <a:off x="548640" y="3461004"/>
-            <a:ext cx="384048" cy="384048"/>
-          </a:xfrm>
-          <a:prstGeom prst="ellipse">
-            <a:avLst/>
-          </a:prstGeom>
-          <a:solidFill>
-            <a:srgbClr val="0645AD"/>
-          </a:solidFill>
-          <a:ln>
-            <a:noFill/>
-          </a:ln>
-          <a:effectLst/>
-        </p:spPr>
-        <p:style>
-          <a:lnRef idx="1">
-            <a:schemeClr val="accent1"/>
-          </a:lnRef>
-          <a:fillRef idx="3">
-            <a:schemeClr val="accent1"/>
-          </a:fillRef>
-          <a:effectRef idx="2">
-            <a:schemeClr val="accent1"/>
-          </a:effectRef>
-          <a:fontRef idx="minor">
-            <a:schemeClr val="lt1"/>
-          </a:fontRef>
-        </p:style>
-        <p:txBody>
-          <a:bodyPr rtlCol="0" anchor="ctr" lIns="0" rIns="0" tIns="0" bIns="0"/>
-          <a:lstStyle/>
-          <a:p>
-            <a:pPr algn="ctr"/>
-            <a:r>
-              <a:rPr sz="1300" b="1">
+              <a:rPr sz="1900" b="0" i="0">
                 <a:solidFill>
                   <a:srgbClr val="FFFFFF"/>
                 </a:solidFill>
-                <a:latin typeface="Calibri"/>
-              </a:rPr>
-              <a:t>2</a:t>
-            </a:r>
-          </a:p>
-        </p:txBody>
-      </p:sp>
-      <p:sp>
-        <p:nvSpPr>
-          <p:cNvPr id="12" name="TextBox 11"/>
-          <p:cNvSpPr txBox="1"/>
-          <p:nvPr/>
-        </p:nvSpPr>
-        <p:spPr>
-          <a:xfrm>
-            <a:off x="1143000" y="3218688"/>
-            <a:ext cx="5943600" cy="868680"/>
-          </a:xfrm>
-          <a:prstGeom prst="rect">
-            <a:avLst/>
-          </a:prstGeom>
-          <a:noFill/>
-        </p:spPr>
-        <p:txBody>
-          <a:bodyPr wrap="square" anchor="ctr" lIns="0" rIns="0" tIns="0" bIns="0"/>
-          <a:lstStyle/>
-          <a:p>
-            <a:pPr algn="l"/>
-            <a:r>
-              <a:rPr sz="1700" b="0" i="0">
-                <a:solidFill>
-                  <a:srgbClr val="202122"/>
-                </a:solidFill>
-                <a:latin typeface="Calibri"/>
-              </a:rPr>
-              <a:t>Record the server names and ports used.</a:t>
-            </a:r>
-          </a:p>
-        </p:txBody>
-      </p:sp>
-      <p:sp>
-        <p:nvSpPr>
-          <p:cNvPr id="13" name="Oval 12"/>
-          <p:cNvSpPr/>
-          <p:nvPr/>
-        </p:nvSpPr>
-        <p:spPr>
-          <a:xfrm>
-            <a:off x="548640" y="4439412"/>
-            <a:ext cx="384048" cy="384048"/>
-          </a:xfrm>
-          <a:prstGeom prst="ellipse">
-            <a:avLst/>
-          </a:prstGeom>
-          <a:solidFill>
-            <a:srgbClr val="0645AD"/>
-          </a:solidFill>
-          <a:ln>
-            <a:noFill/>
-          </a:ln>
-          <a:effectLst/>
-        </p:spPr>
-        <p:style>
-          <a:lnRef idx="1">
-            <a:schemeClr val="accent1"/>
-          </a:lnRef>
-          <a:fillRef idx="3">
-            <a:schemeClr val="accent1"/>
-          </a:fillRef>
-          <a:effectRef idx="2">
-            <a:schemeClr val="accent1"/>
-          </a:effectRef>
-          <a:fontRef idx="minor">
-            <a:schemeClr val="lt1"/>
-          </a:fontRef>
-        </p:style>
-        <p:txBody>
-          <a:bodyPr rtlCol="0" anchor="ctr" lIns="0" rIns="0" tIns="0" bIns="0"/>
-          <a:lstStyle/>
-          <a:p>
-            <a:pPr algn="ctr"/>
-            <a:r>
-              <a:rPr sz="1300" b="1">
-                <a:solidFill>
-                  <a:srgbClr val="FFFFFF"/>
-                </a:solidFill>
-                <a:latin typeface="Calibri"/>
-              </a:rPr>
-              <a:t>3</a:t>
-            </a:r>
-          </a:p>
-        </p:txBody>
-      </p:sp>
-      <p:sp>
-        <p:nvSpPr>
-          <p:cNvPr id="14" name="TextBox 13"/>
-          <p:cNvSpPr txBox="1"/>
-          <p:nvPr/>
-        </p:nvSpPr>
-        <p:spPr>
-          <a:xfrm>
-            <a:off x="1143000" y="4197096"/>
-            <a:ext cx="5943600" cy="868680"/>
-          </a:xfrm>
-          <a:prstGeom prst="rect">
-            <a:avLst/>
-          </a:prstGeom>
-          <a:noFill/>
-        </p:spPr>
-        <p:txBody>
-          <a:bodyPr wrap="square" anchor="ctr" lIns="0" rIns="0" tIns="0" bIns="0"/>
-          <a:lstStyle/>
-          <a:p>
-            <a:pPr algn="l"/>
-            <a:r>
-              <a:rPr sz="1700" b="0" i="0">
-                <a:solidFill>
-                  <a:srgbClr val="202122"/>
-                </a:solidFill>
-                <a:latin typeface="Calibri"/>
-              </a:rPr>
-              <a:t>Explain why you chose IMAP over POP3 for a user with three devices.</a:t>
-            </a:r>
-          </a:p>
-        </p:txBody>
-      </p:sp>
-      <p:sp>
-        <p:nvSpPr>
-          <p:cNvPr id="15" name="Oval 14"/>
-          <p:cNvSpPr/>
-          <p:nvPr/>
-        </p:nvSpPr>
-        <p:spPr>
-          <a:xfrm>
-            <a:off x="548640" y="5417820"/>
-            <a:ext cx="384048" cy="384048"/>
-          </a:xfrm>
-          <a:prstGeom prst="ellipse">
-            <a:avLst/>
-          </a:prstGeom>
-          <a:solidFill>
-            <a:srgbClr val="0645AD"/>
-          </a:solidFill>
-          <a:ln>
-            <a:noFill/>
-          </a:ln>
-          <a:effectLst/>
-        </p:spPr>
-        <p:style>
-          <a:lnRef idx="1">
-            <a:schemeClr val="accent1"/>
-          </a:lnRef>
-          <a:fillRef idx="3">
-            <a:schemeClr val="accent1"/>
-          </a:fillRef>
-          <a:effectRef idx="2">
-            <a:schemeClr val="accent1"/>
-          </a:effectRef>
-          <a:fontRef idx="minor">
-            <a:schemeClr val="lt1"/>
-          </a:fontRef>
-        </p:style>
-        <p:txBody>
-          <a:bodyPr rtlCol="0" anchor="ctr" lIns="0" rIns="0" tIns="0" bIns="0"/>
-          <a:lstStyle/>
-          <a:p>
-            <a:pPr algn="ctr"/>
-            <a:r>
-              <a:rPr sz="1300" b="1">
-                <a:solidFill>
-                  <a:srgbClr val="FFFFFF"/>
-                </a:solidFill>
-                <a:latin typeface="Calibri"/>
-              </a:rPr>
-              <a:t>4</a:t>
-            </a:r>
-          </a:p>
-        </p:txBody>
-      </p:sp>
-      <p:sp>
-        <p:nvSpPr>
-          <p:cNvPr id="16" name="TextBox 15"/>
-          <p:cNvSpPr txBox="1"/>
-          <p:nvPr/>
-        </p:nvSpPr>
-        <p:spPr>
-          <a:xfrm>
-            <a:off x="1143000" y="5175504"/>
-            <a:ext cx="5943600" cy="868680"/>
-          </a:xfrm>
-          <a:prstGeom prst="rect">
-            <a:avLst/>
-          </a:prstGeom>
-          <a:noFill/>
-        </p:spPr>
-        <p:txBody>
-          <a:bodyPr wrap="square" anchor="ctr" lIns="0" rIns="0" tIns="0" bIns="0"/>
-          <a:lstStyle/>
-          <a:p>
-            <a:pPr algn="l"/>
-            <a:r>
-              <a:rPr sz="1700" b="0" i="0">
-                <a:solidFill>
-                  <a:srgbClr val="202122"/>
-                </a:solidFill>
-                <a:latin typeface="Calibri"/>
-              </a:rPr>
-              <a:t>Add a corporate signature that follows a given policy.</a:t>
-            </a:r>
-          </a:p>
-        </p:txBody>
-      </p:sp>
-      <p:sp>
-        <p:nvSpPr>
-          <p:cNvPr id="17" name="Rounded Rectangle 16"/>
-          <p:cNvSpPr/>
-          <p:nvPr/>
-        </p:nvSpPr>
-        <p:spPr>
-          <a:xfrm>
-            <a:off x="7772400" y="1508760"/>
-            <a:ext cx="3867912" cy="4572000"/>
-          </a:xfrm>
-          <a:prstGeom prst="roundRect">
-            <a:avLst>
-              <a:gd name="adj" fmla="val 8000"/>
-            </a:avLst>
-          </a:prstGeom>
-          <a:solidFill>
-            <a:srgbClr val="EAF3FF"/>
-          </a:solidFill>
-          <a:ln>
-            <a:noFill/>
-          </a:ln>
-          <a:effectLst/>
-        </p:spPr>
-        <p:style>
-          <a:lnRef idx="1">
-            <a:schemeClr val="accent1"/>
-          </a:lnRef>
-          <a:fillRef idx="3">
-            <a:schemeClr val="accent1"/>
-          </a:fillRef>
-          <a:effectRef idx="2">
-            <a:schemeClr val="accent1"/>
-          </a:effectRef>
-          <a:fontRef idx="minor">
-            <a:schemeClr val="lt1"/>
-          </a:fontRef>
-        </p:style>
-        <p:txBody>
-          <a:bodyPr rtlCol="0" anchor="ctr"/>
-          <a:lstStyle/>
-          <a:p/>
-        </p:txBody>
-      </p:sp>
-      <p:sp>
-        <p:nvSpPr>
-          <p:cNvPr id="18" name="TextBox 17"/>
-          <p:cNvSpPr txBox="1"/>
-          <p:nvPr/>
-        </p:nvSpPr>
-        <p:spPr>
-          <a:xfrm>
-            <a:off x="8046720" y="1737360"/>
-            <a:ext cx="3291840" cy="365760"/>
-          </a:xfrm>
-          <a:prstGeom prst="rect">
-            <a:avLst/>
-          </a:prstGeom>
-          <a:noFill/>
-        </p:spPr>
-        <p:txBody>
-          <a:bodyPr wrap="square" anchor="t" lIns="0" rIns="0" tIns="0" bIns="0"/>
-          <a:lstStyle/>
-          <a:p>
-            <a:pPr algn="l"/>
-            <a:r>
-              <a:rPr sz="1300" b="1" i="0">
-                <a:solidFill>
-                  <a:srgbClr val="0645AD"/>
-                </a:solidFill>
-                <a:latin typeface="Calibri"/>
-              </a:rPr>
-              <a:t>SUCCESS CRITERIA</a:t>
-            </a:r>
-          </a:p>
-        </p:txBody>
-      </p:sp>
-      <p:sp>
-        <p:nvSpPr>
-          <p:cNvPr id="19" name="TextBox 18"/>
-          <p:cNvSpPr txBox="1"/>
-          <p:nvPr/>
-        </p:nvSpPr>
-        <p:spPr>
-          <a:xfrm>
-            <a:off x="8046720" y="2240280"/>
-            <a:ext cx="3337560" cy="3657600"/>
-          </a:xfrm>
-          <a:prstGeom prst="rect">
-            <a:avLst/>
-          </a:prstGeom>
-          <a:noFill/>
-        </p:spPr>
-        <p:txBody>
-          <a:bodyPr wrap="square" lIns="0" rIns="0" tIns="0" bIns="0">
-            <a:spAutoFit/>
-          </a:bodyPr>
-          <a:lstStyle/>
-          <a:p>
-            <a:pPr marL="274320" indent="-274320">
-              <a:spcAft>
-                <a:spcPts val="810"/>
-              </a:spcAft>
-              <a:buClr>
-                <a:srgbClr val="0645AD"/>
-              </a:buClr>
-              <a:buFont typeface="Arial"/>
-              <a:buChar char="•"/>
-            </a:pPr>
-            <a:r>
-              <a:rPr sz="1800" b="0">
-                <a:solidFill>
-                  <a:srgbClr val="202122"/>
-                </a:solidFill>
-                <a:latin typeface="Calibri"/>
-              </a:rPr>
-              <a:t>Mail sends and receives</a:t>
-            </a:r>
-          </a:p>
-          <a:p>
-            <a:pPr marL="274320" indent="-274320">
-              <a:spcAft>
-                <a:spcPts val="810"/>
-              </a:spcAft>
-              <a:buClr>
-                <a:srgbClr val="0645AD"/>
-              </a:buClr>
-              <a:buFont typeface="Arial"/>
-              <a:buChar char="•"/>
-            </a:pPr>
-            <a:r>
-              <a:rPr sz="1800" b="0">
-                <a:solidFill>
-                  <a:srgbClr val="202122"/>
-                </a:solidFill>
-                <a:latin typeface="Calibri"/>
-              </a:rPr>
-              <a:t>Encrypted ports used</a:t>
-            </a:r>
-          </a:p>
-          <a:p>
-            <a:pPr marL="274320" indent="-274320">
-              <a:spcAft>
-                <a:spcPts val="810"/>
-              </a:spcAft>
-              <a:buClr>
-                <a:srgbClr val="0645AD"/>
-              </a:buClr>
-              <a:buFont typeface="Arial"/>
-              <a:buChar char="•"/>
-            </a:pPr>
-            <a:r>
-              <a:rPr sz="1800" b="0">
-                <a:solidFill>
-                  <a:srgbClr val="202122"/>
-                </a:solidFill>
-                <a:latin typeface="Calibri"/>
-              </a:rPr>
-              <a:t>Choice of protocol justified</a:t>
+                <a:latin typeface="Cambria"/>
+              </a:rPr>
+              <a:t>When snow closes the office, staff connect through the VPN from home and carry on working securely, as planned in the BCP.</a:t>
             </a:r>
           </a:p>
         </p:txBody>
